--- a/Applied Econ Analysis HCRIS Presentation.pptx
+++ b/Applied Econ Analysis HCRIS Presentation.pptx
@@ -5,7 +5,7 @@
     <p:sldMasterId id="2147483653" r:id="rId1"/>
   </p:sldMasterIdLst>
   <p:notesMasterIdLst>
-    <p:notesMasterId r:id="rId24"/>
+    <p:notesMasterId r:id="rId26"/>
   </p:notesMasterIdLst>
   <p:sldIdLst>
     <p:sldId id="261" r:id="rId2"/>
@@ -16,20 +16,22 @@
     <p:sldId id="322" r:id="rId7"/>
     <p:sldId id="321" r:id="rId8"/>
     <p:sldId id="323" r:id="rId9"/>
-    <p:sldId id="338" r:id="rId10"/>
-    <p:sldId id="324" r:id="rId11"/>
-    <p:sldId id="325" r:id="rId12"/>
-    <p:sldId id="327" r:id="rId13"/>
-    <p:sldId id="334" r:id="rId14"/>
-    <p:sldId id="330" r:id="rId15"/>
-    <p:sldId id="332" r:id="rId16"/>
-    <p:sldId id="331" r:id="rId17"/>
-    <p:sldId id="333" r:id="rId18"/>
-    <p:sldId id="335" r:id="rId19"/>
-    <p:sldId id="336" r:id="rId20"/>
-    <p:sldId id="337" r:id="rId21"/>
-    <p:sldId id="339" r:id="rId22"/>
-    <p:sldId id="340" r:id="rId23"/>
+    <p:sldId id="341" r:id="rId10"/>
+    <p:sldId id="338" r:id="rId11"/>
+    <p:sldId id="324" r:id="rId12"/>
+    <p:sldId id="325" r:id="rId13"/>
+    <p:sldId id="327" r:id="rId14"/>
+    <p:sldId id="334" r:id="rId15"/>
+    <p:sldId id="330" r:id="rId16"/>
+    <p:sldId id="332" r:id="rId17"/>
+    <p:sldId id="331" r:id="rId18"/>
+    <p:sldId id="333" r:id="rId19"/>
+    <p:sldId id="335" r:id="rId20"/>
+    <p:sldId id="336" r:id="rId21"/>
+    <p:sldId id="342" r:id="rId22"/>
+    <p:sldId id="337" r:id="rId23"/>
+    <p:sldId id="339" r:id="rId24"/>
+    <p:sldId id="340" r:id="rId25"/>
   </p:sldIdLst>
   <p:sldSz cx="12192000" cy="6858000"/>
   <p:notesSz cx="6858000" cy="9144000"/>
@@ -292,7 +294,7 @@
 <file path=ppt/revisionInfo.xml><?xml version="1.0" encoding="utf-8"?>
 <p1510:revInfo xmlns:a="http://schemas.openxmlformats.org/drawingml/2006/main" xmlns:r="http://schemas.openxmlformats.org/officeDocument/2006/relationships" xmlns:p1510="http://schemas.microsoft.com/office/powerpoint/2015/10/main">
   <p1510:revLst>
-    <p1510:client id="{36199A5D-9277-4804-85C6-255B79650EC9}" v="529" dt="2026-04-20T02:36:09.174"/>
+    <p1510:client id="{36199A5D-9277-4804-85C6-255B79650EC9}" v="556" dt="2026-04-20T13:26:44.241"/>
   </p1510:revLst>
 </p1510:revInfo>
 </file>
@@ -302,7 +304,7 @@
   <pc:docChgLst>
     <pc:chgData name="Maughan, Matthew" userId="5b506559-2742-4d2b-9b68-5b6ca2cdd9c0" providerId="ADAL" clId="{65F86579-F59A-44FA-B179-98A7BD5A0995}"/>
     <pc:docChg chg="undo custSel addSld delSld modSld sldOrd delMainMaster modMainMaster">
-      <pc:chgData name="Maughan, Matthew" userId="5b506559-2742-4d2b-9b68-5b6ca2cdd9c0" providerId="ADAL" clId="{65F86579-F59A-44FA-B179-98A7BD5A0995}" dt="2026-04-20T02:43:16.076" v="11762" actId="47"/>
+      <pc:chgData name="Maughan, Matthew" userId="5b506559-2742-4d2b-9b68-5b6ca2cdd9c0" providerId="ADAL" clId="{65F86579-F59A-44FA-B179-98A7BD5A0995}" dt="2026-04-20T13:27:19.901" v="12718" actId="1582"/>
       <pc:docMkLst>
         <pc:docMk/>
       </pc:docMkLst>
@@ -2072,13 +2074,13 @@
         </pc:spChg>
       </pc:sldChg>
       <pc:sldChg chg="addSp delSp modSp new mod">
-        <pc:chgData name="Maughan, Matthew" userId="5b506559-2742-4d2b-9b68-5b6ca2cdd9c0" providerId="ADAL" clId="{65F86579-F59A-44FA-B179-98A7BD5A0995}" dt="2026-04-20T02:12:13.040" v="10344" actId="14100"/>
+        <pc:chgData name="Maughan, Matthew" userId="5b506559-2742-4d2b-9b68-5b6ca2cdd9c0" providerId="ADAL" clId="{65F86579-F59A-44FA-B179-98A7BD5A0995}" dt="2026-04-20T11:57:49.904" v="11992" actId="732"/>
         <pc:sldMkLst>
           <pc:docMk/>
           <pc:sldMk cId="1793856232" sldId="338"/>
         </pc:sldMkLst>
         <pc:spChg chg="mod">
-          <ac:chgData name="Maughan, Matthew" userId="5b506559-2742-4d2b-9b68-5b6ca2cdd9c0" providerId="ADAL" clId="{65F86579-F59A-44FA-B179-98A7BD5A0995}" dt="2026-04-20T02:11:43.274" v="10340" actId="20577"/>
+          <ac:chgData name="Maughan, Matthew" userId="5b506559-2742-4d2b-9b68-5b6ca2cdd9c0" providerId="ADAL" clId="{65F86579-F59A-44FA-B179-98A7BD5A0995}" dt="2026-04-20T11:53:19.237" v="11921" actId="20577"/>
           <ac:spMkLst>
             <pc:docMk/>
             <pc:sldMk cId="1793856232" sldId="338"/>
@@ -2093,22 +2095,150 @@
             <ac:spMk id="3" creationId="{9BD2C92E-3E8E-3972-249D-AF3414CA2E8D}"/>
           </ac:spMkLst>
         </pc:spChg>
-        <pc:spChg chg="add mod">
-          <ac:chgData name="Maughan, Matthew" userId="5b506559-2742-4d2b-9b68-5b6ca2cdd9c0" providerId="ADAL" clId="{65F86579-F59A-44FA-B179-98A7BD5A0995}" dt="2026-04-20T02:12:13.040" v="10344" actId="14100"/>
+        <pc:spChg chg="add del mod">
+          <ac:chgData name="Maughan, Matthew" userId="5b506559-2742-4d2b-9b68-5b6ca2cdd9c0" providerId="ADAL" clId="{65F86579-F59A-44FA-B179-98A7BD5A0995}" dt="2026-04-20T11:52:39.226" v="11792" actId="478"/>
           <ac:spMkLst>
             <pc:docMk/>
             <pc:sldMk cId="1793856232" sldId="338"/>
             <ac:spMk id="6" creationId="{18EDB9F5-8E5A-4A2B-4697-84BC1C3E3431}"/>
           </ac:spMkLst>
         </pc:spChg>
-        <pc:picChg chg="add mod">
-          <ac:chgData name="Maughan, Matthew" userId="5b506559-2742-4d2b-9b68-5b6ca2cdd9c0" providerId="ADAL" clId="{65F86579-F59A-44FA-B179-98A7BD5A0995}" dt="2026-04-20T02:11:25.675" v="10286" actId="1076"/>
+        <pc:spChg chg="add mod">
+          <ac:chgData name="Maughan, Matthew" userId="5b506559-2742-4d2b-9b68-5b6ca2cdd9c0" providerId="ADAL" clId="{65F86579-F59A-44FA-B179-98A7BD5A0995}" dt="2026-04-20T11:52:29.221" v="11788" actId="1076"/>
+          <ac:spMkLst>
+            <pc:docMk/>
+            <pc:sldMk cId="1793856232" sldId="338"/>
+            <ac:spMk id="13" creationId="{EEE539FF-1BA7-4A80-861C-04BD22159FC8}"/>
+          </ac:spMkLst>
+        </pc:spChg>
+        <pc:spChg chg="add mod">
+          <ac:chgData name="Maughan, Matthew" userId="5b506559-2742-4d2b-9b68-5b6ca2cdd9c0" providerId="ADAL" clId="{65F86579-F59A-44FA-B179-98A7BD5A0995}" dt="2026-04-20T11:54:10.315" v="11933" actId="14100"/>
+          <ac:spMkLst>
+            <pc:docMk/>
+            <pc:sldMk cId="1793856232" sldId="338"/>
+            <ac:spMk id="16" creationId="{0795D249-8FA3-2907-F23F-515BFE69F51E}"/>
+          </ac:spMkLst>
+        </pc:spChg>
+        <pc:spChg chg="add mod">
+          <ac:chgData name="Maughan, Matthew" userId="5b506559-2742-4d2b-9b68-5b6ca2cdd9c0" providerId="ADAL" clId="{65F86579-F59A-44FA-B179-98A7BD5A0995}" dt="2026-04-20T11:54:21.503" v="11938" actId="14100"/>
+          <ac:spMkLst>
+            <pc:docMk/>
+            <pc:sldMk cId="1793856232" sldId="338"/>
+            <ac:spMk id="17" creationId="{8390B743-AE49-E95E-FE1B-4CD7D1A03362}"/>
+          </ac:spMkLst>
+        </pc:spChg>
+        <pc:spChg chg="add mod">
+          <ac:chgData name="Maughan, Matthew" userId="5b506559-2742-4d2b-9b68-5b6ca2cdd9c0" providerId="ADAL" clId="{65F86579-F59A-44FA-B179-98A7BD5A0995}" dt="2026-04-20T11:54:35.474" v="11943" actId="14100"/>
+          <ac:spMkLst>
+            <pc:docMk/>
+            <pc:sldMk cId="1793856232" sldId="338"/>
+            <ac:spMk id="18" creationId="{FF45FADE-7E9B-4513-B793-9D8A03584061}"/>
+          </ac:spMkLst>
+        </pc:spChg>
+        <pc:spChg chg="add mod">
+          <ac:chgData name="Maughan, Matthew" userId="5b506559-2742-4d2b-9b68-5b6ca2cdd9c0" providerId="ADAL" clId="{65F86579-F59A-44FA-B179-98A7BD5A0995}" dt="2026-04-20T11:57:28.172" v="11990" actId="14100"/>
+          <ac:spMkLst>
+            <pc:docMk/>
+            <pc:sldMk cId="1793856232" sldId="338"/>
+            <ac:spMk id="24" creationId="{8C2B2715-DBF9-019A-9FB9-C86E4CE58B9C}"/>
+          </ac:spMkLst>
+        </pc:spChg>
+        <pc:spChg chg="add mod">
+          <ac:chgData name="Maughan, Matthew" userId="5b506559-2742-4d2b-9b68-5b6ca2cdd9c0" providerId="ADAL" clId="{65F86579-F59A-44FA-B179-98A7BD5A0995}" dt="2026-04-20T11:57:15.270" v="11987" actId="1076"/>
+          <ac:spMkLst>
+            <pc:docMk/>
+            <pc:sldMk cId="1793856232" sldId="338"/>
+            <ac:spMk id="30" creationId="{66F14A6C-D78A-11FA-ACBB-23F03579D78C}"/>
+          </ac:spMkLst>
+        </pc:spChg>
+        <pc:spChg chg="add mod">
+          <ac:chgData name="Maughan, Matthew" userId="5b506559-2742-4d2b-9b68-5b6ca2cdd9c0" providerId="ADAL" clId="{65F86579-F59A-44FA-B179-98A7BD5A0995}" dt="2026-04-20T11:57:05.945" v="11984" actId="1076"/>
+          <ac:spMkLst>
+            <pc:docMk/>
+            <pc:sldMk cId="1793856232" sldId="338"/>
+            <ac:spMk id="35" creationId="{E7CDCD43-7376-9EA5-6A73-553041BBA8CA}"/>
+          </ac:spMkLst>
+        </pc:spChg>
+        <pc:spChg chg="add mod">
+          <ac:chgData name="Maughan, Matthew" userId="5b506559-2742-4d2b-9b68-5b6ca2cdd9c0" providerId="ADAL" clId="{65F86579-F59A-44FA-B179-98A7BD5A0995}" dt="2026-04-20T11:57:20.695" v="11988" actId="1076"/>
+          <ac:spMkLst>
+            <pc:docMk/>
+            <pc:sldMk cId="1793856232" sldId="338"/>
+            <ac:spMk id="37" creationId="{ECFBEC8B-E80C-C750-E401-996BFA3F0AD6}"/>
+          </ac:spMkLst>
+        </pc:spChg>
+        <pc:picChg chg="add del mod">
+          <ac:chgData name="Maughan, Matthew" userId="5b506559-2742-4d2b-9b68-5b6ca2cdd9c0" providerId="ADAL" clId="{65F86579-F59A-44FA-B179-98A7BD5A0995}" dt="2026-04-20T11:52:36.877" v="11791" actId="478"/>
           <ac:picMkLst>
             <pc:docMk/>
             <pc:sldMk cId="1793856232" sldId="338"/>
             <ac:picMk id="5" creationId="{E7E4F23F-232D-C75C-C3DE-6E6120F33B51}"/>
           </ac:picMkLst>
         </pc:picChg>
+        <pc:picChg chg="add mod">
+          <ac:chgData name="Maughan, Matthew" userId="5b506559-2742-4d2b-9b68-5b6ca2cdd9c0" providerId="ADAL" clId="{65F86579-F59A-44FA-B179-98A7BD5A0995}" dt="2026-04-20T11:54:25.336" v="11941" actId="1076"/>
+          <ac:picMkLst>
+            <pc:docMk/>
+            <pc:sldMk cId="1793856232" sldId="338"/>
+            <ac:picMk id="8" creationId="{DF234898-5E52-A789-B539-1850E8AAEDB0}"/>
+          </ac:picMkLst>
+        </pc:picChg>
+        <pc:picChg chg="add del mod">
+          <ac:chgData name="Maughan, Matthew" userId="5b506559-2742-4d2b-9b68-5b6ca2cdd9c0" providerId="ADAL" clId="{65F86579-F59A-44FA-B179-98A7BD5A0995}" dt="2026-04-20T11:51:20.031" v="11771" actId="478"/>
+          <ac:picMkLst>
+            <pc:docMk/>
+            <pc:sldMk cId="1793856232" sldId="338"/>
+            <ac:picMk id="10" creationId="{96867AF9-D28C-9023-FD5A-F1BD20CA4D1D}"/>
+          </ac:picMkLst>
+        </pc:picChg>
+        <pc:picChg chg="add del mod modCrop">
+          <ac:chgData name="Maughan, Matthew" userId="5b506559-2742-4d2b-9b68-5b6ca2cdd9c0" providerId="ADAL" clId="{65F86579-F59A-44FA-B179-98A7BD5A0995}" dt="2026-04-20T11:53:33.704" v="11922" actId="478"/>
+          <ac:picMkLst>
+            <pc:docMk/>
+            <pc:sldMk cId="1793856232" sldId="338"/>
+            <ac:picMk id="12" creationId="{30576D6A-7718-0240-F517-95838DABA55C}"/>
+          </ac:picMkLst>
+        </pc:picChg>
+        <pc:picChg chg="add mod modCrop">
+          <ac:chgData name="Maughan, Matthew" userId="5b506559-2742-4d2b-9b68-5b6ca2cdd9c0" providerId="ADAL" clId="{65F86579-F59A-44FA-B179-98A7BD5A0995}" dt="2026-04-20T11:57:49.904" v="11992" actId="732"/>
+          <ac:picMkLst>
+            <pc:docMk/>
+            <pc:sldMk cId="1793856232" sldId="338"/>
+            <ac:picMk id="15" creationId="{8A1641A2-AEEB-6BB2-9D15-935019B20AA1}"/>
+          </ac:picMkLst>
+        </pc:picChg>
+        <pc:picChg chg="add mod">
+          <ac:chgData name="Maughan, Matthew" userId="5b506559-2742-4d2b-9b68-5b6ca2cdd9c0" providerId="ADAL" clId="{65F86579-F59A-44FA-B179-98A7BD5A0995}" dt="2026-04-20T11:55:59.094" v="11964"/>
+          <ac:picMkLst>
+            <pc:docMk/>
+            <pc:sldMk cId="1793856232" sldId="338"/>
+            <ac:picMk id="34" creationId="{EE284852-3CF4-83D1-074C-202117A1A7D5}"/>
+          </ac:picMkLst>
+        </pc:picChg>
+        <pc:cxnChg chg="add mod">
+          <ac:chgData name="Maughan, Matthew" userId="5b506559-2742-4d2b-9b68-5b6ca2cdd9c0" providerId="ADAL" clId="{65F86579-F59A-44FA-B179-98A7BD5A0995}" dt="2026-04-20T11:57:28.172" v="11990" actId="14100"/>
+          <ac:cxnSpMkLst>
+            <pc:docMk/>
+            <pc:sldMk cId="1793856232" sldId="338"/>
+            <ac:cxnSpMk id="20" creationId="{16BA41F6-8E87-97F6-0B2C-7C210EE1B3FB}"/>
+          </ac:cxnSpMkLst>
+        </pc:cxnChg>
+        <pc:cxnChg chg="add mod">
+          <ac:chgData name="Maughan, Matthew" userId="5b506559-2742-4d2b-9b68-5b6ca2cdd9c0" providerId="ADAL" clId="{65F86579-F59A-44FA-B179-98A7BD5A0995}" dt="2026-04-20T11:57:15.270" v="11987" actId="1076"/>
+          <ac:cxnSpMkLst>
+            <pc:docMk/>
+            <pc:sldMk cId="1793856232" sldId="338"/>
+            <ac:cxnSpMk id="27" creationId="{7C6DF5FF-44DD-4BB7-8E4F-18FE00492451}"/>
+          </ac:cxnSpMkLst>
+        </pc:cxnChg>
+        <pc:cxnChg chg="add mod">
+          <ac:chgData name="Maughan, Matthew" userId="5b506559-2742-4d2b-9b68-5b6ca2cdd9c0" providerId="ADAL" clId="{65F86579-F59A-44FA-B179-98A7BD5A0995}" dt="2026-04-20T11:57:08.765" v="11985" actId="14100"/>
+          <ac:cxnSpMkLst>
+            <pc:docMk/>
+            <pc:sldMk cId="1793856232" sldId="338"/>
+            <ac:cxnSpMk id="32" creationId="{AE69BF75-03D6-27D1-8D54-BD795E9C1E10}"/>
+          </ac:cxnSpMkLst>
+        </pc:cxnChg>
       </pc:sldChg>
       <pc:sldChg chg="modSp new del mod">
         <pc:chgData name="Maughan, Matthew" userId="5b506559-2742-4d2b-9b68-5b6ca2cdd9c0" providerId="ADAL" clId="{65F86579-F59A-44FA-B179-98A7BD5A0995}" dt="2026-04-20T02:01:18.142" v="9967" actId="2696"/>
@@ -2162,6 +2292,172 @@
             <ac:spMk id="2" creationId="{0A9436E5-E652-0BE0-6FB6-6829EE9F2D7B}"/>
           </ac:spMkLst>
         </pc:spChg>
+      </pc:sldChg>
+      <pc:sldChg chg="addSp delSp modSp new mod ord">
+        <pc:chgData name="Maughan, Matthew" userId="5b506559-2742-4d2b-9b68-5b6ca2cdd9c0" providerId="ADAL" clId="{65F86579-F59A-44FA-B179-98A7BD5A0995}" dt="2026-04-20T12:05:27.594" v="12643" actId="1076"/>
+        <pc:sldMkLst>
+          <pc:docMk/>
+          <pc:sldMk cId="830435065" sldId="341"/>
+        </pc:sldMkLst>
+        <pc:spChg chg="mod">
+          <ac:chgData name="Maughan, Matthew" userId="5b506559-2742-4d2b-9b68-5b6ca2cdd9c0" providerId="ADAL" clId="{65F86579-F59A-44FA-B179-98A7BD5A0995}" dt="2026-04-20T12:03:51.969" v="12506" actId="20577"/>
+          <ac:spMkLst>
+            <pc:docMk/>
+            <pc:sldMk cId="830435065" sldId="341"/>
+            <ac:spMk id="2" creationId="{13104400-8AC1-5F9C-C971-CB835F546D92}"/>
+          </ac:spMkLst>
+        </pc:spChg>
+        <pc:spChg chg="del">
+          <ac:chgData name="Maughan, Matthew" userId="5b506559-2742-4d2b-9b68-5b6ca2cdd9c0" providerId="ADAL" clId="{65F86579-F59A-44FA-B179-98A7BD5A0995}" dt="2026-04-20T12:01:10.828" v="12039" actId="478"/>
+          <ac:spMkLst>
+            <pc:docMk/>
+            <pc:sldMk cId="830435065" sldId="341"/>
+            <ac:spMk id="3" creationId="{73399A7F-4BDB-56EE-D0C9-BCD05DCEF523}"/>
+          </ac:spMkLst>
+        </pc:spChg>
+        <pc:spChg chg="add mod">
+          <ac:chgData name="Maughan, Matthew" userId="5b506559-2742-4d2b-9b68-5b6ca2cdd9c0" providerId="ADAL" clId="{65F86579-F59A-44FA-B179-98A7BD5A0995}" dt="2026-04-20T12:05:15.434" v="12638" actId="1076"/>
+          <ac:spMkLst>
+            <pc:docMk/>
+            <pc:sldMk cId="830435065" sldId="341"/>
+            <ac:spMk id="6" creationId="{E0A43209-10A6-AD39-FFD5-14DE0491A2DD}"/>
+          </ac:spMkLst>
+        </pc:spChg>
+        <pc:spChg chg="add mod">
+          <ac:chgData name="Maughan, Matthew" userId="5b506559-2742-4d2b-9b68-5b6ca2cdd9c0" providerId="ADAL" clId="{65F86579-F59A-44FA-B179-98A7BD5A0995}" dt="2026-04-20T12:05:27.594" v="12643" actId="1076"/>
+          <ac:spMkLst>
+            <pc:docMk/>
+            <pc:sldMk cId="830435065" sldId="341"/>
+            <ac:spMk id="7" creationId="{847370E8-E29F-56E9-6E12-B5D494A35D94}"/>
+          </ac:spMkLst>
+        </pc:spChg>
+        <pc:graphicFrameChg chg="add del mod modGraphic">
+          <ac:chgData name="Maughan, Matthew" userId="5b506559-2742-4d2b-9b68-5b6ca2cdd9c0" providerId="ADAL" clId="{65F86579-F59A-44FA-B179-98A7BD5A0995}" dt="2026-04-20T12:00:02.521" v="11995" actId="478"/>
+          <ac:graphicFrameMkLst>
+            <pc:docMk/>
+            <pc:sldMk cId="830435065" sldId="341"/>
+            <ac:graphicFrameMk id="4" creationId="{909C9A55-2D66-2D83-89DC-7C321DF72055}"/>
+          </ac:graphicFrameMkLst>
+        </pc:graphicFrameChg>
+        <pc:graphicFrameChg chg="add mod modGraphic">
+          <ac:chgData name="Maughan, Matthew" userId="5b506559-2742-4d2b-9b68-5b6ca2cdd9c0" providerId="ADAL" clId="{65F86579-F59A-44FA-B179-98A7BD5A0995}" dt="2026-04-20T12:05:03.506" v="12636" actId="14100"/>
+          <ac:graphicFrameMkLst>
+            <pc:docMk/>
+            <pc:sldMk cId="830435065" sldId="341"/>
+            <ac:graphicFrameMk id="5" creationId="{A5E3F56D-02AC-2EA7-BEE4-25A7ABAD130A}"/>
+          </ac:graphicFrameMkLst>
+        </pc:graphicFrameChg>
+      </pc:sldChg>
+      <pc:sldChg chg="addSp delSp modSp new mod">
+        <pc:chgData name="Maughan, Matthew" userId="5b506559-2742-4d2b-9b68-5b6ca2cdd9c0" providerId="ADAL" clId="{65F86579-F59A-44FA-B179-98A7BD5A0995}" dt="2026-04-20T13:27:19.901" v="12718" actId="1582"/>
+        <pc:sldMkLst>
+          <pc:docMk/>
+          <pc:sldMk cId="1877210090" sldId="342"/>
+        </pc:sldMkLst>
+        <pc:spChg chg="mod">
+          <ac:chgData name="Maughan, Matthew" userId="5b506559-2742-4d2b-9b68-5b6ca2cdd9c0" providerId="ADAL" clId="{65F86579-F59A-44FA-B179-98A7BD5A0995}" dt="2026-04-20T13:18:18.546" v="12658" actId="20577"/>
+          <ac:spMkLst>
+            <pc:docMk/>
+            <pc:sldMk cId="1877210090" sldId="342"/>
+            <ac:spMk id="2" creationId="{5BB1F44D-D1E0-E8DC-67A8-0E633A6510B8}"/>
+          </ac:spMkLst>
+        </pc:spChg>
+        <pc:spChg chg="del">
+          <ac:chgData name="Maughan, Matthew" userId="5b506559-2742-4d2b-9b68-5b6ca2cdd9c0" providerId="ADAL" clId="{65F86579-F59A-44FA-B179-98A7BD5A0995}" dt="2026-04-20T13:20:15.341" v="12674" actId="478"/>
+          <ac:spMkLst>
+            <pc:docMk/>
+            <pc:sldMk cId="1877210090" sldId="342"/>
+            <ac:spMk id="3" creationId="{098F8E97-A353-9BD8-5AFB-8E7A0B72CA32}"/>
+          </ac:spMkLst>
+        </pc:spChg>
+        <pc:spChg chg="add mod">
+          <ac:chgData name="Maughan, Matthew" userId="5b506559-2742-4d2b-9b68-5b6ca2cdd9c0" providerId="ADAL" clId="{65F86579-F59A-44FA-B179-98A7BD5A0995}" dt="2026-04-20T13:20:02.761" v="12672" actId="1076"/>
+          <ac:spMkLst>
+            <pc:docMk/>
+            <pc:sldMk cId="1877210090" sldId="342"/>
+            <ac:spMk id="8" creationId="{51668F7F-8161-DE1F-6586-F301F64D8BC2}"/>
+          </ac:spMkLst>
+        </pc:spChg>
+        <pc:spChg chg="add mod">
+          <ac:chgData name="Maughan, Matthew" userId="5b506559-2742-4d2b-9b68-5b6ca2cdd9c0" providerId="ADAL" clId="{65F86579-F59A-44FA-B179-98A7BD5A0995}" dt="2026-04-20T13:26:43.426" v="12712" actId="1076"/>
+          <ac:spMkLst>
+            <pc:docMk/>
+            <pc:sldMk cId="1877210090" sldId="342"/>
+            <ac:spMk id="19" creationId="{645E4633-B7FE-3178-DF3C-2BC41D0DF201}"/>
+          </ac:spMkLst>
+        </pc:spChg>
+        <pc:spChg chg="add mod">
+          <ac:chgData name="Maughan, Matthew" userId="5b506559-2742-4d2b-9b68-5b6ca2cdd9c0" providerId="ADAL" clId="{65F86579-F59A-44FA-B179-98A7BD5A0995}" dt="2026-04-20T13:26:46.231" v="12714" actId="1076"/>
+          <ac:spMkLst>
+            <pc:docMk/>
+            <pc:sldMk cId="1877210090" sldId="342"/>
+            <ac:spMk id="20" creationId="{78C43373-5703-DD30-D890-3854ABAAFBF6}"/>
+          </ac:spMkLst>
+        </pc:spChg>
+        <pc:picChg chg="add mod">
+          <ac:chgData name="Maughan, Matthew" userId="5b506559-2742-4d2b-9b68-5b6ca2cdd9c0" providerId="ADAL" clId="{65F86579-F59A-44FA-B179-98A7BD5A0995}" dt="2026-04-20T13:19:17.585" v="12664" actId="1076"/>
+          <ac:picMkLst>
+            <pc:docMk/>
+            <pc:sldMk cId="1877210090" sldId="342"/>
+            <ac:picMk id="5" creationId="{769DF296-E308-DAE5-E067-8BBC5D27FBE6}"/>
+          </ac:picMkLst>
+        </pc:picChg>
+        <pc:picChg chg="add del mod">
+          <ac:chgData name="Maughan, Matthew" userId="5b506559-2742-4d2b-9b68-5b6ca2cdd9c0" providerId="ADAL" clId="{65F86579-F59A-44FA-B179-98A7BD5A0995}" dt="2026-04-20T13:23:33.068" v="12680" actId="478"/>
+          <ac:picMkLst>
+            <pc:docMk/>
+            <pc:sldMk cId="1877210090" sldId="342"/>
+            <ac:picMk id="7" creationId="{AE86E872-14D6-9FB2-FA6D-7301697686A0}"/>
+          </ac:picMkLst>
+        </pc:picChg>
+        <pc:picChg chg="add del mod">
+          <ac:chgData name="Maughan, Matthew" userId="5b506559-2742-4d2b-9b68-5b6ca2cdd9c0" providerId="ADAL" clId="{65F86579-F59A-44FA-B179-98A7BD5A0995}" dt="2026-04-20T13:23:56.731" v="12686" actId="478"/>
+          <ac:picMkLst>
+            <pc:docMk/>
+            <pc:sldMk cId="1877210090" sldId="342"/>
+            <ac:picMk id="10" creationId="{0921D0C2-2B0C-2494-152E-50DAC32682C9}"/>
+          </ac:picMkLst>
+        </pc:picChg>
+        <pc:picChg chg="add mod">
+          <ac:chgData name="Maughan, Matthew" userId="5b506559-2742-4d2b-9b68-5b6ca2cdd9c0" providerId="ADAL" clId="{65F86579-F59A-44FA-B179-98A7BD5A0995}" dt="2026-04-20T13:26:29.925" v="12707" actId="1076"/>
+          <ac:picMkLst>
+            <pc:docMk/>
+            <pc:sldMk cId="1877210090" sldId="342"/>
+            <ac:picMk id="12" creationId="{327C9D0C-2A8E-EA71-F349-4E43471FF9D1}"/>
+          </ac:picMkLst>
+        </pc:picChg>
+        <pc:picChg chg="add mod modCrop">
+          <ac:chgData name="Maughan, Matthew" userId="5b506559-2742-4d2b-9b68-5b6ca2cdd9c0" providerId="ADAL" clId="{65F86579-F59A-44FA-B179-98A7BD5A0995}" dt="2026-04-20T13:26:13.131" v="12702" actId="1076"/>
+          <ac:picMkLst>
+            <pc:docMk/>
+            <pc:sldMk cId="1877210090" sldId="342"/>
+            <ac:picMk id="14" creationId="{4F7C296E-FB91-D17D-4E74-7D645D646C89}"/>
+          </ac:picMkLst>
+        </pc:picChg>
+        <pc:picChg chg="add mod">
+          <ac:chgData name="Maughan, Matthew" userId="5b506559-2742-4d2b-9b68-5b6ca2cdd9c0" providerId="ADAL" clId="{65F86579-F59A-44FA-B179-98A7BD5A0995}" dt="2026-04-20T13:26:32.164" v="12708" actId="1076"/>
+          <ac:picMkLst>
+            <pc:docMk/>
+            <pc:sldMk cId="1877210090" sldId="342"/>
+            <ac:picMk id="16" creationId="{66C2EF87-9561-5E32-BEED-EDBE4C929436}"/>
+          </ac:picMkLst>
+        </pc:picChg>
+        <pc:picChg chg="add mod">
+          <ac:chgData name="Maughan, Matthew" userId="5b506559-2742-4d2b-9b68-5b6ca2cdd9c0" providerId="ADAL" clId="{65F86579-F59A-44FA-B179-98A7BD5A0995}" dt="2026-04-20T13:26:34.533" v="12710" actId="1440"/>
+          <ac:picMkLst>
+            <pc:docMk/>
+            <pc:sldMk cId="1877210090" sldId="342"/>
+            <ac:picMk id="18" creationId="{F40C4C6F-C4FA-D716-1027-556DC573B90B}"/>
+          </ac:picMkLst>
+        </pc:picChg>
+        <pc:cxnChg chg="add mod">
+          <ac:chgData name="Maughan, Matthew" userId="5b506559-2742-4d2b-9b68-5b6ca2cdd9c0" providerId="ADAL" clId="{65F86579-F59A-44FA-B179-98A7BD5A0995}" dt="2026-04-20T13:27:19.901" v="12718" actId="1582"/>
+          <ac:cxnSpMkLst>
+            <pc:docMk/>
+            <pc:sldMk cId="1877210090" sldId="342"/>
+            <ac:cxnSpMk id="22" creationId="{F9530F24-A264-A820-F7AD-B5523E410009}"/>
+          </ac:cxnSpMkLst>
+        </pc:cxnChg>
       </pc:sldChg>
       <pc:sldMasterChg chg="del delSldLayout">
         <pc:chgData name="Maughan, Matthew" userId="5b506559-2742-4d2b-9b68-5b6ca2cdd9c0" providerId="ADAL" clId="{65F86579-F59A-44FA-B179-98A7BD5A0995}" dt="2026-04-20T02:43:16.076" v="11762" actId="47"/>
@@ -2276,6 +2572,3166 @@
     </pc:docChg>
   </pc:docChgLst>
 </pc:chgInfo>
+</file>
+
+<file path=ppt/diagrams/colors1.xml><?xml version="1.0" encoding="utf-8"?>
+<dgm:colorsDef xmlns:dgm="http://schemas.openxmlformats.org/drawingml/2006/diagram" xmlns:a="http://schemas.openxmlformats.org/drawingml/2006/main" uniqueId="urn:microsoft.com/office/officeart/2005/8/colors/colorful5">
+  <dgm:title val=""/>
+  <dgm:desc val=""/>
+  <dgm:catLst>
+    <dgm:cat type="colorful" pri="10500"/>
+  </dgm:catLst>
+  <dgm:styleLbl name="node0">
+    <dgm:fillClrLst meth="repeat">
+      <a:schemeClr val="accent4"/>
+    </dgm:fillClrLst>
+    <dgm:linClrLst meth="repeat">
+      <a:schemeClr val="lt1"/>
+    </dgm:linClrLst>
+    <dgm:effectClrLst/>
+    <dgm:txLinClrLst/>
+    <dgm:txFillClrLst/>
+    <dgm:txEffectClrLst/>
+  </dgm:styleLbl>
+  <dgm:styleLbl name="node1">
+    <dgm:fillClrLst>
+      <a:schemeClr val="accent5"/>
+      <a:schemeClr val="accent6"/>
+    </dgm:fillClrLst>
+    <dgm:linClrLst meth="repeat">
+      <a:schemeClr val="lt1"/>
+    </dgm:linClrLst>
+    <dgm:effectClrLst/>
+    <dgm:txLinClrLst/>
+    <dgm:txFillClrLst/>
+    <dgm:txEffectClrLst/>
+  </dgm:styleLbl>
+  <dgm:styleLbl name="alignNode1">
+    <dgm:fillClrLst>
+      <a:schemeClr val="accent5"/>
+      <a:schemeClr val="accent6"/>
+    </dgm:fillClrLst>
+    <dgm:linClrLst>
+      <a:schemeClr val="accent5"/>
+      <a:schemeClr val="accent6"/>
+    </dgm:linClrLst>
+    <dgm:effectClrLst/>
+    <dgm:txLinClrLst/>
+    <dgm:txFillClrLst/>
+    <dgm:txEffectClrLst/>
+  </dgm:styleLbl>
+  <dgm:styleLbl name="lnNode1">
+    <dgm:fillClrLst>
+      <a:schemeClr val="accent5"/>
+      <a:schemeClr val="accent6"/>
+    </dgm:fillClrLst>
+    <dgm:linClrLst meth="repeat">
+      <a:schemeClr val="lt1"/>
+    </dgm:linClrLst>
+    <dgm:effectClrLst/>
+    <dgm:txLinClrLst/>
+    <dgm:txFillClrLst/>
+    <dgm:txEffectClrLst/>
+  </dgm:styleLbl>
+  <dgm:styleLbl name="vennNode1">
+    <dgm:fillClrLst>
+      <a:schemeClr val="accent5">
+        <a:alpha val="50000"/>
+      </a:schemeClr>
+      <a:schemeClr val="accent6">
+        <a:alpha val="50000"/>
+      </a:schemeClr>
+    </dgm:fillClrLst>
+    <dgm:linClrLst meth="repeat">
+      <a:schemeClr val="lt1"/>
+    </dgm:linClrLst>
+    <dgm:effectClrLst/>
+    <dgm:txLinClrLst/>
+    <dgm:txFillClrLst/>
+    <dgm:txEffectClrLst/>
+  </dgm:styleLbl>
+  <dgm:styleLbl name="node2">
+    <dgm:fillClrLst>
+      <a:schemeClr val="accent6"/>
+    </dgm:fillClrLst>
+    <dgm:linClrLst meth="repeat">
+      <a:schemeClr val="lt1"/>
+    </dgm:linClrLst>
+    <dgm:effectClrLst/>
+    <dgm:txLinClrLst/>
+    <dgm:txFillClrLst/>
+    <dgm:txEffectClrLst/>
+  </dgm:styleLbl>
+  <dgm:styleLbl name="node3">
+    <dgm:fillClrLst>
+      <a:schemeClr val="accent1"/>
+    </dgm:fillClrLst>
+    <dgm:linClrLst meth="repeat">
+      <a:schemeClr val="lt1"/>
+    </dgm:linClrLst>
+    <dgm:effectClrLst/>
+    <dgm:txLinClrLst/>
+    <dgm:txFillClrLst/>
+    <dgm:txEffectClrLst/>
+  </dgm:styleLbl>
+  <dgm:styleLbl name="node4">
+    <dgm:fillClrLst>
+      <a:schemeClr val="accent2"/>
+    </dgm:fillClrLst>
+    <dgm:linClrLst meth="repeat">
+      <a:schemeClr val="lt1"/>
+    </dgm:linClrLst>
+    <dgm:effectClrLst/>
+    <dgm:txLinClrLst/>
+    <dgm:txFillClrLst/>
+    <dgm:txEffectClrLst/>
+  </dgm:styleLbl>
+  <dgm:styleLbl name="fgImgPlace1">
+    <dgm:fillClrLst>
+      <a:schemeClr val="accent5">
+        <a:tint val="50000"/>
+      </a:schemeClr>
+      <a:schemeClr val="accent6">
+        <a:tint val="50000"/>
+      </a:schemeClr>
+    </dgm:fillClrLst>
+    <dgm:linClrLst meth="repeat">
+      <a:schemeClr val="lt1"/>
+    </dgm:linClrLst>
+    <dgm:effectClrLst/>
+    <dgm:txLinClrLst/>
+    <dgm:txFillClrLst meth="repeat">
+      <a:schemeClr val="lt1"/>
+    </dgm:txFillClrLst>
+    <dgm:txEffectClrLst/>
+  </dgm:styleLbl>
+  <dgm:styleLbl name="alignImgPlace1">
+    <dgm:fillClrLst>
+      <a:schemeClr val="accent5">
+        <a:tint val="50000"/>
+      </a:schemeClr>
+      <a:schemeClr val="accent6">
+        <a:tint val="20000"/>
+      </a:schemeClr>
+    </dgm:fillClrLst>
+    <dgm:linClrLst meth="repeat">
+      <a:schemeClr val="lt1"/>
+    </dgm:linClrLst>
+    <dgm:effectClrLst/>
+    <dgm:txLinClrLst/>
+    <dgm:txFillClrLst meth="repeat">
+      <a:schemeClr val="lt1"/>
+    </dgm:txFillClrLst>
+    <dgm:txEffectClrLst/>
+  </dgm:styleLbl>
+  <dgm:styleLbl name="bgImgPlace1">
+    <dgm:fillClrLst>
+      <a:schemeClr val="accent5">
+        <a:tint val="50000"/>
+      </a:schemeClr>
+      <a:schemeClr val="accent6">
+        <a:tint val="20000"/>
+      </a:schemeClr>
+    </dgm:fillClrLst>
+    <dgm:linClrLst meth="repeat">
+      <a:schemeClr val="lt1"/>
+    </dgm:linClrLst>
+    <dgm:effectClrLst/>
+    <dgm:txLinClrLst/>
+    <dgm:txFillClrLst meth="repeat">
+      <a:schemeClr val="lt1"/>
+    </dgm:txFillClrLst>
+    <dgm:txEffectClrLst/>
+  </dgm:styleLbl>
+  <dgm:styleLbl name="sibTrans2D1">
+    <dgm:fillClrLst>
+      <a:schemeClr val="accent5"/>
+      <a:schemeClr val="accent6"/>
+    </dgm:fillClrLst>
+    <dgm:linClrLst meth="repeat">
+      <a:schemeClr val="lt1"/>
+    </dgm:linClrLst>
+    <dgm:effectClrLst/>
+    <dgm:txLinClrLst/>
+    <dgm:txFillClrLst/>
+    <dgm:txEffectClrLst/>
+  </dgm:styleLbl>
+  <dgm:styleLbl name="fgSibTrans2D1">
+    <dgm:fillClrLst>
+      <a:schemeClr val="accent5"/>
+      <a:schemeClr val="accent6"/>
+    </dgm:fillClrLst>
+    <dgm:linClrLst meth="repeat">
+      <a:schemeClr val="lt1"/>
+    </dgm:linClrLst>
+    <dgm:effectClrLst/>
+    <dgm:txLinClrLst/>
+    <dgm:txFillClrLst meth="repeat">
+      <a:schemeClr val="lt1"/>
+    </dgm:txFillClrLst>
+    <dgm:txEffectClrLst/>
+  </dgm:styleLbl>
+  <dgm:styleLbl name="bgSibTrans2D1">
+    <dgm:fillClrLst>
+      <a:schemeClr val="accent5"/>
+      <a:schemeClr val="accent6"/>
+    </dgm:fillClrLst>
+    <dgm:linClrLst meth="repeat">
+      <a:schemeClr val="lt1"/>
+    </dgm:linClrLst>
+    <dgm:effectClrLst/>
+    <dgm:txLinClrLst/>
+    <dgm:txFillClrLst meth="repeat">
+      <a:schemeClr val="lt1"/>
+    </dgm:txFillClrLst>
+    <dgm:txEffectClrLst/>
+  </dgm:styleLbl>
+  <dgm:styleLbl name="sibTrans1D1">
+    <dgm:fillClrLst/>
+    <dgm:linClrLst>
+      <a:schemeClr val="accent5"/>
+      <a:schemeClr val="accent6"/>
+    </dgm:linClrLst>
+    <dgm:effectClrLst/>
+    <dgm:txLinClrLst/>
+    <dgm:txFillClrLst meth="repeat">
+      <a:schemeClr val="tx1"/>
+    </dgm:txFillClrLst>
+    <dgm:txEffectClrLst/>
+  </dgm:styleLbl>
+  <dgm:styleLbl name="callout">
+    <dgm:fillClrLst meth="repeat">
+      <a:schemeClr val="accent5"/>
+    </dgm:fillClrLst>
+    <dgm:linClrLst meth="repeat">
+      <a:schemeClr val="accent5">
+        <a:tint val="50000"/>
+      </a:schemeClr>
+    </dgm:linClrLst>
+    <dgm:effectClrLst/>
+    <dgm:txLinClrLst/>
+    <dgm:txFillClrLst meth="repeat">
+      <a:schemeClr val="tx1"/>
+    </dgm:txFillClrLst>
+    <dgm:txEffectClrLst/>
+  </dgm:styleLbl>
+  <dgm:styleLbl name="asst0">
+    <dgm:fillClrLst meth="repeat">
+      <a:schemeClr val="accent5"/>
+    </dgm:fillClrLst>
+    <dgm:linClrLst meth="repeat">
+      <a:schemeClr val="lt1">
+        <a:shade val="80000"/>
+      </a:schemeClr>
+    </dgm:linClrLst>
+    <dgm:effectClrLst/>
+    <dgm:txLinClrLst/>
+    <dgm:txFillClrLst/>
+    <dgm:txEffectClrLst/>
+  </dgm:styleLbl>
+  <dgm:styleLbl name="asst1">
+    <dgm:fillClrLst meth="repeat">
+      <a:schemeClr val="accent6"/>
+    </dgm:fillClrLst>
+    <dgm:linClrLst meth="repeat">
+      <a:schemeClr val="lt1">
+        <a:shade val="80000"/>
+      </a:schemeClr>
+    </dgm:linClrLst>
+    <dgm:effectClrLst/>
+    <dgm:txLinClrLst/>
+    <dgm:txFillClrLst/>
+    <dgm:txEffectClrLst/>
+  </dgm:styleLbl>
+  <dgm:styleLbl name="asst2">
+    <dgm:fillClrLst>
+      <a:schemeClr val="accent1"/>
+    </dgm:fillClrLst>
+    <dgm:linClrLst meth="repeat">
+      <a:schemeClr val="lt1"/>
+    </dgm:linClrLst>
+    <dgm:effectClrLst/>
+    <dgm:txLinClrLst/>
+    <dgm:txFillClrLst/>
+    <dgm:txEffectClrLst/>
+  </dgm:styleLbl>
+  <dgm:styleLbl name="asst3">
+    <dgm:fillClrLst>
+      <a:schemeClr val="accent2"/>
+    </dgm:fillClrLst>
+    <dgm:linClrLst meth="repeat">
+      <a:schemeClr val="lt1"/>
+    </dgm:linClrLst>
+    <dgm:effectClrLst/>
+    <dgm:txLinClrLst/>
+    <dgm:txFillClrLst/>
+    <dgm:txEffectClrLst/>
+  </dgm:styleLbl>
+  <dgm:styleLbl name="asst4">
+    <dgm:fillClrLst>
+      <a:schemeClr val="accent3"/>
+    </dgm:fillClrLst>
+    <dgm:linClrLst meth="repeat">
+      <a:schemeClr val="lt1"/>
+    </dgm:linClrLst>
+    <dgm:effectClrLst/>
+    <dgm:txLinClrLst/>
+    <dgm:txFillClrLst/>
+    <dgm:txEffectClrLst/>
+  </dgm:styleLbl>
+  <dgm:styleLbl name="parChTrans2D1">
+    <dgm:fillClrLst meth="repeat">
+      <a:schemeClr val="accent5"/>
+    </dgm:fillClrLst>
+    <dgm:linClrLst meth="repeat">
+      <a:schemeClr val="lt1"/>
+    </dgm:linClrLst>
+    <dgm:effectClrLst/>
+    <dgm:txLinClrLst/>
+    <dgm:txFillClrLst meth="repeat">
+      <a:schemeClr val="lt1"/>
+    </dgm:txFillClrLst>
+    <dgm:txEffectClrLst/>
+  </dgm:styleLbl>
+  <dgm:styleLbl name="parChTrans2D2">
+    <dgm:fillClrLst meth="repeat">
+      <a:schemeClr val="accent6"/>
+    </dgm:fillClrLst>
+    <dgm:linClrLst meth="repeat">
+      <a:schemeClr val="lt1"/>
+    </dgm:linClrLst>
+    <dgm:effectClrLst/>
+    <dgm:txLinClrLst/>
+    <dgm:txFillClrLst/>
+    <dgm:txEffectClrLst/>
+  </dgm:styleLbl>
+  <dgm:styleLbl name="parChTrans2D3">
+    <dgm:fillClrLst meth="repeat">
+      <a:schemeClr val="accent6"/>
+    </dgm:fillClrLst>
+    <dgm:linClrLst meth="repeat">
+      <a:schemeClr val="lt1"/>
+    </dgm:linClrLst>
+    <dgm:effectClrLst/>
+    <dgm:txLinClrLst/>
+    <dgm:txFillClrLst/>
+    <dgm:txEffectClrLst/>
+  </dgm:styleLbl>
+  <dgm:styleLbl name="parChTrans2D4">
+    <dgm:fillClrLst meth="repeat">
+      <a:schemeClr val="accent1"/>
+    </dgm:fillClrLst>
+    <dgm:linClrLst meth="repeat">
+      <a:schemeClr val="lt1"/>
+    </dgm:linClrLst>
+    <dgm:effectClrLst/>
+    <dgm:txLinClrLst/>
+    <dgm:txFillClrLst meth="repeat">
+      <a:schemeClr val="lt1"/>
+    </dgm:txFillClrLst>
+    <dgm:txEffectClrLst/>
+  </dgm:styleLbl>
+  <dgm:styleLbl name="parChTrans1D1">
+    <dgm:fillClrLst meth="repeat">
+      <a:schemeClr val="accent5"/>
+    </dgm:fillClrLst>
+    <dgm:linClrLst meth="repeat">
+      <a:schemeClr val="accent5"/>
+    </dgm:linClrLst>
+    <dgm:effectClrLst/>
+    <dgm:txLinClrLst/>
+    <dgm:txFillClrLst meth="repeat">
+      <a:schemeClr val="tx1"/>
+    </dgm:txFillClrLst>
+    <dgm:txEffectClrLst/>
+  </dgm:styleLbl>
+  <dgm:styleLbl name="parChTrans1D2">
+    <dgm:fillClrLst meth="repeat">
+      <a:schemeClr val="accent6">
+        <a:tint val="90000"/>
+      </a:schemeClr>
+    </dgm:fillClrLst>
+    <dgm:linClrLst meth="repeat">
+      <a:schemeClr val="accent6"/>
+    </dgm:linClrLst>
+    <dgm:effectClrLst/>
+    <dgm:txLinClrLst/>
+    <dgm:txFillClrLst meth="repeat">
+      <a:schemeClr val="tx1"/>
+    </dgm:txFillClrLst>
+    <dgm:txEffectClrLst/>
+  </dgm:styleLbl>
+  <dgm:styleLbl name="parChTrans1D3">
+    <dgm:fillClrLst meth="repeat">
+      <a:schemeClr val="accent6">
+        <a:tint val="70000"/>
+      </a:schemeClr>
+    </dgm:fillClrLst>
+    <dgm:linClrLst meth="repeat">
+      <a:schemeClr val="accent1"/>
+    </dgm:linClrLst>
+    <dgm:effectClrLst/>
+    <dgm:txLinClrLst/>
+    <dgm:txFillClrLst meth="repeat">
+      <a:schemeClr val="tx1"/>
+    </dgm:txFillClrLst>
+    <dgm:txEffectClrLst/>
+  </dgm:styleLbl>
+  <dgm:styleLbl name="parChTrans1D4">
+    <dgm:fillClrLst meth="repeat">
+      <a:schemeClr val="accent6">
+        <a:tint val="50000"/>
+      </a:schemeClr>
+    </dgm:fillClrLst>
+    <dgm:linClrLst meth="repeat">
+      <a:schemeClr val="accent2"/>
+    </dgm:linClrLst>
+    <dgm:effectClrLst/>
+    <dgm:txLinClrLst/>
+    <dgm:txFillClrLst meth="repeat">
+      <a:schemeClr val="tx1"/>
+    </dgm:txFillClrLst>
+    <dgm:txEffectClrLst/>
+  </dgm:styleLbl>
+  <dgm:styleLbl name="fgAcc1">
+    <dgm:fillClrLst meth="repeat">
+      <a:schemeClr val="lt1">
+        <a:alpha val="90000"/>
+      </a:schemeClr>
+    </dgm:fillClrLst>
+    <dgm:linClrLst>
+      <a:schemeClr val="accent5"/>
+      <a:schemeClr val="accent6"/>
+    </dgm:linClrLst>
+    <dgm:effectClrLst/>
+    <dgm:txLinClrLst/>
+    <dgm:txFillClrLst meth="repeat">
+      <a:schemeClr val="dk1"/>
+    </dgm:txFillClrLst>
+    <dgm:txEffectClrLst/>
+  </dgm:styleLbl>
+  <dgm:styleLbl name="conFgAcc1">
+    <dgm:fillClrLst meth="repeat">
+      <a:schemeClr val="lt1">
+        <a:alpha val="90000"/>
+      </a:schemeClr>
+    </dgm:fillClrLst>
+    <dgm:linClrLst>
+      <a:schemeClr val="accent5"/>
+      <a:schemeClr val="accent6"/>
+    </dgm:linClrLst>
+    <dgm:effectClrLst/>
+    <dgm:txLinClrLst/>
+    <dgm:txFillClrLst meth="repeat">
+      <a:schemeClr val="dk1"/>
+    </dgm:txFillClrLst>
+    <dgm:txEffectClrLst/>
+  </dgm:styleLbl>
+  <dgm:styleLbl name="alignAcc1">
+    <dgm:fillClrLst meth="repeat">
+      <a:schemeClr val="lt1">
+        <a:alpha val="90000"/>
+      </a:schemeClr>
+    </dgm:fillClrLst>
+    <dgm:linClrLst>
+      <a:schemeClr val="accent5"/>
+      <a:schemeClr val="accent6"/>
+    </dgm:linClrLst>
+    <dgm:effectClrLst/>
+    <dgm:txLinClrLst/>
+    <dgm:txFillClrLst meth="repeat">
+      <a:schemeClr val="dk1"/>
+    </dgm:txFillClrLst>
+    <dgm:txEffectClrLst/>
+  </dgm:styleLbl>
+  <dgm:styleLbl name="trAlignAcc1">
+    <dgm:fillClrLst meth="repeat">
+      <a:schemeClr val="lt1">
+        <a:alpha val="40000"/>
+      </a:schemeClr>
+    </dgm:fillClrLst>
+    <dgm:linClrLst meth="repeat">
+      <a:schemeClr val="accent5"/>
+    </dgm:linClrLst>
+    <dgm:effectClrLst/>
+    <dgm:txLinClrLst/>
+    <dgm:txFillClrLst meth="repeat">
+      <a:schemeClr val="dk1"/>
+    </dgm:txFillClrLst>
+    <dgm:txEffectClrLst/>
+  </dgm:styleLbl>
+  <dgm:styleLbl name="bgAcc1">
+    <dgm:fillClrLst meth="repeat">
+      <a:schemeClr val="lt1">
+        <a:alpha val="90000"/>
+      </a:schemeClr>
+    </dgm:fillClrLst>
+    <dgm:linClrLst>
+      <a:schemeClr val="accent5"/>
+      <a:schemeClr val="accent6"/>
+    </dgm:linClrLst>
+    <dgm:effectClrLst/>
+    <dgm:txLinClrLst/>
+    <dgm:txFillClrLst meth="repeat">
+      <a:schemeClr val="dk1"/>
+    </dgm:txFillClrLst>
+    <dgm:txEffectClrLst/>
+  </dgm:styleLbl>
+  <dgm:styleLbl name="solidFgAcc1">
+    <dgm:fillClrLst meth="repeat">
+      <a:schemeClr val="lt1"/>
+    </dgm:fillClrLst>
+    <dgm:linClrLst>
+      <a:schemeClr val="accent5"/>
+      <a:schemeClr val="accent6"/>
+    </dgm:linClrLst>
+    <dgm:effectClrLst/>
+    <dgm:txLinClrLst/>
+    <dgm:txFillClrLst meth="repeat">
+      <a:schemeClr val="dk1"/>
+    </dgm:txFillClrLst>
+    <dgm:txEffectClrLst/>
+  </dgm:styleLbl>
+  <dgm:styleLbl name="solidAlignAcc1">
+    <dgm:fillClrLst meth="repeat">
+      <a:schemeClr val="lt1"/>
+    </dgm:fillClrLst>
+    <dgm:linClrLst>
+      <a:schemeClr val="accent5"/>
+      <a:schemeClr val="accent6"/>
+    </dgm:linClrLst>
+    <dgm:effectClrLst/>
+    <dgm:txLinClrLst/>
+    <dgm:txFillClrLst meth="repeat">
+      <a:schemeClr val="dk1"/>
+    </dgm:txFillClrLst>
+    <dgm:txEffectClrLst/>
+  </dgm:styleLbl>
+  <dgm:styleLbl name="solidBgAcc1">
+    <dgm:fillClrLst meth="repeat">
+      <a:schemeClr val="lt1"/>
+    </dgm:fillClrLst>
+    <dgm:linClrLst>
+      <a:schemeClr val="accent5"/>
+      <a:schemeClr val="accent6"/>
+    </dgm:linClrLst>
+    <dgm:effectClrLst/>
+    <dgm:txLinClrLst/>
+    <dgm:txFillClrLst meth="repeat">
+      <a:schemeClr val="dk1"/>
+    </dgm:txFillClrLst>
+    <dgm:txEffectClrLst/>
+  </dgm:styleLbl>
+  <dgm:styleLbl name="fgAccFollowNode1">
+    <dgm:fillClrLst>
+      <a:schemeClr val="accent5">
+        <a:tint val="40000"/>
+        <a:alpha val="90000"/>
+      </a:schemeClr>
+      <a:schemeClr val="accent6">
+        <a:tint val="40000"/>
+        <a:alpha val="90000"/>
+      </a:schemeClr>
+    </dgm:fillClrLst>
+    <dgm:linClrLst>
+      <a:schemeClr val="accent5">
+        <a:tint val="40000"/>
+        <a:alpha val="90000"/>
+      </a:schemeClr>
+      <a:schemeClr val="accent5">
+        <a:tint val="40000"/>
+        <a:alpha val="90000"/>
+      </a:schemeClr>
+    </dgm:linClrLst>
+    <dgm:effectClrLst/>
+    <dgm:txLinClrLst/>
+    <dgm:txFillClrLst meth="repeat">
+      <a:schemeClr val="dk1"/>
+    </dgm:txFillClrLst>
+    <dgm:txEffectClrLst/>
+  </dgm:styleLbl>
+  <dgm:styleLbl name="alignAccFollowNode1">
+    <dgm:fillClrLst>
+      <a:schemeClr val="accent5">
+        <a:tint val="40000"/>
+        <a:alpha val="90000"/>
+      </a:schemeClr>
+      <a:schemeClr val="accent6">
+        <a:tint val="40000"/>
+        <a:alpha val="90000"/>
+      </a:schemeClr>
+    </dgm:fillClrLst>
+    <dgm:linClrLst>
+      <a:schemeClr val="accent5">
+        <a:tint val="40000"/>
+        <a:alpha val="90000"/>
+      </a:schemeClr>
+      <a:schemeClr val="accent6">
+        <a:tint val="40000"/>
+        <a:alpha val="90000"/>
+      </a:schemeClr>
+    </dgm:linClrLst>
+    <dgm:effectClrLst/>
+    <dgm:txLinClrLst/>
+    <dgm:txFillClrLst meth="repeat">
+      <a:schemeClr val="dk1"/>
+    </dgm:txFillClrLst>
+    <dgm:txEffectClrLst/>
+  </dgm:styleLbl>
+  <dgm:styleLbl name="bgAccFollowNode1">
+    <dgm:fillClrLst>
+      <a:schemeClr val="accent5">
+        <a:tint val="40000"/>
+        <a:alpha val="90000"/>
+      </a:schemeClr>
+      <a:schemeClr val="accent6">
+        <a:tint val="40000"/>
+        <a:alpha val="90000"/>
+      </a:schemeClr>
+    </dgm:fillClrLst>
+    <dgm:linClrLst>
+      <a:schemeClr val="accent5">
+        <a:tint val="40000"/>
+        <a:alpha val="90000"/>
+      </a:schemeClr>
+      <a:schemeClr val="accent6">
+        <a:tint val="40000"/>
+        <a:alpha val="90000"/>
+      </a:schemeClr>
+    </dgm:linClrLst>
+    <dgm:effectClrLst/>
+    <dgm:txLinClrLst/>
+    <dgm:txFillClrLst meth="repeat">
+      <a:schemeClr val="dk1"/>
+    </dgm:txFillClrLst>
+    <dgm:txEffectClrLst/>
+  </dgm:styleLbl>
+  <dgm:styleLbl name="fgAcc0">
+    <dgm:fillClrLst meth="repeat">
+      <a:schemeClr val="lt1">
+        <a:alpha val="90000"/>
+      </a:schemeClr>
+    </dgm:fillClrLst>
+    <dgm:linClrLst>
+      <a:schemeClr val="accent4"/>
+    </dgm:linClrLst>
+    <dgm:effectClrLst/>
+    <dgm:txLinClrLst/>
+    <dgm:txFillClrLst meth="repeat">
+      <a:schemeClr val="dk1"/>
+    </dgm:txFillClrLst>
+    <dgm:txEffectClrLst/>
+  </dgm:styleLbl>
+  <dgm:styleLbl name="fgAcc2">
+    <dgm:fillClrLst meth="repeat">
+      <a:schemeClr val="lt1">
+        <a:alpha val="90000"/>
+      </a:schemeClr>
+    </dgm:fillClrLst>
+    <dgm:linClrLst>
+      <a:schemeClr val="accent6"/>
+    </dgm:linClrLst>
+    <dgm:effectClrLst/>
+    <dgm:txLinClrLst/>
+    <dgm:txFillClrLst meth="repeat">
+      <a:schemeClr val="dk1"/>
+    </dgm:txFillClrLst>
+    <dgm:txEffectClrLst/>
+  </dgm:styleLbl>
+  <dgm:styleLbl name="fgAcc3">
+    <dgm:fillClrLst meth="repeat">
+      <a:schemeClr val="lt1">
+        <a:alpha val="90000"/>
+      </a:schemeClr>
+    </dgm:fillClrLst>
+    <dgm:linClrLst>
+      <a:schemeClr val="accent1"/>
+    </dgm:linClrLst>
+    <dgm:effectClrLst/>
+    <dgm:txLinClrLst/>
+    <dgm:txFillClrLst meth="repeat">
+      <a:schemeClr val="dk1"/>
+    </dgm:txFillClrLst>
+    <dgm:txEffectClrLst/>
+  </dgm:styleLbl>
+  <dgm:styleLbl name="fgAcc4">
+    <dgm:fillClrLst meth="repeat">
+      <a:schemeClr val="lt1">
+        <a:alpha val="90000"/>
+      </a:schemeClr>
+    </dgm:fillClrLst>
+    <dgm:linClrLst>
+      <a:schemeClr val="accent2"/>
+    </dgm:linClrLst>
+    <dgm:effectClrLst/>
+    <dgm:txLinClrLst/>
+    <dgm:txFillClrLst meth="repeat">
+      <a:schemeClr val="dk1"/>
+    </dgm:txFillClrLst>
+    <dgm:txEffectClrLst/>
+  </dgm:styleLbl>
+  <dgm:styleLbl name="bgShp">
+    <dgm:fillClrLst meth="repeat">
+      <a:schemeClr val="accent5">
+        <a:tint val="40000"/>
+      </a:schemeClr>
+    </dgm:fillClrLst>
+    <dgm:linClrLst meth="repeat">
+      <a:schemeClr val="dk1"/>
+    </dgm:linClrLst>
+    <dgm:effectClrLst/>
+    <dgm:txLinClrLst/>
+    <dgm:txFillClrLst meth="repeat">
+      <a:schemeClr val="dk1"/>
+    </dgm:txFillClrLst>
+    <dgm:txEffectClrLst/>
+  </dgm:styleLbl>
+  <dgm:styleLbl name="dkBgShp">
+    <dgm:fillClrLst meth="repeat">
+      <a:schemeClr val="accent5">
+        <a:shade val="90000"/>
+      </a:schemeClr>
+    </dgm:fillClrLst>
+    <dgm:linClrLst meth="repeat">
+      <a:schemeClr val="dk1"/>
+    </dgm:linClrLst>
+    <dgm:effectClrLst/>
+    <dgm:txLinClrLst/>
+    <dgm:txFillClrLst meth="repeat">
+      <a:schemeClr val="lt1"/>
+    </dgm:txFillClrLst>
+    <dgm:txEffectClrLst/>
+  </dgm:styleLbl>
+  <dgm:styleLbl name="trBgShp">
+    <dgm:fillClrLst meth="repeat">
+      <a:schemeClr val="accent5">
+        <a:tint val="50000"/>
+        <a:alpha val="40000"/>
+      </a:schemeClr>
+    </dgm:fillClrLst>
+    <dgm:linClrLst meth="repeat">
+      <a:schemeClr val="accent5"/>
+    </dgm:linClrLst>
+    <dgm:effectClrLst/>
+    <dgm:txLinClrLst/>
+    <dgm:txFillClrLst meth="repeat">
+      <a:schemeClr val="lt1"/>
+    </dgm:txFillClrLst>
+    <dgm:txEffectClrLst/>
+  </dgm:styleLbl>
+  <dgm:styleLbl name="fgShp">
+    <dgm:fillClrLst meth="repeat">
+      <a:schemeClr val="accent5">
+        <a:tint val="40000"/>
+      </a:schemeClr>
+    </dgm:fillClrLst>
+    <dgm:linClrLst meth="repeat">
+      <a:schemeClr val="lt1"/>
+    </dgm:linClrLst>
+    <dgm:effectClrLst/>
+    <dgm:txLinClrLst/>
+    <dgm:txFillClrLst meth="repeat">
+      <a:schemeClr val="dk1"/>
+    </dgm:txFillClrLst>
+    <dgm:txEffectClrLst/>
+  </dgm:styleLbl>
+  <dgm:styleLbl name="revTx">
+    <dgm:fillClrLst meth="repeat">
+      <a:schemeClr val="lt1">
+        <a:alpha val="0"/>
+      </a:schemeClr>
+    </dgm:fillClrLst>
+    <dgm:linClrLst meth="repeat">
+      <a:schemeClr val="dk1">
+        <a:alpha val="0"/>
+      </a:schemeClr>
+    </dgm:linClrLst>
+    <dgm:effectClrLst/>
+    <dgm:txLinClrLst/>
+    <dgm:txFillClrLst meth="repeat">
+      <a:schemeClr val="tx1"/>
+    </dgm:txFillClrLst>
+    <dgm:txEffectClrLst/>
+  </dgm:styleLbl>
+</dgm:colorsDef>
+</file>
+
+<file path=ppt/diagrams/data1.xml><?xml version="1.0" encoding="utf-8"?>
+<dgm:dataModel xmlns:dgm="http://schemas.openxmlformats.org/drawingml/2006/diagram" xmlns:a="http://schemas.openxmlformats.org/drawingml/2006/main">
+  <dgm:ptLst>
+    <dgm:pt modelId="{91C59910-2915-4169-9AEC-CCF2A3DAB3AB}" type="doc">
+      <dgm:prSet loTypeId="urn:microsoft.com/office/officeart/2005/8/layout/hList1" loCatId="list" qsTypeId="urn:microsoft.com/office/officeart/2005/8/quickstyle/simple1" qsCatId="simple" csTypeId="urn:microsoft.com/office/officeart/2005/8/colors/colorful5" csCatId="colorful" phldr="1"/>
+      <dgm:spPr/>
+      <dgm:t>
+        <a:bodyPr/>
+        <a:lstStyle/>
+        <a:p>
+          <a:endParaRPr lang="en-US"/>
+        </a:p>
+      </dgm:t>
+    </dgm:pt>
+    <dgm:pt modelId="{7DF3ACA9-C6DE-4C64-8ADD-3E53D92CEB54}">
+      <dgm:prSet phldrT="[Text]" phldr="0"/>
+      <dgm:spPr/>
+      <dgm:t>
+        <a:bodyPr/>
+        <a:lstStyle/>
+        <a:p>
+          <a:r>
+            <a:rPr lang="en-US" dirty="0"/>
+            <a:t>Alpha File</a:t>
+          </a:r>
+        </a:p>
+      </dgm:t>
+    </dgm:pt>
+    <dgm:pt modelId="{D18B8FEF-D22A-4844-9D07-5698114C9ECF}" type="parTrans" cxnId="{BF84D493-58A3-4960-AA14-4D7FCD5C33AF}">
+      <dgm:prSet/>
+      <dgm:spPr/>
+      <dgm:t>
+        <a:bodyPr/>
+        <a:lstStyle/>
+        <a:p>
+          <a:endParaRPr lang="en-US"/>
+        </a:p>
+      </dgm:t>
+    </dgm:pt>
+    <dgm:pt modelId="{763000D0-FF27-417D-9C0B-9282A8970B94}" type="sibTrans" cxnId="{BF84D493-58A3-4960-AA14-4D7FCD5C33AF}">
+      <dgm:prSet/>
+      <dgm:spPr/>
+      <dgm:t>
+        <a:bodyPr/>
+        <a:lstStyle/>
+        <a:p>
+          <a:endParaRPr lang="en-US"/>
+        </a:p>
+      </dgm:t>
+    </dgm:pt>
+    <dgm:pt modelId="{6EC4F6D1-13FB-4724-A95C-CA46C05AA6A4}">
+      <dgm:prSet phldrT="[Text]" phldr="0"/>
+      <dgm:spPr/>
+      <dgm:t>
+        <a:bodyPr/>
+        <a:lstStyle/>
+        <a:p>
+          <a:r>
+            <a:rPr lang="en-US" dirty="0"/>
+            <a:t>Individual alphabetic character value on worksheet is unique identifier</a:t>
+          </a:r>
+        </a:p>
+      </dgm:t>
+    </dgm:pt>
+    <dgm:pt modelId="{4CD5E0B8-3D3B-47E5-A5D5-828178C634E1}" type="parTrans" cxnId="{A1608881-FA50-47E4-ABF5-94B722C2A1B3}">
+      <dgm:prSet/>
+      <dgm:spPr/>
+      <dgm:t>
+        <a:bodyPr/>
+        <a:lstStyle/>
+        <a:p>
+          <a:endParaRPr lang="en-US"/>
+        </a:p>
+      </dgm:t>
+    </dgm:pt>
+    <dgm:pt modelId="{97A0DEF5-DBAF-4C7E-AB5E-54C8EAB06FBC}" type="sibTrans" cxnId="{A1608881-FA50-47E4-ABF5-94B722C2A1B3}">
+      <dgm:prSet/>
+      <dgm:spPr/>
+      <dgm:t>
+        <a:bodyPr/>
+        <a:lstStyle/>
+        <a:p>
+          <a:endParaRPr lang="en-US"/>
+        </a:p>
+      </dgm:t>
+    </dgm:pt>
+    <dgm:pt modelId="{6C83C324-423F-49CF-BD0C-2342C8670286}">
+      <dgm:prSet phldrT="[Text]" phldr="0"/>
+      <dgm:spPr/>
+      <dgm:t>
+        <a:bodyPr/>
+        <a:lstStyle/>
+        <a:p>
+          <a:r>
+            <a:rPr lang="en-US" dirty="0"/>
+            <a:t>Starts with cost report #, which is how its tied to report file</a:t>
+          </a:r>
+        </a:p>
+      </dgm:t>
+    </dgm:pt>
+    <dgm:pt modelId="{EF4CF166-FC18-4C41-9778-D628F32D2A1E}" type="parTrans" cxnId="{B63FBC34-A438-4DDB-8BA8-0949D4C68AC5}">
+      <dgm:prSet/>
+      <dgm:spPr/>
+      <dgm:t>
+        <a:bodyPr/>
+        <a:lstStyle/>
+        <a:p>
+          <a:endParaRPr lang="en-US"/>
+        </a:p>
+      </dgm:t>
+    </dgm:pt>
+    <dgm:pt modelId="{5A3C5B66-9ACC-44EF-95B3-A9BE03BF2250}" type="sibTrans" cxnId="{B63FBC34-A438-4DDB-8BA8-0949D4C68AC5}">
+      <dgm:prSet/>
+      <dgm:spPr/>
+      <dgm:t>
+        <a:bodyPr/>
+        <a:lstStyle/>
+        <a:p>
+          <a:endParaRPr lang="en-US"/>
+        </a:p>
+      </dgm:t>
+    </dgm:pt>
+    <dgm:pt modelId="{EB7E2B77-BE88-4F16-96D7-A7BAEE7F31B6}">
+      <dgm:prSet phldrT="[Text]" phldr="0"/>
+      <dgm:spPr/>
+      <dgm:t>
+        <a:bodyPr/>
+        <a:lstStyle/>
+        <a:p>
+          <a:r>
+            <a:rPr lang="en-US" dirty="0"/>
+            <a:t>Report File</a:t>
+          </a:r>
+        </a:p>
+      </dgm:t>
+    </dgm:pt>
+    <dgm:pt modelId="{D5221584-4C9C-4A93-A774-E73F15099692}" type="parTrans" cxnId="{AA32F31D-AEB1-4F62-93AB-DBE82104724E}">
+      <dgm:prSet/>
+      <dgm:spPr/>
+      <dgm:t>
+        <a:bodyPr/>
+        <a:lstStyle/>
+        <a:p>
+          <a:endParaRPr lang="en-US"/>
+        </a:p>
+      </dgm:t>
+    </dgm:pt>
+    <dgm:pt modelId="{02EE9138-1CDC-4390-9BC5-AB549771C632}" type="sibTrans" cxnId="{AA32F31D-AEB1-4F62-93AB-DBE82104724E}">
+      <dgm:prSet/>
+      <dgm:spPr/>
+      <dgm:t>
+        <a:bodyPr/>
+        <a:lstStyle/>
+        <a:p>
+          <a:endParaRPr lang="en-US"/>
+        </a:p>
+      </dgm:t>
+    </dgm:pt>
+    <dgm:pt modelId="{16F97E9C-D7CF-4C31-9792-6809CCEA8695}">
+      <dgm:prSet phldrT="[Text]" phldr="0"/>
+      <dgm:spPr/>
+      <dgm:t>
+        <a:bodyPr/>
+        <a:lstStyle/>
+        <a:p>
+          <a:r>
+            <a:rPr lang="en-US" dirty="0"/>
+            <a:t>Cost Report # is unique identifier (1 filed per hospital per year</a:t>
+          </a:r>
+        </a:p>
+      </dgm:t>
+    </dgm:pt>
+    <dgm:pt modelId="{E8C601CB-25FC-4108-8845-10C34AAC1F8C}" type="parTrans" cxnId="{3B1D5B2D-E6E7-43E4-B128-AB640E8729FD}">
+      <dgm:prSet/>
+      <dgm:spPr/>
+      <dgm:t>
+        <a:bodyPr/>
+        <a:lstStyle/>
+        <a:p>
+          <a:endParaRPr lang="en-US"/>
+        </a:p>
+      </dgm:t>
+    </dgm:pt>
+    <dgm:pt modelId="{251A50F1-1B9F-47A5-8621-9BC9D4E3403C}" type="sibTrans" cxnId="{3B1D5B2D-E6E7-43E4-B128-AB640E8729FD}">
+      <dgm:prSet/>
+      <dgm:spPr/>
+      <dgm:t>
+        <a:bodyPr/>
+        <a:lstStyle/>
+        <a:p>
+          <a:endParaRPr lang="en-US"/>
+        </a:p>
+      </dgm:t>
+    </dgm:pt>
+    <dgm:pt modelId="{793B43D9-4FCE-45E5-A9CF-53F5189C8BF9}">
+      <dgm:prSet phldrT="[Text]" phldr="0"/>
+      <dgm:spPr/>
+      <dgm:t>
+        <a:bodyPr/>
+        <a:lstStyle/>
+        <a:p>
+          <a:r>
+            <a:rPr lang="en-US" dirty="0"/>
+            <a:t>Cost Report should be unique to a hospital year, but sometimes there are exceptions (acquisition, fiscal year change </a:t>
+          </a:r>
+          <a:r>
+            <a:rPr lang="en-US" dirty="0" err="1"/>
+            <a:t>etc</a:t>
+          </a:r>
+          <a:r>
+            <a:rPr lang="en-US" dirty="0"/>
+            <a:t>)</a:t>
+          </a:r>
+        </a:p>
+      </dgm:t>
+    </dgm:pt>
+    <dgm:pt modelId="{17CE7A10-EB55-459B-8F9D-C397D229E28E}" type="parTrans" cxnId="{0ABCD901-0126-4C28-93DC-68FD67AE5E95}">
+      <dgm:prSet/>
+      <dgm:spPr/>
+      <dgm:t>
+        <a:bodyPr/>
+        <a:lstStyle/>
+        <a:p>
+          <a:endParaRPr lang="en-US"/>
+        </a:p>
+      </dgm:t>
+    </dgm:pt>
+    <dgm:pt modelId="{A8FA0F3E-06C6-4668-8112-0D1C40157EA5}" type="sibTrans" cxnId="{0ABCD901-0126-4C28-93DC-68FD67AE5E95}">
+      <dgm:prSet/>
+      <dgm:spPr/>
+      <dgm:t>
+        <a:bodyPr/>
+        <a:lstStyle/>
+        <a:p>
+          <a:endParaRPr lang="en-US"/>
+        </a:p>
+      </dgm:t>
+    </dgm:pt>
+    <dgm:pt modelId="{B5F2066B-5B21-4AA1-B793-F05FC0DF0951}">
+      <dgm:prSet phldrT="[Text]" phldr="0"/>
+      <dgm:spPr/>
+      <dgm:t>
+        <a:bodyPr/>
+        <a:lstStyle/>
+        <a:p>
+          <a:r>
+            <a:rPr lang="en-US" dirty="0"/>
+            <a:t>Numeric File</a:t>
+          </a:r>
+        </a:p>
+      </dgm:t>
+    </dgm:pt>
+    <dgm:pt modelId="{0C14EA19-E972-448E-8EAD-6F7DE21C63AB}" type="parTrans" cxnId="{A22B0464-7497-42F2-A497-79415B35DB10}">
+      <dgm:prSet/>
+      <dgm:spPr/>
+      <dgm:t>
+        <a:bodyPr/>
+        <a:lstStyle/>
+        <a:p>
+          <a:endParaRPr lang="en-US"/>
+        </a:p>
+      </dgm:t>
+    </dgm:pt>
+    <dgm:pt modelId="{C0AD2C13-195F-41C7-B6AA-6C9FF0552E82}" type="sibTrans" cxnId="{A22B0464-7497-42F2-A497-79415B35DB10}">
+      <dgm:prSet/>
+      <dgm:spPr/>
+      <dgm:t>
+        <a:bodyPr/>
+        <a:lstStyle/>
+        <a:p>
+          <a:endParaRPr lang="en-US"/>
+        </a:p>
+      </dgm:t>
+    </dgm:pt>
+    <dgm:pt modelId="{6A6EEEF9-33D5-4C5F-AA49-1CBE8E36CA5E}">
+      <dgm:prSet phldrT="[Text]"/>
+      <dgm:spPr/>
+      <dgm:t>
+        <a:bodyPr/>
+        <a:lstStyle/>
+        <a:p>
+          <a:r>
+            <a:rPr lang="en-US" dirty="0"/>
+            <a:t>Individual numeric character value on worksheet is unique identifier</a:t>
+          </a:r>
+        </a:p>
+      </dgm:t>
+    </dgm:pt>
+    <dgm:pt modelId="{202EC2B6-1F1E-4086-8B06-EE1AA71E2920}" type="parTrans" cxnId="{2DCDD328-0B74-4C6E-9397-9D4F3AE85AD7}">
+      <dgm:prSet/>
+      <dgm:spPr/>
+      <dgm:t>
+        <a:bodyPr/>
+        <a:lstStyle/>
+        <a:p>
+          <a:endParaRPr lang="en-US"/>
+        </a:p>
+      </dgm:t>
+    </dgm:pt>
+    <dgm:pt modelId="{990AE581-C70C-4BB3-8EE4-AA412EA0B4A7}" type="sibTrans" cxnId="{2DCDD328-0B74-4C6E-9397-9D4F3AE85AD7}">
+      <dgm:prSet/>
+      <dgm:spPr/>
+      <dgm:t>
+        <a:bodyPr/>
+        <a:lstStyle/>
+        <a:p>
+          <a:endParaRPr lang="en-US"/>
+        </a:p>
+      </dgm:t>
+    </dgm:pt>
+    <dgm:pt modelId="{F38BC0D6-0246-41AA-A1C6-57CDD37B53BC}">
+      <dgm:prSet phldrT="[Text]" phldr="0"/>
+      <dgm:spPr/>
+      <dgm:t>
+        <a:bodyPr/>
+        <a:lstStyle/>
+        <a:p>
+          <a:r>
+            <a:rPr lang="en-US" dirty="0"/>
+            <a:t>Then worksheet, column, line, and finally value </a:t>
+          </a:r>
+        </a:p>
+      </dgm:t>
+    </dgm:pt>
+    <dgm:pt modelId="{17A1C869-476D-4E63-A8B4-0A47C0353090}" type="parTrans" cxnId="{581C1491-D88B-4EEC-908A-44412344E671}">
+      <dgm:prSet/>
+      <dgm:spPr/>
+      <dgm:t>
+        <a:bodyPr/>
+        <a:lstStyle/>
+        <a:p>
+          <a:endParaRPr lang="en-US"/>
+        </a:p>
+      </dgm:t>
+    </dgm:pt>
+    <dgm:pt modelId="{23E4049D-021D-470A-86C9-60D6C347E253}" type="sibTrans" cxnId="{581C1491-D88B-4EEC-908A-44412344E671}">
+      <dgm:prSet/>
+      <dgm:spPr/>
+      <dgm:t>
+        <a:bodyPr/>
+        <a:lstStyle/>
+        <a:p>
+          <a:endParaRPr lang="en-US"/>
+        </a:p>
+      </dgm:t>
+    </dgm:pt>
+    <dgm:pt modelId="{B583D562-C508-44D0-85BB-4E4F07141009}">
+      <dgm:prSet/>
+      <dgm:spPr/>
+      <dgm:t>
+        <a:bodyPr/>
+        <a:lstStyle/>
+        <a:p>
+          <a:r>
+            <a:rPr lang="en-US" dirty="0"/>
+            <a:t>Starts with cost report #, which is how its tied to report file</a:t>
+          </a:r>
+        </a:p>
+      </dgm:t>
+    </dgm:pt>
+    <dgm:pt modelId="{A2CAD832-DDD1-4650-AB9D-19814F38A094}" type="parTrans" cxnId="{2BB39C2C-BB35-4EA7-B80A-7F0F62C6FE34}">
+      <dgm:prSet/>
+      <dgm:spPr/>
+      <dgm:t>
+        <a:bodyPr/>
+        <a:lstStyle/>
+        <a:p>
+          <a:endParaRPr lang="en-US"/>
+        </a:p>
+      </dgm:t>
+    </dgm:pt>
+    <dgm:pt modelId="{53E8ADBF-9808-4852-B2A5-8272191023DE}" type="sibTrans" cxnId="{2BB39C2C-BB35-4EA7-B80A-7F0F62C6FE34}">
+      <dgm:prSet/>
+      <dgm:spPr/>
+      <dgm:t>
+        <a:bodyPr/>
+        <a:lstStyle/>
+        <a:p>
+          <a:endParaRPr lang="en-US"/>
+        </a:p>
+      </dgm:t>
+    </dgm:pt>
+    <dgm:pt modelId="{62205231-AC13-4192-BA53-2442CD65304B}">
+      <dgm:prSet/>
+      <dgm:spPr/>
+      <dgm:t>
+        <a:bodyPr/>
+        <a:lstStyle/>
+        <a:p>
+          <a:r>
+            <a:rPr lang="en-US" dirty="0"/>
+            <a:t>Then worksheet, column, line, and finally value </a:t>
+          </a:r>
+        </a:p>
+      </dgm:t>
+    </dgm:pt>
+    <dgm:pt modelId="{19EAB32A-EE68-421C-BEC1-B92AAD9D23B2}" type="parTrans" cxnId="{7FFD959B-67EA-4CA8-9E9E-E941A8BA739C}">
+      <dgm:prSet/>
+      <dgm:spPr/>
+      <dgm:t>
+        <a:bodyPr/>
+        <a:lstStyle/>
+        <a:p>
+          <a:endParaRPr lang="en-US"/>
+        </a:p>
+      </dgm:t>
+    </dgm:pt>
+    <dgm:pt modelId="{BA4E4AA1-2533-49F7-83E9-640D4CC8F440}" type="sibTrans" cxnId="{7FFD959B-67EA-4CA8-9E9E-E941A8BA739C}">
+      <dgm:prSet/>
+      <dgm:spPr/>
+      <dgm:t>
+        <a:bodyPr/>
+        <a:lstStyle/>
+        <a:p>
+          <a:endParaRPr lang="en-US"/>
+        </a:p>
+      </dgm:t>
+    </dgm:pt>
+    <dgm:pt modelId="{B5004C1B-4DC1-4570-9420-AE48FBB5679C}" type="pres">
+      <dgm:prSet presAssocID="{91C59910-2915-4169-9AEC-CCF2A3DAB3AB}" presName="Name0" presStyleCnt="0">
+        <dgm:presLayoutVars>
+          <dgm:dir/>
+          <dgm:animLvl val="lvl"/>
+          <dgm:resizeHandles val="exact"/>
+        </dgm:presLayoutVars>
+      </dgm:prSet>
+      <dgm:spPr/>
+    </dgm:pt>
+    <dgm:pt modelId="{54643D54-FE3C-40FF-9198-6AA7D8F090E9}" type="pres">
+      <dgm:prSet presAssocID="{7DF3ACA9-C6DE-4C64-8ADD-3E53D92CEB54}" presName="composite" presStyleCnt="0"/>
+      <dgm:spPr/>
+    </dgm:pt>
+    <dgm:pt modelId="{D13CB792-9F73-434E-B869-E3285FC8589D}" type="pres">
+      <dgm:prSet presAssocID="{7DF3ACA9-C6DE-4C64-8ADD-3E53D92CEB54}" presName="parTx" presStyleLbl="alignNode1" presStyleIdx="0" presStyleCnt="3" custLinFactNeighborY="1454">
+        <dgm:presLayoutVars>
+          <dgm:chMax val="0"/>
+          <dgm:chPref val="0"/>
+          <dgm:bulletEnabled val="1"/>
+        </dgm:presLayoutVars>
+      </dgm:prSet>
+      <dgm:spPr/>
+    </dgm:pt>
+    <dgm:pt modelId="{ADDD774B-1FDC-4ED3-AD8D-B8C0B6241E57}" type="pres">
+      <dgm:prSet presAssocID="{7DF3ACA9-C6DE-4C64-8ADD-3E53D92CEB54}" presName="desTx" presStyleLbl="alignAccFollowNode1" presStyleIdx="0" presStyleCnt="3">
+        <dgm:presLayoutVars>
+          <dgm:bulletEnabled val="1"/>
+        </dgm:presLayoutVars>
+      </dgm:prSet>
+      <dgm:spPr/>
+    </dgm:pt>
+    <dgm:pt modelId="{A733F60C-CE44-4160-93FE-F8E4D5EBA375}" type="pres">
+      <dgm:prSet presAssocID="{763000D0-FF27-417D-9C0B-9282A8970B94}" presName="space" presStyleCnt="0"/>
+      <dgm:spPr/>
+    </dgm:pt>
+    <dgm:pt modelId="{AEF840B6-1A06-4B86-8DFF-EE1F3E3EE429}" type="pres">
+      <dgm:prSet presAssocID="{EB7E2B77-BE88-4F16-96D7-A7BAEE7F31B6}" presName="composite" presStyleCnt="0"/>
+      <dgm:spPr/>
+    </dgm:pt>
+    <dgm:pt modelId="{9DF81799-1DFA-46E0-8488-1C75385EB0F3}" type="pres">
+      <dgm:prSet presAssocID="{EB7E2B77-BE88-4F16-96D7-A7BAEE7F31B6}" presName="parTx" presStyleLbl="alignNode1" presStyleIdx="1" presStyleCnt="3">
+        <dgm:presLayoutVars>
+          <dgm:chMax val="0"/>
+          <dgm:chPref val="0"/>
+          <dgm:bulletEnabled val="1"/>
+        </dgm:presLayoutVars>
+      </dgm:prSet>
+      <dgm:spPr/>
+    </dgm:pt>
+    <dgm:pt modelId="{7B97309F-8D65-4C9A-8ECF-47AA5FAD2D8D}" type="pres">
+      <dgm:prSet presAssocID="{EB7E2B77-BE88-4F16-96D7-A7BAEE7F31B6}" presName="desTx" presStyleLbl="alignAccFollowNode1" presStyleIdx="1" presStyleCnt="3">
+        <dgm:presLayoutVars>
+          <dgm:bulletEnabled val="1"/>
+        </dgm:presLayoutVars>
+      </dgm:prSet>
+      <dgm:spPr/>
+    </dgm:pt>
+    <dgm:pt modelId="{8B77171F-8E1D-42E3-BA32-0DE8F427EB2A}" type="pres">
+      <dgm:prSet presAssocID="{02EE9138-1CDC-4390-9BC5-AB549771C632}" presName="space" presStyleCnt="0"/>
+      <dgm:spPr/>
+    </dgm:pt>
+    <dgm:pt modelId="{141EA27A-06E8-4056-9D82-A51C7549111D}" type="pres">
+      <dgm:prSet presAssocID="{B5F2066B-5B21-4AA1-B793-F05FC0DF0951}" presName="composite" presStyleCnt="0"/>
+      <dgm:spPr/>
+    </dgm:pt>
+    <dgm:pt modelId="{F40A6644-A417-4577-9291-72E3C85BC40A}" type="pres">
+      <dgm:prSet presAssocID="{B5F2066B-5B21-4AA1-B793-F05FC0DF0951}" presName="parTx" presStyleLbl="alignNode1" presStyleIdx="2" presStyleCnt="3">
+        <dgm:presLayoutVars>
+          <dgm:chMax val="0"/>
+          <dgm:chPref val="0"/>
+          <dgm:bulletEnabled val="1"/>
+        </dgm:presLayoutVars>
+      </dgm:prSet>
+      <dgm:spPr/>
+    </dgm:pt>
+    <dgm:pt modelId="{C68DB6A3-76F1-42AE-ADBA-689E92E8F914}" type="pres">
+      <dgm:prSet presAssocID="{B5F2066B-5B21-4AA1-B793-F05FC0DF0951}" presName="desTx" presStyleLbl="alignAccFollowNode1" presStyleIdx="2" presStyleCnt="3">
+        <dgm:presLayoutVars>
+          <dgm:bulletEnabled val="1"/>
+        </dgm:presLayoutVars>
+      </dgm:prSet>
+      <dgm:spPr/>
+    </dgm:pt>
+  </dgm:ptLst>
+  <dgm:cxnLst>
+    <dgm:cxn modelId="{0ABCD901-0126-4C28-93DC-68FD67AE5E95}" srcId="{EB7E2B77-BE88-4F16-96D7-A7BAEE7F31B6}" destId="{793B43D9-4FCE-45E5-A9CF-53F5189C8BF9}" srcOrd="1" destOrd="0" parTransId="{17CE7A10-EB55-459B-8F9D-C397D229E28E}" sibTransId="{A8FA0F3E-06C6-4668-8112-0D1C40157EA5}"/>
+    <dgm:cxn modelId="{AA32F31D-AEB1-4F62-93AB-DBE82104724E}" srcId="{91C59910-2915-4169-9AEC-CCF2A3DAB3AB}" destId="{EB7E2B77-BE88-4F16-96D7-A7BAEE7F31B6}" srcOrd="1" destOrd="0" parTransId="{D5221584-4C9C-4A93-A774-E73F15099692}" sibTransId="{02EE9138-1CDC-4390-9BC5-AB549771C632}"/>
+    <dgm:cxn modelId="{00585825-1C72-4352-97AB-7FFB28947B49}" type="presOf" srcId="{6A6EEEF9-33D5-4C5F-AA49-1CBE8E36CA5E}" destId="{C68DB6A3-76F1-42AE-ADBA-689E92E8F914}" srcOrd="0" destOrd="0" presId="urn:microsoft.com/office/officeart/2005/8/layout/hList1"/>
+    <dgm:cxn modelId="{07CF3126-3950-4947-826E-33378AAC51DD}" type="presOf" srcId="{6C83C324-423F-49CF-BD0C-2342C8670286}" destId="{ADDD774B-1FDC-4ED3-AD8D-B8C0B6241E57}" srcOrd="0" destOrd="1" presId="urn:microsoft.com/office/officeart/2005/8/layout/hList1"/>
+    <dgm:cxn modelId="{2DCDD328-0B74-4C6E-9397-9D4F3AE85AD7}" srcId="{B5F2066B-5B21-4AA1-B793-F05FC0DF0951}" destId="{6A6EEEF9-33D5-4C5F-AA49-1CBE8E36CA5E}" srcOrd="0" destOrd="0" parTransId="{202EC2B6-1F1E-4086-8B06-EE1AA71E2920}" sibTransId="{990AE581-C70C-4BB3-8EE4-AA412EA0B4A7}"/>
+    <dgm:cxn modelId="{5C984E29-17AA-4592-93D0-B41E23B11DF2}" type="presOf" srcId="{EB7E2B77-BE88-4F16-96D7-A7BAEE7F31B6}" destId="{9DF81799-1DFA-46E0-8488-1C75385EB0F3}" srcOrd="0" destOrd="0" presId="urn:microsoft.com/office/officeart/2005/8/layout/hList1"/>
+    <dgm:cxn modelId="{2BB39C2C-BB35-4EA7-B80A-7F0F62C6FE34}" srcId="{B5F2066B-5B21-4AA1-B793-F05FC0DF0951}" destId="{B583D562-C508-44D0-85BB-4E4F07141009}" srcOrd="1" destOrd="0" parTransId="{A2CAD832-DDD1-4650-AB9D-19814F38A094}" sibTransId="{53E8ADBF-9808-4852-B2A5-8272191023DE}"/>
+    <dgm:cxn modelId="{3B1D5B2D-E6E7-43E4-B128-AB640E8729FD}" srcId="{EB7E2B77-BE88-4F16-96D7-A7BAEE7F31B6}" destId="{16F97E9C-D7CF-4C31-9792-6809CCEA8695}" srcOrd="0" destOrd="0" parTransId="{E8C601CB-25FC-4108-8845-10C34AAC1F8C}" sibTransId="{251A50F1-1B9F-47A5-8621-9BC9D4E3403C}"/>
+    <dgm:cxn modelId="{B63FBC34-A438-4DDB-8BA8-0949D4C68AC5}" srcId="{7DF3ACA9-C6DE-4C64-8ADD-3E53D92CEB54}" destId="{6C83C324-423F-49CF-BD0C-2342C8670286}" srcOrd="1" destOrd="0" parTransId="{EF4CF166-FC18-4C41-9778-D628F32D2A1E}" sibTransId="{5A3C5B66-9ACC-44EF-95B3-A9BE03BF2250}"/>
+    <dgm:cxn modelId="{A22B0464-7497-42F2-A497-79415B35DB10}" srcId="{91C59910-2915-4169-9AEC-CCF2A3DAB3AB}" destId="{B5F2066B-5B21-4AA1-B793-F05FC0DF0951}" srcOrd="2" destOrd="0" parTransId="{0C14EA19-E972-448E-8EAD-6F7DE21C63AB}" sibTransId="{C0AD2C13-195F-41C7-B6AA-6C9FF0552E82}"/>
+    <dgm:cxn modelId="{1B84654A-1A25-4CD2-81DB-4DDD6C7566F5}" type="presOf" srcId="{6EC4F6D1-13FB-4724-A95C-CA46C05AA6A4}" destId="{ADDD774B-1FDC-4ED3-AD8D-B8C0B6241E57}" srcOrd="0" destOrd="0" presId="urn:microsoft.com/office/officeart/2005/8/layout/hList1"/>
+    <dgm:cxn modelId="{8AB50A4D-D33A-4F7D-87BE-E192517BA384}" type="presOf" srcId="{B5F2066B-5B21-4AA1-B793-F05FC0DF0951}" destId="{F40A6644-A417-4577-9291-72E3C85BC40A}" srcOrd="0" destOrd="0" presId="urn:microsoft.com/office/officeart/2005/8/layout/hList1"/>
+    <dgm:cxn modelId="{C18CF655-2F8F-4793-9288-8C25DB8B0885}" type="presOf" srcId="{16F97E9C-D7CF-4C31-9792-6809CCEA8695}" destId="{7B97309F-8D65-4C9A-8ECF-47AA5FAD2D8D}" srcOrd="0" destOrd="0" presId="urn:microsoft.com/office/officeart/2005/8/layout/hList1"/>
+    <dgm:cxn modelId="{A1608881-FA50-47E4-ABF5-94B722C2A1B3}" srcId="{7DF3ACA9-C6DE-4C64-8ADD-3E53D92CEB54}" destId="{6EC4F6D1-13FB-4724-A95C-CA46C05AA6A4}" srcOrd="0" destOrd="0" parTransId="{4CD5E0B8-3D3B-47E5-A5D5-828178C634E1}" sibTransId="{97A0DEF5-DBAF-4C7E-AB5E-54C8EAB06FBC}"/>
+    <dgm:cxn modelId="{2039518E-9327-4C2D-B743-84F27740BB1D}" type="presOf" srcId="{7DF3ACA9-C6DE-4C64-8ADD-3E53D92CEB54}" destId="{D13CB792-9F73-434E-B869-E3285FC8589D}" srcOrd="0" destOrd="0" presId="urn:microsoft.com/office/officeart/2005/8/layout/hList1"/>
+    <dgm:cxn modelId="{581C1491-D88B-4EEC-908A-44412344E671}" srcId="{7DF3ACA9-C6DE-4C64-8ADD-3E53D92CEB54}" destId="{F38BC0D6-0246-41AA-A1C6-57CDD37B53BC}" srcOrd="2" destOrd="0" parTransId="{17A1C869-476D-4E63-A8B4-0A47C0353090}" sibTransId="{23E4049D-021D-470A-86C9-60D6C347E253}"/>
+    <dgm:cxn modelId="{BF84D493-58A3-4960-AA14-4D7FCD5C33AF}" srcId="{91C59910-2915-4169-9AEC-CCF2A3DAB3AB}" destId="{7DF3ACA9-C6DE-4C64-8ADD-3E53D92CEB54}" srcOrd="0" destOrd="0" parTransId="{D18B8FEF-D22A-4844-9D07-5698114C9ECF}" sibTransId="{763000D0-FF27-417D-9C0B-9282A8970B94}"/>
+    <dgm:cxn modelId="{91EB3394-EFEA-454C-BA15-9A7A523A0C2D}" type="presOf" srcId="{91C59910-2915-4169-9AEC-CCF2A3DAB3AB}" destId="{B5004C1B-4DC1-4570-9420-AE48FBB5679C}" srcOrd="0" destOrd="0" presId="urn:microsoft.com/office/officeart/2005/8/layout/hList1"/>
+    <dgm:cxn modelId="{7FFD959B-67EA-4CA8-9E9E-E941A8BA739C}" srcId="{B5F2066B-5B21-4AA1-B793-F05FC0DF0951}" destId="{62205231-AC13-4192-BA53-2442CD65304B}" srcOrd="2" destOrd="0" parTransId="{19EAB32A-EE68-421C-BEC1-B92AAD9D23B2}" sibTransId="{BA4E4AA1-2533-49F7-83E9-640D4CC8F440}"/>
+    <dgm:cxn modelId="{EE3A42BE-4BD5-44E6-A340-3B1F7D761906}" type="presOf" srcId="{62205231-AC13-4192-BA53-2442CD65304B}" destId="{C68DB6A3-76F1-42AE-ADBA-689E92E8F914}" srcOrd="0" destOrd="2" presId="urn:microsoft.com/office/officeart/2005/8/layout/hList1"/>
+    <dgm:cxn modelId="{7123B9C3-7BA0-42B3-888A-68A42B21F975}" type="presOf" srcId="{B583D562-C508-44D0-85BB-4E4F07141009}" destId="{C68DB6A3-76F1-42AE-ADBA-689E92E8F914}" srcOrd="0" destOrd="1" presId="urn:microsoft.com/office/officeart/2005/8/layout/hList1"/>
+    <dgm:cxn modelId="{B6645ADD-278C-42DF-A622-8A41224386B3}" type="presOf" srcId="{F38BC0D6-0246-41AA-A1C6-57CDD37B53BC}" destId="{ADDD774B-1FDC-4ED3-AD8D-B8C0B6241E57}" srcOrd="0" destOrd="2" presId="urn:microsoft.com/office/officeart/2005/8/layout/hList1"/>
+    <dgm:cxn modelId="{B03F34DF-6A55-4694-A23D-8FC5A4ADF694}" type="presOf" srcId="{793B43D9-4FCE-45E5-A9CF-53F5189C8BF9}" destId="{7B97309F-8D65-4C9A-8ECF-47AA5FAD2D8D}" srcOrd="0" destOrd="1" presId="urn:microsoft.com/office/officeart/2005/8/layout/hList1"/>
+    <dgm:cxn modelId="{A119C20B-121A-4919-8B34-59BFAEDED727}" type="presParOf" srcId="{B5004C1B-4DC1-4570-9420-AE48FBB5679C}" destId="{54643D54-FE3C-40FF-9198-6AA7D8F090E9}" srcOrd="0" destOrd="0" presId="urn:microsoft.com/office/officeart/2005/8/layout/hList1"/>
+    <dgm:cxn modelId="{0DAAC785-6C5B-48A4-A0FA-854723EBE1E5}" type="presParOf" srcId="{54643D54-FE3C-40FF-9198-6AA7D8F090E9}" destId="{D13CB792-9F73-434E-B869-E3285FC8589D}" srcOrd="0" destOrd="0" presId="urn:microsoft.com/office/officeart/2005/8/layout/hList1"/>
+    <dgm:cxn modelId="{A24D99EE-F519-48FD-A8D8-874EADCC8820}" type="presParOf" srcId="{54643D54-FE3C-40FF-9198-6AA7D8F090E9}" destId="{ADDD774B-1FDC-4ED3-AD8D-B8C0B6241E57}" srcOrd="1" destOrd="0" presId="urn:microsoft.com/office/officeart/2005/8/layout/hList1"/>
+    <dgm:cxn modelId="{DE965E3F-BB0D-4A15-A1B0-4B51F4F94685}" type="presParOf" srcId="{B5004C1B-4DC1-4570-9420-AE48FBB5679C}" destId="{A733F60C-CE44-4160-93FE-F8E4D5EBA375}" srcOrd="1" destOrd="0" presId="urn:microsoft.com/office/officeart/2005/8/layout/hList1"/>
+    <dgm:cxn modelId="{5A1F040B-EF51-40B6-8BFB-C25931D2C02D}" type="presParOf" srcId="{B5004C1B-4DC1-4570-9420-AE48FBB5679C}" destId="{AEF840B6-1A06-4B86-8DFF-EE1F3E3EE429}" srcOrd="2" destOrd="0" presId="urn:microsoft.com/office/officeart/2005/8/layout/hList1"/>
+    <dgm:cxn modelId="{60B4857D-8869-42B4-AAC3-B8254472DC66}" type="presParOf" srcId="{AEF840B6-1A06-4B86-8DFF-EE1F3E3EE429}" destId="{9DF81799-1DFA-46E0-8488-1C75385EB0F3}" srcOrd="0" destOrd="0" presId="urn:microsoft.com/office/officeart/2005/8/layout/hList1"/>
+    <dgm:cxn modelId="{26A26626-70E5-477A-845C-16A6BB60D86C}" type="presParOf" srcId="{AEF840B6-1A06-4B86-8DFF-EE1F3E3EE429}" destId="{7B97309F-8D65-4C9A-8ECF-47AA5FAD2D8D}" srcOrd="1" destOrd="0" presId="urn:microsoft.com/office/officeart/2005/8/layout/hList1"/>
+    <dgm:cxn modelId="{75D0B479-532F-4EE1-A939-BC794E03D7BE}" type="presParOf" srcId="{B5004C1B-4DC1-4570-9420-AE48FBB5679C}" destId="{8B77171F-8E1D-42E3-BA32-0DE8F427EB2A}" srcOrd="3" destOrd="0" presId="urn:microsoft.com/office/officeart/2005/8/layout/hList1"/>
+    <dgm:cxn modelId="{B8C6E73D-0922-41CB-BF70-41B97B4B8E11}" type="presParOf" srcId="{B5004C1B-4DC1-4570-9420-AE48FBB5679C}" destId="{141EA27A-06E8-4056-9D82-A51C7549111D}" srcOrd="4" destOrd="0" presId="urn:microsoft.com/office/officeart/2005/8/layout/hList1"/>
+    <dgm:cxn modelId="{DE3E95FD-A1F1-427A-AB6B-D410E20236F6}" type="presParOf" srcId="{141EA27A-06E8-4056-9D82-A51C7549111D}" destId="{F40A6644-A417-4577-9291-72E3C85BC40A}" srcOrd="0" destOrd="0" presId="urn:microsoft.com/office/officeart/2005/8/layout/hList1"/>
+    <dgm:cxn modelId="{BA4B24B6-4C45-4F81-BF5A-CC2CCF302A2A}" type="presParOf" srcId="{141EA27A-06E8-4056-9D82-A51C7549111D}" destId="{C68DB6A3-76F1-42AE-ADBA-689E92E8F914}" srcOrd="1" destOrd="0" presId="urn:microsoft.com/office/officeart/2005/8/layout/hList1"/>
+  </dgm:cxnLst>
+  <dgm:bg/>
+  <dgm:whole/>
+  <dgm:extLst>
+    <a:ext uri="http://schemas.microsoft.com/office/drawing/2008/diagram">
+      <dsp:dataModelExt xmlns:dsp="http://schemas.microsoft.com/office/drawing/2008/diagram" relId="rId6" minVer="http://schemas.openxmlformats.org/drawingml/2006/diagram"/>
+    </a:ext>
+  </dgm:extLst>
+</dgm:dataModel>
+</file>
+
+<file path=ppt/diagrams/drawing1.xml><?xml version="1.0" encoding="utf-8"?>
+<dsp:drawing xmlns:dgm="http://schemas.openxmlformats.org/drawingml/2006/diagram" xmlns:dsp="http://schemas.microsoft.com/office/drawing/2008/diagram" xmlns:a="http://schemas.openxmlformats.org/drawingml/2006/main">
+  <dsp:spTree>
+    <dsp:nvGrpSpPr>
+      <dsp:cNvPr id="0" name=""/>
+      <dsp:cNvGrpSpPr/>
+    </dsp:nvGrpSpPr>
+    <dsp:grpSpPr/>
+    <dsp:sp modelId="{D13CB792-9F73-434E-B869-E3285FC8589D}">
+      <dsp:nvSpPr>
+        <dsp:cNvPr id="0" name=""/>
+        <dsp:cNvSpPr/>
+      </dsp:nvSpPr>
+      <dsp:spPr>
+        <a:xfrm>
+          <a:off x="3327" y="167903"/>
+          <a:ext cx="3244283" cy="604800"/>
+        </a:xfrm>
+        <a:prstGeom prst="rect">
+          <a:avLst/>
+        </a:prstGeom>
+        <a:solidFill>
+          <a:schemeClr val="accent5">
+            <a:hueOff val="0"/>
+            <a:satOff val="0"/>
+            <a:lumOff val="0"/>
+            <a:alphaOff val="0"/>
+          </a:schemeClr>
+        </a:solidFill>
+        <a:ln w="25400" cap="flat" cmpd="sng" algn="ctr">
+          <a:solidFill>
+            <a:schemeClr val="accent5">
+              <a:hueOff val="0"/>
+              <a:satOff val="0"/>
+              <a:lumOff val="0"/>
+              <a:alphaOff val="0"/>
+            </a:schemeClr>
+          </a:solidFill>
+          <a:prstDash val="solid"/>
+        </a:ln>
+        <a:effectLst/>
+      </dsp:spPr>
+      <dsp:style>
+        <a:lnRef idx="2">
+          <a:scrgbClr r="0" g="0" b="0"/>
+        </a:lnRef>
+        <a:fillRef idx="1">
+          <a:scrgbClr r="0" g="0" b="0"/>
+        </a:fillRef>
+        <a:effectRef idx="0">
+          <a:scrgbClr r="0" g="0" b="0"/>
+        </a:effectRef>
+        <a:fontRef idx="minor">
+          <a:schemeClr val="lt1"/>
+        </a:fontRef>
+      </dsp:style>
+      <dsp:txBody>
+        <a:bodyPr spcFirstLastPara="0" vert="horz" wrap="square" lIns="149352" tIns="85344" rIns="149352" bIns="85344" numCol="1" spcCol="1270" anchor="ctr" anchorCtr="0">
+          <a:noAutofit/>
+        </a:bodyPr>
+        <a:lstStyle/>
+        <a:p>
+          <a:pPr marL="0" lvl="0" indent="0" algn="ctr" defTabSz="933450">
+            <a:lnSpc>
+              <a:spcPct val="90000"/>
+            </a:lnSpc>
+            <a:spcBef>
+              <a:spcPct val="0"/>
+            </a:spcBef>
+            <a:spcAft>
+              <a:spcPct val="35000"/>
+            </a:spcAft>
+            <a:buNone/>
+          </a:pPr>
+          <a:r>
+            <a:rPr lang="en-US" sz="2100" kern="1200" dirty="0"/>
+            <a:t>Alpha File</a:t>
+          </a:r>
+        </a:p>
+      </dsp:txBody>
+      <dsp:txXfrm>
+        <a:off x="3327" y="167903"/>
+        <a:ext cx="3244283" cy="604800"/>
+      </dsp:txXfrm>
+    </dsp:sp>
+    <dsp:sp modelId="{ADDD774B-1FDC-4ED3-AD8D-B8C0B6241E57}">
+      <dsp:nvSpPr>
+        <dsp:cNvPr id="0" name=""/>
+        <dsp:cNvSpPr/>
+      </dsp:nvSpPr>
+      <dsp:spPr>
+        <a:xfrm>
+          <a:off x="3327" y="763909"/>
+          <a:ext cx="3244283" cy="3170474"/>
+        </a:xfrm>
+        <a:prstGeom prst="rect">
+          <a:avLst/>
+        </a:prstGeom>
+        <a:solidFill>
+          <a:schemeClr val="accent5">
+            <a:tint val="40000"/>
+            <a:alpha val="90000"/>
+            <a:hueOff val="0"/>
+            <a:satOff val="0"/>
+            <a:lumOff val="0"/>
+            <a:alphaOff val="0"/>
+          </a:schemeClr>
+        </a:solidFill>
+        <a:ln w="25400" cap="flat" cmpd="sng" algn="ctr">
+          <a:solidFill>
+            <a:schemeClr val="accent5">
+              <a:tint val="40000"/>
+              <a:alpha val="90000"/>
+              <a:hueOff val="0"/>
+              <a:satOff val="0"/>
+              <a:lumOff val="0"/>
+              <a:alphaOff val="0"/>
+            </a:schemeClr>
+          </a:solidFill>
+          <a:prstDash val="solid"/>
+        </a:ln>
+        <a:effectLst/>
+      </dsp:spPr>
+      <dsp:style>
+        <a:lnRef idx="2">
+          <a:scrgbClr r="0" g="0" b="0"/>
+        </a:lnRef>
+        <a:fillRef idx="1">
+          <a:scrgbClr r="0" g="0" b="0"/>
+        </a:fillRef>
+        <a:effectRef idx="0">
+          <a:scrgbClr r="0" g="0" b="0"/>
+        </a:effectRef>
+        <a:fontRef idx="minor"/>
+      </dsp:style>
+      <dsp:txBody>
+        <a:bodyPr spcFirstLastPara="0" vert="horz" wrap="square" lIns="112014" tIns="112014" rIns="149352" bIns="168021" numCol="1" spcCol="1270" anchor="t" anchorCtr="0">
+          <a:noAutofit/>
+        </a:bodyPr>
+        <a:lstStyle/>
+        <a:p>
+          <a:pPr marL="228600" lvl="1" indent="-228600" algn="l" defTabSz="933450">
+            <a:lnSpc>
+              <a:spcPct val="90000"/>
+            </a:lnSpc>
+            <a:spcBef>
+              <a:spcPct val="0"/>
+            </a:spcBef>
+            <a:spcAft>
+              <a:spcPct val="15000"/>
+            </a:spcAft>
+            <a:buChar char="•"/>
+          </a:pPr>
+          <a:r>
+            <a:rPr lang="en-US" sz="2100" kern="1200" dirty="0"/>
+            <a:t>Individual alphabetic character value on worksheet is unique identifier</a:t>
+          </a:r>
+        </a:p>
+        <a:p>
+          <a:pPr marL="228600" lvl="1" indent="-228600" algn="l" defTabSz="933450">
+            <a:lnSpc>
+              <a:spcPct val="90000"/>
+            </a:lnSpc>
+            <a:spcBef>
+              <a:spcPct val="0"/>
+            </a:spcBef>
+            <a:spcAft>
+              <a:spcPct val="15000"/>
+            </a:spcAft>
+            <a:buChar char="•"/>
+          </a:pPr>
+          <a:r>
+            <a:rPr lang="en-US" sz="2100" kern="1200" dirty="0"/>
+            <a:t>Starts with cost report #, which is how its tied to report file</a:t>
+          </a:r>
+        </a:p>
+        <a:p>
+          <a:pPr marL="228600" lvl="1" indent="-228600" algn="l" defTabSz="933450">
+            <a:lnSpc>
+              <a:spcPct val="90000"/>
+            </a:lnSpc>
+            <a:spcBef>
+              <a:spcPct val="0"/>
+            </a:spcBef>
+            <a:spcAft>
+              <a:spcPct val="15000"/>
+            </a:spcAft>
+            <a:buChar char="•"/>
+          </a:pPr>
+          <a:r>
+            <a:rPr lang="en-US" sz="2100" kern="1200" dirty="0"/>
+            <a:t>Then worksheet, column, line, and finally value </a:t>
+          </a:r>
+        </a:p>
+      </dsp:txBody>
+      <dsp:txXfrm>
+        <a:off x="3327" y="763909"/>
+        <a:ext cx="3244283" cy="3170474"/>
+      </dsp:txXfrm>
+    </dsp:sp>
+    <dsp:sp modelId="{9DF81799-1DFA-46E0-8488-1C75385EB0F3}">
+      <dsp:nvSpPr>
+        <dsp:cNvPr id="0" name=""/>
+        <dsp:cNvSpPr/>
+      </dsp:nvSpPr>
+      <dsp:spPr>
+        <a:xfrm>
+          <a:off x="3701810" y="159109"/>
+          <a:ext cx="3244283" cy="604800"/>
+        </a:xfrm>
+        <a:prstGeom prst="rect">
+          <a:avLst/>
+        </a:prstGeom>
+        <a:solidFill>
+          <a:schemeClr val="accent5">
+            <a:hueOff val="-5047671"/>
+            <a:satOff val="-41420"/>
+            <a:lumOff val="22549"/>
+            <a:alphaOff val="0"/>
+          </a:schemeClr>
+        </a:solidFill>
+        <a:ln w="25400" cap="flat" cmpd="sng" algn="ctr">
+          <a:solidFill>
+            <a:schemeClr val="accent5">
+              <a:hueOff val="-5047671"/>
+              <a:satOff val="-41420"/>
+              <a:lumOff val="22549"/>
+              <a:alphaOff val="0"/>
+            </a:schemeClr>
+          </a:solidFill>
+          <a:prstDash val="solid"/>
+        </a:ln>
+        <a:effectLst/>
+      </dsp:spPr>
+      <dsp:style>
+        <a:lnRef idx="2">
+          <a:scrgbClr r="0" g="0" b="0"/>
+        </a:lnRef>
+        <a:fillRef idx="1">
+          <a:scrgbClr r="0" g="0" b="0"/>
+        </a:fillRef>
+        <a:effectRef idx="0">
+          <a:scrgbClr r="0" g="0" b="0"/>
+        </a:effectRef>
+        <a:fontRef idx="minor">
+          <a:schemeClr val="lt1"/>
+        </a:fontRef>
+      </dsp:style>
+      <dsp:txBody>
+        <a:bodyPr spcFirstLastPara="0" vert="horz" wrap="square" lIns="149352" tIns="85344" rIns="149352" bIns="85344" numCol="1" spcCol="1270" anchor="ctr" anchorCtr="0">
+          <a:noAutofit/>
+        </a:bodyPr>
+        <a:lstStyle/>
+        <a:p>
+          <a:pPr marL="0" lvl="0" indent="0" algn="ctr" defTabSz="933450">
+            <a:lnSpc>
+              <a:spcPct val="90000"/>
+            </a:lnSpc>
+            <a:spcBef>
+              <a:spcPct val="0"/>
+            </a:spcBef>
+            <a:spcAft>
+              <a:spcPct val="35000"/>
+            </a:spcAft>
+            <a:buNone/>
+          </a:pPr>
+          <a:r>
+            <a:rPr lang="en-US" sz="2100" kern="1200" dirty="0"/>
+            <a:t>Report File</a:t>
+          </a:r>
+        </a:p>
+      </dsp:txBody>
+      <dsp:txXfrm>
+        <a:off x="3701810" y="159109"/>
+        <a:ext cx="3244283" cy="604800"/>
+      </dsp:txXfrm>
+    </dsp:sp>
+    <dsp:sp modelId="{7B97309F-8D65-4C9A-8ECF-47AA5FAD2D8D}">
+      <dsp:nvSpPr>
+        <dsp:cNvPr id="0" name=""/>
+        <dsp:cNvSpPr/>
+      </dsp:nvSpPr>
+      <dsp:spPr>
+        <a:xfrm>
+          <a:off x="3701810" y="763909"/>
+          <a:ext cx="3244283" cy="3170474"/>
+        </a:xfrm>
+        <a:prstGeom prst="rect">
+          <a:avLst/>
+        </a:prstGeom>
+        <a:solidFill>
+          <a:schemeClr val="accent5">
+            <a:tint val="40000"/>
+            <a:alpha val="90000"/>
+            <a:hueOff val="-5532945"/>
+            <a:satOff val="2028"/>
+            <a:lumOff val="3581"/>
+            <a:alphaOff val="0"/>
+          </a:schemeClr>
+        </a:solidFill>
+        <a:ln w="25400" cap="flat" cmpd="sng" algn="ctr">
+          <a:solidFill>
+            <a:schemeClr val="accent5">
+              <a:tint val="40000"/>
+              <a:alpha val="90000"/>
+              <a:hueOff val="-5532945"/>
+              <a:satOff val="2028"/>
+              <a:lumOff val="3581"/>
+              <a:alphaOff val="0"/>
+            </a:schemeClr>
+          </a:solidFill>
+          <a:prstDash val="solid"/>
+        </a:ln>
+        <a:effectLst/>
+      </dsp:spPr>
+      <dsp:style>
+        <a:lnRef idx="2">
+          <a:scrgbClr r="0" g="0" b="0"/>
+        </a:lnRef>
+        <a:fillRef idx="1">
+          <a:scrgbClr r="0" g="0" b="0"/>
+        </a:fillRef>
+        <a:effectRef idx="0">
+          <a:scrgbClr r="0" g="0" b="0"/>
+        </a:effectRef>
+        <a:fontRef idx="minor"/>
+      </dsp:style>
+      <dsp:txBody>
+        <a:bodyPr spcFirstLastPara="0" vert="horz" wrap="square" lIns="112014" tIns="112014" rIns="149352" bIns="168021" numCol="1" spcCol="1270" anchor="t" anchorCtr="0">
+          <a:noAutofit/>
+        </a:bodyPr>
+        <a:lstStyle/>
+        <a:p>
+          <a:pPr marL="228600" lvl="1" indent="-228600" algn="l" defTabSz="933450">
+            <a:lnSpc>
+              <a:spcPct val="90000"/>
+            </a:lnSpc>
+            <a:spcBef>
+              <a:spcPct val="0"/>
+            </a:spcBef>
+            <a:spcAft>
+              <a:spcPct val="15000"/>
+            </a:spcAft>
+            <a:buChar char="•"/>
+          </a:pPr>
+          <a:r>
+            <a:rPr lang="en-US" sz="2100" kern="1200" dirty="0"/>
+            <a:t>Cost Report # is unique identifier (1 filed per hospital per year</a:t>
+          </a:r>
+        </a:p>
+        <a:p>
+          <a:pPr marL="228600" lvl="1" indent="-228600" algn="l" defTabSz="933450">
+            <a:lnSpc>
+              <a:spcPct val="90000"/>
+            </a:lnSpc>
+            <a:spcBef>
+              <a:spcPct val="0"/>
+            </a:spcBef>
+            <a:spcAft>
+              <a:spcPct val="15000"/>
+            </a:spcAft>
+            <a:buChar char="•"/>
+          </a:pPr>
+          <a:r>
+            <a:rPr lang="en-US" sz="2100" kern="1200" dirty="0"/>
+            <a:t>Cost Report should be unique to a hospital year, but sometimes there are exceptions (acquisition, fiscal year change </a:t>
+          </a:r>
+          <a:r>
+            <a:rPr lang="en-US" sz="2100" kern="1200" dirty="0" err="1"/>
+            <a:t>etc</a:t>
+          </a:r>
+          <a:r>
+            <a:rPr lang="en-US" sz="2100" kern="1200" dirty="0"/>
+            <a:t>)</a:t>
+          </a:r>
+        </a:p>
+      </dsp:txBody>
+      <dsp:txXfrm>
+        <a:off x="3701810" y="763909"/>
+        <a:ext cx="3244283" cy="3170474"/>
+      </dsp:txXfrm>
+    </dsp:sp>
+    <dsp:sp modelId="{F40A6644-A417-4577-9291-72E3C85BC40A}">
+      <dsp:nvSpPr>
+        <dsp:cNvPr id="0" name=""/>
+        <dsp:cNvSpPr/>
+      </dsp:nvSpPr>
+      <dsp:spPr>
+        <a:xfrm>
+          <a:off x="7400293" y="159109"/>
+          <a:ext cx="3244283" cy="604800"/>
+        </a:xfrm>
+        <a:prstGeom prst="rect">
+          <a:avLst/>
+        </a:prstGeom>
+        <a:solidFill>
+          <a:schemeClr val="accent5">
+            <a:hueOff val="-10095342"/>
+            <a:satOff val="-82840"/>
+            <a:lumOff val="45098"/>
+            <a:alphaOff val="0"/>
+          </a:schemeClr>
+        </a:solidFill>
+        <a:ln w="25400" cap="flat" cmpd="sng" algn="ctr">
+          <a:solidFill>
+            <a:schemeClr val="accent5">
+              <a:hueOff val="-10095342"/>
+              <a:satOff val="-82840"/>
+              <a:lumOff val="45098"/>
+              <a:alphaOff val="0"/>
+            </a:schemeClr>
+          </a:solidFill>
+          <a:prstDash val="solid"/>
+        </a:ln>
+        <a:effectLst/>
+      </dsp:spPr>
+      <dsp:style>
+        <a:lnRef idx="2">
+          <a:scrgbClr r="0" g="0" b="0"/>
+        </a:lnRef>
+        <a:fillRef idx="1">
+          <a:scrgbClr r="0" g="0" b="0"/>
+        </a:fillRef>
+        <a:effectRef idx="0">
+          <a:scrgbClr r="0" g="0" b="0"/>
+        </a:effectRef>
+        <a:fontRef idx="minor">
+          <a:schemeClr val="lt1"/>
+        </a:fontRef>
+      </dsp:style>
+      <dsp:txBody>
+        <a:bodyPr spcFirstLastPara="0" vert="horz" wrap="square" lIns="149352" tIns="85344" rIns="149352" bIns="85344" numCol="1" spcCol="1270" anchor="ctr" anchorCtr="0">
+          <a:noAutofit/>
+        </a:bodyPr>
+        <a:lstStyle/>
+        <a:p>
+          <a:pPr marL="0" lvl="0" indent="0" algn="ctr" defTabSz="933450">
+            <a:lnSpc>
+              <a:spcPct val="90000"/>
+            </a:lnSpc>
+            <a:spcBef>
+              <a:spcPct val="0"/>
+            </a:spcBef>
+            <a:spcAft>
+              <a:spcPct val="35000"/>
+            </a:spcAft>
+            <a:buNone/>
+          </a:pPr>
+          <a:r>
+            <a:rPr lang="en-US" sz="2100" kern="1200" dirty="0"/>
+            <a:t>Numeric File</a:t>
+          </a:r>
+        </a:p>
+      </dsp:txBody>
+      <dsp:txXfrm>
+        <a:off x="7400293" y="159109"/>
+        <a:ext cx="3244283" cy="604800"/>
+      </dsp:txXfrm>
+    </dsp:sp>
+    <dsp:sp modelId="{C68DB6A3-76F1-42AE-ADBA-689E92E8F914}">
+      <dsp:nvSpPr>
+        <dsp:cNvPr id="0" name=""/>
+        <dsp:cNvSpPr/>
+      </dsp:nvSpPr>
+      <dsp:spPr>
+        <a:xfrm>
+          <a:off x="7400293" y="763909"/>
+          <a:ext cx="3244283" cy="3170474"/>
+        </a:xfrm>
+        <a:prstGeom prst="rect">
+          <a:avLst/>
+        </a:prstGeom>
+        <a:solidFill>
+          <a:schemeClr val="accent5">
+            <a:tint val="40000"/>
+            <a:alpha val="90000"/>
+            <a:hueOff val="-11065889"/>
+            <a:satOff val="4055"/>
+            <a:lumOff val="7162"/>
+            <a:alphaOff val="0"/>
+          </a:schemeClr>
+        </a:solidFill>
+        <a:ln w="25400" cap="flat" cmpd="sng" algn="ctr">
+          <a:solidFill>
+            <a:schemeClr val="accent5">
+              <a:tint val="40000"/>
+              <a:alpha val="90000"/>
+              <a:hueOff val="-11065889"/>
+              <a:satOff val="4055"/>
+              <a:lumOff val="7162"/>
+              <a:alphaOff val="0"/>
+            </a:schemeClr>
+          </a:solidFill>
+          <a:prstDash val="solid"/>
+        </a:ln>
+        <a:effectLst/>
+      </dsp:spPr>
+      <dsp:style>
+        <a:lnRef idx="2">
+          <a:scrgbClr r="0" g="0" b="0"/>
+        </a:lnRef>
+        <a:fillRef idx="1">
+          <a:scrgbClr r="0" g="0" b="0"/>
+        </a:fillRef>
+        <a:effectRef idx="0">
+          <a:scrgbClr r="0" g="0" b="0"/>
+        </a:effectRef>
+        <a:fontRef idx="minor"/>
+      </dsp:style>
+      <dsp:txBody>
+        <a:bodyPr spcFirstLastPara="0" vert="horz" wrap="square" lIns="112014" tIns="112014" rIns="149352" bIns="168021" numCol="1" spcCol="1270" anchor="t" anchorCtr="0">
+          <a:noAutofit/>
+        </a:bodyPr>
+        <a:lstStyle/>
+        <a:p>
+          <a:pPr marL="228600" lvl="1" indent="-228600" algn="l" defTabSz="933450">
+            <a:lnSpc>
+              <a:spcPct val="90000"/>
+            </a:lnSpc>
+            <a:spcBef>
+              <a:spcPct val="0"/>
+            </a:spcBef>
+            <a:spcAft>
+              <a:spcPct val="15000"/>
+            </a:spcAft>
+            <a:buChar char="•"/>
+          </a:pPr>
+          <a:r>
+            <a:rPr lang="en-US" sz="2100" kern="1200" dirty="0"/>
+            <a:t>Individual numeric character value on worksheet is unique identifier</a:t>
+          </a:r>
+        </a:p>
+        <a:p>
+          <a:pPr marL="228600" lvl="1" indent="-228600" algn="l" defTabSz="933450">
+            <a:lnSpc>
+              <a:spcPct val="90000"/>
+            </a:lnSpc>
+            <a:spcBef>
+              <a:spcPct val="0"/>
+            </a:spcBef>
+            <a:spcAft>
+              <a:spcPct val="15000"/>
+            </a:spcAft>
+            <a:buChar char="•"/>
+          </a:pPr>
+          <a:r>
+            <a:rPr lang="en-US" sz="2100" kern="1200" dirty="0"/>
+            <a:t>Starts with cost report #, which is how its tied to report file</a:t>
+          </a:r>
+        </a:p>
+        <a:p>
+          <a:pPr marL="228600" lvl="1" indent="-228600" algn="l" defTabSz="933450">
+            <a:lnSpc>
+              <a:spcPct val="90000"/>
+            </a:lnSpc>
+            <a:spcBef>
+              <a:spcPct val="0"/>
+            </a:spcBef>
+            <a:spcAft>
+              <a:spcPct val="15000"/>
+            </a:spcAft>
+            <a:buChar char="•"/>
+          </a:pPr>
+          <a:r>
+            <a:rPr lang="en-US" sz="2100" kern="1200" dirty="0"/>
+            <a:t>Then worksheet, column, line, and finally value </a:t>
+          </a:r>
+        </a:p>
+      </dsp:txBody>
+      <dsp:txXfrm>
+        <a:off x="7400293" y="763909"/>
+        <a:ext cx="3244283" cy="3170474"/>
+      </dsp:txXfrm>
+    </dsp:sp>
+  </dsp:spTree>
+</dsp:drawing>
+</file>
+
+<file path=ppt/diagrams/layout1.xml><?xml version="1.0" encoding="utf-8"?>
+<dgm:layoutDef xmlns:dgm="http://schemas.openxmlformats.org/drawingml/2006/diagram" xmlns:a="http://schemas.openxmlformats.org/drawingml/2006/main" uniqueId="urn:microsoft.com/office/officeart/2005/8/layout/hList1">
+  <dgm:title val=""/>
+  <dgm:desc val=""/>
+  <dgm:catLst>
+    <dgm:cat type="list" pri="5000"/>
+    <dgm:cat type="convert" pri="5000"/>
+  </dgm:catLst>
+  <dgm:sampData>
+    <dgm:dataModel>
+      <dgm:ptLst>
+        <dgm:pt modelId="0" type="doc"/>
+        <dgm:pt modelId="1">
+          <dgm:prSet phldr="1"/>
+        </dgm:pt>
+        <dgm:pt modelId="11">
+          <dgm:prSet phldr="1"/>
+        </dgm:pt>
+        <dgm:pt modelId="12">
+          <dgm:prSet phldr="1"/>
+        </dgm:pt>
+        <dgm:pt modelId="2">
+          <dgm:prSet phldr="1"/>
+        </dgm:pt>
+        <dgm:pt modelId="21">
+          <dgm:prSet phldr="1"/>
+        </dgm:pt>
+        <dgm:pt modelId="22">
+          <dgm:prSet phldr="1"/>
+        </dgm:pt>
+        <dgm:pt modelId="3">
+          <dgm:prSet phldr="1"/>
+        </dgm:pt>
+        <dgm:pt modelId="31">
+          <dgm:prSet phldr="1"/>
+        </dgm:pt>
+        <dgm:pt modelId="32">
+          <dgm:prSet phldr="1"/>
+        </dgm:pt>
+      </dgm:ptLst>
+      <dgm:cxnLst>
+        <dgm:cxn modelId="4" srcId="0" destId="1" srcOrd="0" destOrd="0"/>
+        <dgm:cxn modelId="5" srcId="0" destId="2" srcOrd="1" destOrd="0"/>
+        <dgm:cxn modelId="6" srcId="0" destId="3" srcOrd="2" destOrd="0"/>
+        <dgm:cxn modelId="13" srcId="1" destId="11" srcOrd="0" destOrd="0"/>
+        <dgm:cxn modelId="14" srcId="1" destId="12" srcOrd="1" destOrd="0"/>
+        <dgm:cxn modelId="23" srcId="2" destId="21" srcOrd="0" destOrd="0"/>
+        <dgm:cxn modelId="24" srcId="2" destId="22" srcOrd="1" destOrd="0"/>
+        <dgm:cxn modelId="33" srcId="3" destId="31" srcOrd="0" destOrd="0"/>
+        <dgm:cxn modelId="34" srcId="3" destId="32" srcOrd="1" destOrd="0"/>
+      </dgm:cxnLst>
+      <dgm:bg/>
+      <dgm:whole/>
+    </dgm:dataModel>
+  </dgm:sampData>
+  <dgm:styleData>
+    <dgm:dataModel>
+      <dgm:ptLst>
+        <dgm:pt modelId="0" type="doc"/>
+        <dgm:pt modelId="1">
+          <dgm:prSet phldr="1"/>
+        </dgm:pt>
+        <dgm:pt modelId="2">
+          <dgm:prSet phldr="1"/>
+        </dgm:pt>
+      </dgm:ptLst>
+      <dgm:cxnLst>
+        <dgm:cxn modelId="3" srcId="0" destId="1" srcOrd="0" destOrd="0"/>
+        <dgm:cxn modelId="4" srcId="0" destId="2" srcOrd="1" destOrd="0"/>
+      </dgm:cxnLst>
+      <dgm:bg/>
+      <dgm:whole/>
+    </dgm:dataModel>
+  </dgm:styleData>
+  <dgm:clrData>
+    <dgm:dataModel>
+      <dgm:ptLst>
+        <dgm:pt modelId="0" type="doc"/>
+        <dgm:pt modelId="1">
+          <dgm:prSet phldr="1"/>
+        </dgm:pt>
+        <dgm:pt modelId="2">
+          <dgm:prSet phldr="1"/>
+        </dgm:pt>
+        <dgm:pt modelId="3">
+          <dgm:prSet phldr="1"/>
+        </dgm:pt>
+        <dgm:pt modelId="4">
+          <dgm:prSet phldr="1"/>
+        </dgm:pt>
+      </dgm:ptLst>
+      <dgm:cxnLst>
+        <dgm:cxn modelId="5" srcId="0" destId="1" srcOrd="0" destOrd="0"/>
+        <dgm:cxn modelId="6" srcId="0" destId="2" srcOrd="1" destOrd="0"/>
+        <dgm:cxn modelId="7" srcId="0" destId="3" srcOrd="2" destOrd="0"/>
+        <dgm:cxn modelId="8" srcId="0" destId="4" srcOrd="3" destOrd="0"/>
+      </dgm:cxnLst>
+      <dgm:bg/>
+      <dgm:whole/>
+    </dgm:dataModel>
+  </dgm:clrData>
+  <dgm:layoutNode name="Name0">
+    <dgm:varLst>
+      <dgm:dir/>
+      <dgm:animLvl val="lvl"/>
+      <dgm:resizeHandles val="exact"/>
+    </dgm:varLst>
+    <dgm:choose name="Name1">
+      <dgm:if name="Name2" func="var" arg="dir" op="equ" val="norm">
+        <dgm:alg type="lin"/>
+      </dgm:if>
+      <dgm:else name="Name3">
+        <dgm:alg type="lin">
+          <dgm:param type="linDir" val="fromR"/>
+        </dgm:alg>
+      </dgm:else>
+    </dgm:choose>
+    <dgm:shape xmlns:r="http://schemas.openxmlformats.org/officeDocument/2006/relationships" r:blip="">
+      <dgm:adjLst/>
+    </dgm:shape>
+    <dgm:presOf/>
+    <dgm:constrLst>
+      <dgm:constr type="h" for="ch" forName="composite" refType="h"/>
+      <dgm:constr type="w" for="ch" forName="composite" refType="w"/>
+      <dgm:constr type="w" for="des" forName="parTx"/>
+      <dgm:constr type="h" for="des" forName="parTx" op="equ"/>
+      <dgm:constr type="w" for="des" forName="desTx"/>
+      <dgm:constr type="h" for="des" forName="desTx" op="equ"/>
+      <dgm:constr type="primFontSz" for="des" forName="parTx" val="65"/>
+      <dgm:constr type="secFontSz" for="des" forName="desTx" refType="primFontSz" refFor="des" refForName="parTx" op="equ"/>
+      <dgm:constr type="h" for="des" forName="parTx" refType="primFontSz" refFor="des" refForName="parTx" fact="0.8"/>
+      <dgm:constr type="h" for="des" forName="desTx" refType="primFontSz" refFor="des" refForName="parTx" fact="1.22"/>
+      <dgm:constr type="w" for="ch" forName="space" refType="w" refFor="ch" refForName="composite" op="equ" fact="0.14"/>
+    </dgm:constrLst>
+    <dgm:ruleLst>
+      <dgm:rule type="w" for="ch" forName="composite" val="0" fact="NaN" max="NaN"/>
+      <dgm:rule type="primFontSz" for="des" forName="parTx" val="5" fact="NaN" max="NaN"/>
+    </dgm:ruleLst>
+    <dgm:forEach name="Name4" axis="ch" ptType="node">
+      <dgm:layoutNode name="composite">
+        <dgm:alg type="composite"/>
+        <dgm:shape xmlns:r="http://schemas.openxmlformats.org/officeDocument/2006/relationships" r:blip="">
+          <dgm:adjLst/>
+        </dgm:shape>
+        <dgm:presOf/>
+        <dgm:constrLst>
+          <dgm:constr type="l" for="ch" forName="parTx"/>
+          <dgm:constr type="w" for="ch" forName="parTx" refType="w"/>
+          <dgm:constr type="t" for="ch" forName="parTx"/>
+          <dgm:constr type="l" for="ch" forName="desTx"/>
+          <dgm:constr type="w" for="ch" forName="desTx" refType="w" refFor="ch" refForName="parTx"/>
+          <dgm:constr type="t" for="ch" forName="desTx" refType="h" refFor="ch" refForName="parTx"/>
+        </dgm:constrLst>
+        <dgm:ruleLst>
+          <dgm:rule type="h" val="INF" fact="NaN" max="NaN"/>
+        </dgm:ruleLst>
+        <dgm:layoutNode name="parTx" styleLbl="alignNode1">
+          <dgm:varLst>
+            <dgm:chMax val="0"/>
+            <dgm:chPref val="0"/>
+            <dgm:bulletEnabled val="1"/>
+          </dgm:varLst>
+          <dgm:alg type="tx"/>
+          <dgm:shape xmlns:r="http://schemas.openxmlformats.org/officeDocument/2006/relationships" type="rect" r:blip="">
+            <dgm:adjLst/>
+          </dgm:shape>
+          <dgm:presOf axis="self" ptType="node"/>
+          <dgm:constrLst>
+            <dgm:constr type="h" refType="w" op="lte" fact="0.4"/>
+            <dgm:constr type="h"/>
+            <dgm:constr type="tMarg" refType="primFontSz" fact="0.32"/>
+            <dgm:constr type="bMarg" refType="primFontSz" fact="0.32"/>
+          </dgm:constrLst>
+          <dgm:ruleLst>
+            <dgm:rule type="h" val="INF" fact="NaN" max="NaN"/>
+          </dgm:ruleLst>
+        </dgm:layoutNode>
+        <dgm:layoutNode name="desTx" styleLbl="alignAccFollowNode1">
+          <dgm:varLst>
+            <dgm:bulletEnabled val="1"/>
+          </dgm:varLst>
+          <dgm:alg type="tx">
+            <dgm:param type="stBulletLvl" val="1"/>
+          </dgm:alg>
+          <dgm:shape xmlns:r="http://schemas.openxmlformats.org/officeDocument/2006/relationships" type="rect" r:blip="">
+            <dgm:adjLst/>
+          </dgm:shape>
+          <dgm:presOf axis="des" ptType="node"/>
+          <dgm:constrLst>
+            <dgm:constr type="secFontSz" val="65"/>
+            <dgm:constr type="primFontSz" refType="secFontSz"/>
+            <dgm:constr type="h"/>
+            <dgm:constr type="lMarg" refType="primFontSz" fact="0.42"/>
+            <dgm:constr type="tMarg" refType="primFontSz" fact="0.42"/>
+            <dgm:constr type="bMarg" refType="primFontSz" fact="0.63"/>
+          </dgm:constrLst>
+          <dgm:ruleLst>
+            <dgm:rule type="h" val="INF" fact="NaN" max="NaN"/>
+          </dgm:ruleLst>
+        </dgm:layoutNode>
+      </dgm:layoutNode>
+      <dgm:forEach name="Name5" axis="followSib" ptType="sibTrans" cnt="1">
+        <dgm:layoutNode name="space">
+          <dgm:alg type="sp"/>
+          <dgm:shape xmlns:r="http://schemas.openxmlformats.org/officeDocument/2006/relationships" r:blip="">
+            <dgm:adjLst/>
+          </dgm:shape>
+          <dgm:presOf/>
+          <dgm:constrLst/>
+          <dgm:ruleLst/>
+        </dgm:layoutNode>
+      </dgm:forEach>
+    </dgm:forEach>
+  </dgm:layoutNode>
+</dgm:layoutDef>
+</file>
+
+<file path=ppt/diagrams/quickStyle1.xml><?xml version="1.0" encoding="utf-8"?>
+<dgm:styleDef xmlns:dgm="http://schemas.openxmlformats.org/drawingml/2006/diagram" xmlns:a="http://schemas.openxmlformats.org/drawingml/2006/main" uniqueId="urn:microsoft.com/office/officeart/2005/8/quickstyle/simple1">
+  <dgm:title val=""/>
+  <dgm:desc val=""/>
+  <dgm:catLst>
+    <dgm:cat type="simple" pri="10100"/>
+  </dgm:catLst>
+  <dgm:scene3d>
+    <a:camera prst="orthographicFront"/>
+    <a:lightRig rig="threePt" dir="t"/>
+  </dgm:scene3d>
+  <dgm:styleLbl name="node0">
+    <dgm:scene3d>
+      <a:camera prst="orthographicFront"/>
+      <a:lightRig rig="threePt" dir="t"/>
+    </dgm:scene3d>
+    <dgm:sp3d/>
+    <dgm:txPr/>
+    <dgm:style>
+      <a:lnRef idx="2">
+        <a:scrgbClr r="0" g="0" b="0"/>
+      </a:lnRef>
+      <a:fillRef idx="1">
+        <a:scrgbClr r="0" g="0" b="0"/>
+      </a:fillRef>
+      <a:effectRef idx="0">
+        <a:scrgbClr r="0" g="0" b="0"/>
+      </a:effectRef>
+      <a:fontRef idx="minor">
+        <a:schemeClr val="lt1"/>
+      </a:fontRef>
+    </dgm:style>
+  </dgm:styleLbl>
+  <dgm:styleLbl name="lnNode1">
+    <dgm:scene3d>
+      <a:camera prst="orthographicFront"/>
+      <a:lightRig rig="threePt" dir="t"/>
+    </dgm:scene3d>
+    <dgm:sp3d/>
+    <dgm:txPr/>
+    <dgm:style>
+      <a:lnRef idx="2">
+        <a:scrgbClr r="0" g="0" b="0"/>
+      </a:lnRef>
+      <a:fillRef idx="1">
+        <a:scrgbClr r="0" g="0" b="0"/>
+      </a:fillRef>
+      <a:effectRef idx="0">
+        <a:scrgbClr r="0" g="0" b="0"/>
+      </a:effectRef>
+      <a:fontRef idx="minor">
+        <a:schemeClr val="lt1"/>
+      </a:fontRef>
+    </dgm:style>
+  </dgm:styleLbl>
+  <dgm:styleLbl name="vennNode1">
+    <dgm:scene3d>
+      <a:camera prst="orthographicFront"/>
+      <a:lightRig rig="threePt" dir="t"/>
+    </dgm:scene3d>
+    <dgm:sp3d/>
+    <dgm:txPr/>
+    <dgm:style>
+      <a:lnRef idx="2">
+        <a:scrgbClr r="0" g="0" b="0"/>
+      </a:lnRef>
+      <a:fillRef idx="1">
+        <a:scrgbClr r="0" g="0" b="0"/>
+      </a:fillRef>
+      <a:effectRef idx="0">
+        <a:scrgbClr r="0" g="0" b="0"/>
+      </a:effectRef>
+      <a:fontRef idx="minor">
+        <a:schemeClr val="tx1"/>
+      </a:fontRef>
+    </dgm:style>
+  </dgm:styleLbl>
+  <dgm:styleLbl name="alignNode1">
+    <dgm:scene3d>
+      <a:camera prst="orthographicFront"/>
+      <a:lightRig rig="threePt" dir="t"/>
+    </dgm:scene3d>
+    <dgm:sp3d/>
+    <dgm:txPr/>
+    <dgm:style>
+      <a:lnRef idx="2">
+        <a:scrgbClr r="0" g="0" b="0"/>
+      </a:lnRef>
+      <a:fillRef idx="1">
+        <a:scrgbClr r="0" g="0" b="0"/>
+      </a:fillRef>
+      <a:effectRef idx="0">
+        <a:scrgbClr r="0" g="0" b="0"/>
+      </a:effectRef>
+      <a:fontRef idx="minor">
+        <a:schemeClr val="lt1"/>
+      </a:fontRef>
+    </dgm:style>
+  </dgm:styleLbl>
+  <dgm:styleLbl name="node1">
+    <dgm:scene3d>
+      <a:camera prst="orthographicFront"/>
+      <a:lightRig rig="threePt" dir="t"/>
+    </dgm:scene3d>
+    <dgm:sp3d/>
+    <dgm:txPr/>
+    <dgm:style>
+      <a:lnRef idx="2">
+        <a:scrgbClr r="0" g="0" b="0"/>
+      </a:lnRef>
+      <a:fillRef idx="1">
+        <a:scrgbClr r="0" g="0" b="0"/>
+      </a:fillRef>
+      <a:effectRef idx="0">
+        <a:scrgbClr r="0" g="0" b="0"/>
+      </a:effectRef>
+      <a:fontRef idx="minor">
+        <a:schemeClr val="lt1"/>
+      </a:fontRef>
+    </dgm:style>
+  </dgm:styleLbl>
+  <dgm:styleLbl name="node2">
+    <dgm:scene3d>
+      <a:camera prst="orthographicFront"/>
+      <a:lightRig rig="threePt" dir="t"/>
+    </dgm:scene3d>
+    <dgm:sp3d/>
+    <dgm:txPr/>
+    <dgm:style>
+      <a:lnRef idx="2">
+        <a:scrgbClr r="0" g="0" b="0"/>
+      </a:lnRef>
+      <a:fillRef idx="1">
+        <a:scrgbClr r="0" g="0" b="0"/>
+      </a:fillRef>
+      <a:effectRef idx="0">
+        <a:scrgbClr r="0" g="0" b="0"/>
+      </a:effectRef>
+      <a:fontRef idx="minor">
+        <a:schemeClr val="lt1"/>
+      </a:fontRef>
+    </dgm:style>
+  </dgm:styleLbl>
+  <dgm:styleLbl name="node3">
+    <dgm:scene3d>
+      <a:camera prst="orthographicFront"/>
+      <a:lightRig rig="threePt" dir="t"/>
+    </dgm:scene3d>
+    <dgm:sp3d/>
+    <dgm:txPr/>
+    <dgm:style>
+      <a:lnRef idx="2">
+        <a:scrgbClr r="0" g="0" b="0"/>
+      </a:lnRef>
+      <a:fillRef idx="1">
+        <a:scrgbClr r="0" g="0" b="0"/>
+      </a:fillRef>
+      <a:effectRef idx="0">
+        <a:scrgbClr r="0" g="0" b="0"/>
+      </a:effectRef>
+      <a:fontRef idx="minor">
+        <a:schemeClr val="lt1"/>
+      </a:fontRef>
+    </dgm:style>
+  </dgm:styleLbl>
+  <dgm:styleLbl name="node4">
+    <dgm:scene3d>
+      <a:camera prst="orthographicFront"/>
+      <a:lightRig rig="threePt" dir="t"/>
+    </dgm:scene3d>
+    <dgm:sp3d/>
+    <dgm:txPr/>
+    <dgm:style>
+      <a:lnRef idx="2">
+        <a:scrgbClr r="0" g="0" b="0"/>
+      </a:lnRef>
+      <a:fillRef idx="1">
+        <a:scrgbClr r="0" g="0" b="0"/>
+      </a:fillRef>
+      <a:effectRef idx="0">
+        <a:scrgbClr r="0" g="0" b="0"/>
+      </a:effectRef>
+      <a:fontRef idx="minor">
+        <a:schemeClr val="lt1"/>
+      </a:fontRef>
+    </dgm:style>
+  </dgm:styleLbl>
+  <dgm:styleLbl name="fgImgPlace1">
+    <dgm:scene3d>
+      <a:camera prst="orthographicFront"/>
+      <a:lightRig rig="threePt" dir="t"/>
+    </dgm:scene3d>
+    <dgm:sp3d/>
+    <dgm:txPr/>
+    <dgm:style>
+      <a:lnRef idx="2">
+        <a:scrgbClr r="0" g="0" b="0"/>
+      </a:lnRef>
+      <a:fillRef idx="1">
+        <a:scrgbClr r="0" g="0" b="0"/>
+      </a:fillRef>
+      <a:effectRef idx="0">
+        <a:scrgbClr r="0" g="0" b="0"/>
+      </a:effectRef>
+      <a:fontRef idx="minor"/>
+    </dgm:style>
+  </dgm:styleLbl>
+  <dgm:styleLbl name="alignImgPlace1">
+    <dgm:scene3d>
+      <a:camera prst="orthographicFront"/>
+      <a:lightRig rig="threePt" dir="t"/>
+    </dgm:scene3d>
+    <dgm:sp3d/>
+    <dgm:txPr/>
+    <dgm:style>
+      <a:lnRef idx="2">
+        <a:scrgbClr r="0" g="0" b="0"/>
+      </a:lnRef>
+      <a:fillRef idx="1">
+        <a:scrgbClr r="0" g="0" b="0"/>
+      </a:fillRef>
+      <a:effectRef idx="0">
+        <a:scrgbClr r="0" g="0" b="0"/>
+      </a:effectRef>
+      <a:fontRef idx="minor"/>
+    </dgm:style>
+  </dgm:styleLbl>
+  <dgm:styleLbl name="bgImgPlace1">
+    <dgm:scene3d>
+      <a:camera prst="orthographicFront"/>
+      <a:lightRig rig="threePt" dir="t"/>
+    </dgm:scene3d>
+    <dgm:sp3d/>
+    <dgm:txPr/>
+    <dgm:style>
+      <a:lnRef idx="2">
+        <a:scrgbClr r="0" g="0" b="0"/>
+      </a:lnRef>
+      <a:fillRef idx="1">
+        <a:scrgbClr r="0" g="0" b="0"/>
+      </a:fillRef>
+      <a:effectRef idx="0">
+        <a:scrgbClr r="0" g="0" b="0"/>
+      </a:effectRef>
+      <a:fontRef idx="minor"/>
+    </dgm:style>
+  </dgm:styleLbl>
+  <dgm:styleLbl name="sibTrans2D1">
+    <dgm:scene3d>
+      <a:camera prst="orthographicFront"/>
+      <a:lightRig rig="threePt" dir="t"/>
+    </dgm:scene3d>
+    <dgm:sp3d/>
+    <dgm:txPr/>
+    <dgm:style>
+      <a:lnRef idx="0">
+        <a:scrgbClr r="0" g="0" b="0"/>
+      </a:lnRef>
+      <a:fillRef idx="1">
+        <a:scrgbClr r="0" g="0" b="0"/>
+      </a:fillRef>
+      <a:effectRef idx="0">
+        <a:scrgbClr r="0" g="0" b="0"/>
+      </a:effectRef>
+      <a:fontRef idx="minor">
+        <a:schemeClr val="lt1"/>
+      </a:fontRef>
+    </dgm:style>
+  </dgm:styleLbl>
+  <dgm:styleLbl name="fgSibTrans2D1">
+    <dgm:scene3d>
+      <a:camera prst="orthographicFront"/>
+      <a:lightRig rig="threePt" dir="t"/>
+    </dgm:scene3d>
+    <dgm:sp3d/>
+    <dgm:txPr/>
+    <dgm:style>
+      <a:lnRef idx="0">
+        <a:scrgbClr r="0" g="0" b="0"/>
+      </a:lnRef>
+      <a:fillRef idx="1">
+        <a:scrgbClr r="0" g="0" b="0"/>
+      </a:fillRef>
+      <a:effectRef idx="0">
+        <a:scrgbClr r="0" g="0" b="0"/>
+      </a:effectRef>
+      <a:fontRef idx="minor">
+        <a:schemeClr val="lt1"/>
+      </a:fontRef>
+    </dgm:style>
+  </dgm:styleLbl>
+  <dgm:styleLbl name="bgSibTrans2D1">
+    <dgm:scene3d>
+      <a:camera prst="orthographicFront"/>
+      <a:lightRig rig="threePt" dir="t"/>
+    </dgm:scene3d>
+    <dgm:sp3d/>
+    <dgm:txPr/>
+    <dgm:style>
+      <a:lnRef idx="0">
+        <a:scrgbClr r="0" g="0" b="0"/>
+      </a:lnRef>
+      <a:fillRef idx="1">
+        <a:scrgbClr r="0" g="0" b="0"/>
+      </a:fillRef>
+      <a:effectRef idx="0">
+        <a:scrgbClr r="0" g="0" b="0"/>
+      </a:effectRef>
+      <a:fontRef idx="minor">
+        <a:schemeClr val="lt1"/>
+      </a:fontRef>
+    </dgm:style>
+  </dgm:styleLbl>
+  <dgm:styleLbl name="sibTrans1D1">
+    <dgm:scene3d>
+      <a:camera prst="orthographicFront"/>
+      <a:lightRig rig="threePt" dir="t"/>
+    </dgm:scene3d>
+    <dgm:sp3d/>
+    <dgm:txPr/>
+    <dgm:style>
+      <a:lnRef idx="1">
+        <a:scrgbClr r="0" g="0" b="0"/>
+      </a:lnRef>
+      <a:fillRef idx="0">
+        <a:scrgbClr r="0" g="0" b="0"/>
+      </a:fillRef>
+      <a:effectRef idx="0">
+        <a:scrgbClr r="0" g="0" b="0"/>
+      </a:effectRef>
+      <a:fontRef idx="minor"/>
+    </dgm:style>
+  </dgm:styleLbl>
+  <dgm:styleLbl name="callout">
+    <dgm:scene3d>
+      <a:camera prst="orthographicFront"/>
+      <a:lightRig rig="threePt" dir="t"/>
+    </dgm:scene3d>
+    <dgm:sp3d/>
+    <dgm:txPr/>
+    <dgm:style>
+      <a:lnRef idx="2">
+        <a:scrgbClr r="0" g="0" b="0"/>
+      </a:lnRef>
+      <a:fillRef idx="1">
+        <a:scrgbClr r="0" g="0" b="0"/>
+      </a:fillRef>
+      <a:effectRef idx="0">
+        <a:scrgbClr r="0" g="0" b="0"/>
+      </a:effectRef>
+      <a:fontRef idx="minor"/>
+    </dgm:style>
+  </dgm:styleLbl>
+  <dgm:styleLbl name="asst0">
+    <dgm:scene3d>
+      <a:camera prst="orthographicFront"/>
+      <a:lightRig rig="threePt" dir="t"/>
+    </dgm:scene3d>
+    <dgm:sp3d/>
+    <dgm:txPr/>
+    <dgm:style>
+      <a:lnRef idx="2">
+        <a:scrgbClr r="0" g="0" b="0"/>
+      </a:lnRef>
+      <a:fillRef idx="1">
+        <a:scrgbClr r="0" g="0" b="0"/>
+      </a:fillRef>
+      <a:effectRef idx="0">
+        <a:scrgbClr r="0" g="0" b="0"/>
+      </a:effectRef>
+      <a:fontRef idx="minor">
+        <a:schemeClr val="lt1"/>
+      </a:fontRef>
+    </dgm:style>
+  </dgm:styleLbl>
+  <dgm:styleLbl name="asst1">
+    <dgm:scene3d>
+      <a:camera prst="orthographicFront"/>
+      <a:lightRig rig="threePt" dir="t"/>
+    </dgm:scene3d>
+    <dgm:sp3d/>
+    <dgm:txPr/>
+    <dgm:style>
+      <a:lnRef idx="2">
+        <a:scrgbClr r="0" g="0" b="0"/>
+      </a:lnRef>
+      <a:fillRef idx="1">
+        <a:scrgbClr r="0" g="0" b="0"/>
+      </a:fillRef>
+      <a:effectRef idx="0">
+        <a:scrgbClr r="0" g="0" b="0"/>
+      </a:effectRef>
+      <a:fontRef idx="minor">
+        <a:schemeClr val="lt1"/>
+      </a:fontRef>
+    </dgm:style>
+  </dgm:styleLbl>
+  <dgm:styleLbl name="asst2">
+    <dgm:scene3d>
+      <a:camera prst="orthographicFront"/>
+      <a:lightRig rig="threePt" dir="t"/>
+    </dgm:scene3d>
+    <dgm:sp3d/>
+    <dgm:txPr/>
+    <dgm:style>
+      <a:lnRef idx="2">
+        <a:scrgbClr r="0" g="0" b="0"/>
+      </a:lnRef>
+      <a:fillRef idx="1">
+        <a:scrgbClr r="0" g="0" b="0"/>
+      </a:fillRef>
+      <a:effectRef idx="0">
+        <a:scrgbClr r="0" g="0" b="0"/>
+      </a:effectRef>
+      <a:fontRef idx="minor">
+        <a:schemeClr val="lt1"/>
+      </a:fontRef>
+    </dgm:style>
+  </dgm:styleLbl>
+  <dgm:styleLbl name="asst3">
+    <dgm:scene3d>
+      <a:camera prst="orthographicFront"/>
+      <a:lightRig rig="threePt" dir="t"/>
+    </dgm:scene3d>
+    <dgm:sp3d/>
+    <dgm:txPr/>
+    <dgm:style>
+      <a:lnRef idx="2">
+        <a:scrgbClr r="0" g="0" b="0"/>
+      </a:lnRef>
+      <a:fillRef idx="1">
+        <a:scrgbClr r="0" g="0" b="0"/>
+      </a:fillRef>
+      <a:effectRef idx="0">
+        <a:scrgbClr r="0" g="0" b="0"/>
+      </a:effectRef>
+      <a:fontRef idx="minor">
+        <a:schemeClr val="lt1"/>
+      </a:fontRef>
+    </dgm:style>
+  </dgm:styleLbl>
+  <dgm:styleLbl name="asst4">
+    <dgm:scene3d>
+      <a:camera prst="orthographicFront"/>
+      <a:lightRig rig="threePt" dir="t"/>
+    </dgm:scene3d>
+    <dgm:sp3d/>
+    <dgm:txPr/>
+    <dgm:style>
+      <a:lnRef idx="2">
+        <a:scrgbClr r="0" g="0" b="0"/>
+      </a:lnRef>
+      <a:fillRef idx="1">
+        <a:scrgbClr r="0" g="0" b="0"/>
+      </a:fillRef>
+      <a:effectRef idx="0">
+        <a:scrgbClr r="0" g="0" b="0"/>
+      </a:effectRef>
+      <a:fontRef idx="minor">
+        <a:schemeClr val="lt1"/>
+      </a:fontRef>
+    </dgm:style>
+  </dgm:styleLbl>
+  <dgm:styleLbl name="parChTrans2D1">
+    <dgm:scene3d>
+      <a:camera prst="orthographicFront"/>
+      <a:lightRig rig="threePt" dir="t"/>
+    </dgm:scene3d>
+    <dgm:sp3d/>
+    <dgm:txPr/>
+    <dgm:style>
+      <a:lnRef idx="2">
+        <a:scrgbClr r="0" g="0" b="0"/>
+      </a:lnRef>
+      <a:fillRef idx="1">
+        <a:scrgbClr r="0" g="0" b="0"/>
+      </a:fillRef>
+      <a:effectRef idx="0">
+        <a:scrgbClr r="0" g="0" b="0"/>
+      </a:effectRef>
+      <a:fontRef idx="minor">
+        <a:schemeClr val="lt1"/>
+      </a:fontRef>
+    </dgm:style>
+  </dgm:styleLbl>
+  <dgm:styleLbl name="parChTrans2D2">
+    <dgm:scene3d>
+      <a:camera prst="orthographicFront"/>
+      <a:lightRig rig="threePt" dir="t"/>
+    </dgm:scene3d>
+    <dgm:sp3d/>
+    <dgm:txPr/>
+    <dgm:style>
+      <a:lnRef idx="2">
+        <a:scrgbClr r="0" g="0" b="0"/>
+      </a:lnRef>
+      <a:fillRef idx="1">
+        <a:scrgbClr r="0" g="0" b="0"/>
+      </a:fillRef>
+      <a:effectRef idx="0">
+        <a:scrgbClr r="0" g="0" b="0"/>
+      </a:effectRef>
+      <a:fontRef idx="minor">
+        <a:schemeClr val="lt1"/>
+      </a:fontRef>
+    </dgm:style>
+  </dgm:styleLbl>
+  <dgm:styleLbl name="parChTrans2D3">
+    <dgm:scene3d>
+      <a:camera prst="orthographicFront"/>
+      <a:lightRig rig="threePt" dir="t"/>
+    </dgm:scene3d>
+    <dgm:sp3d/>
+    <dgm:txPr/>
+    <dgm:style>
+      <a:lnRef idx="2">
+        <a:scrgbClr r="0" g="0" b="0"/>
+      </a:lnRef>
+      <a:fillRef idx="1">
+        <a:scrgbClr r="0" g="0" b="0"/>
+      </a:fillRef>
+      <a:effectRef idx="0">
+        <a:scrgbClr r="0" g="0" b="0"/>
+      </a:effectRef>
+      <a:fontRef idx="minor">
+        <a:schemeClr val="lt1"/>
+      </a:fontRef>
+    </dgm:style>
+  </dgm:styleLbl>
+  <dgm:styleLbl name="parChTrans2D4">
+    <dgm:scene3d>
+      <a:camera prst="orthographicFront"/>
+      <a:lightRig rig="threePt" dir="t"/>
+    </dgm:scene3d>
+    <dgm:sp3d/>
+    <dgm:txPr/>
+    <dgm:style>
+      <a:lnRef idx="2">
+        <a:scrgbClr r="0" g="0" b="0"/>
+      </a:lnRef>
+      <a:fillRef idx="1">
+        <a:scrgbClr r="0" g="0" b="0"/>
+      </a:fillRef>
+      <a:effectRef idx="0">
+        <a:scrgbClr r="0" g="0" b="0"/>
+      </a:effectRef>
+      <a:fontRef idx="minor">
+        <a:schemeClr val="lt1"/>
+      </a:fontRef>
+    </dgm:style>
+  </dgm:styleLbl>
+  <dgm:styleLbl name="parChTrans1D1">
+    <dgm:scene3d>
+      <a:camera prst="orthographicFront"/>
+      <a:lightRig rig="threePt" dir="t"/>
+    </dgm:scene3d>
+    <dgm:sp3d/>
+    <dgm:txPr/>
+    <dgm:style>
+      <a:lnRef idx="2">
+        <a:scrgbClr r="0" g="0" b="0"/>
+      </a:lnRef>
+      <a:fillRef idx="0">
+        <a:scrgbClr r="0" g="0" b="0"/>
+      </a:fillRef>
+      <a:effectRef idx="0">
+        <a:scrgbClr r="0" g="0" b="0"/>
+      </a:effectRef>
+      <a:fontRef idx="minor"/>
+    </dgm:style>
+  </dgm:styleLbl>
+  <dgm:styleLbl name="parChTrans1D2">
+    <dgm:scene3d>
+      <a:camera prst="orthographicFront"/>
+      <a:lightRig rig="threePt" dir="t"/>
+    </dgm:scene3d>
+    <dgm:sp3d/>
+    <dgm:txPr/>
+    <dgm:style>
+      <a:lnRef idx="2">
+        <a:scrgbClr r="0" g="0" b="0"/>
+      </a:lnRef>
+      <a:fillRef idx="0">
+        <a:scrgbClr r="0" g="0" b="0"/>
+      </a:fillRef>
+      <a:effectRef idx="0">
+        <a:scrgbClr r="0" g="0" b="0"/>
+      </a:effectRef>
+      <a:fontRef idx="minor"/>
+    </dgm:style>
+  </dgm:styleLbl>
+  <dgm:styleLbl name="parChTrans1D3">
+    <dgm:scene3d>
+      <a:camera prst="orthographicFront"/>
+      <a:lightRig rig="threePt" dir="t"/>
+    </dgm:scene3d>
+    <dgm:sp3d/>
+    <dgm:txPr/>
+    <dgm:style>
+      <a:lnRef idx="2">
+        <a:scrgbClr r="0" g="0" b="0"/>
+      </a:lnRef>
+      <a:fillRef idx="0">
+        <a:scrgbClr r="0" g="0" b="0"/>
+      </a:fillRef>
+      <a:effectRef idx="0">
+        <a:scrgbClr r="0" g="0" b="0"/>
+      </a:effectRef>
+      <a:fontRef idx="minor"/>
+    </dgm:style>
+  </dgm:styleLbl>
+  <dgm:styleLbl name="parChTrans1D4">
+    <dgm:scene3d>
+      <a:camera prst="orthographicFront"/>
+      <a:lightRig rig="threePt" dir="t"/>
+    </dgm:scene3d>
+    <dgm:sp3d/>
+    <dgm:txPr/>
+    <dgm:style>
+      <a:lnRef idx="2">
+        <a:scrgbClr r="0" g="0" b="0"/>
+      </a:lnRef>
+      <a:fillRef idx="0">
+        <a:scrgbClr r="0" g="0" b="0"/>
+      </a:fillRef>
+      <a:effectRef idx="0">
+        <a:scrgbClr r="0" g="0" b="0"/>
+      </a:effectRef>
+      <a:fontRef idx="minor"/>
+    </dgm:style>
+  </dgm:styleLbl>
+  <dgm:styleLbl name="fgAcc1">
+    <dgm:scene3d>
+      <a:camera prst="orthographicFront"/>
+      <a:lightRig rig="threePt" dir="t"/>
+    </dgm:scene3d>
+    <dgm:sp3d/>
+    <dgm:txPr/>
+    <dgm:style>
+      <a:lnRef idx="2">
+        <a:scrgbClr r="0" g="0" b="0"/>
+      </a:lnRef>
+      <a:fillRef idx="1">
+        <a:scrgbClr r="0" g="0" b="0"/>
+      </a:fillRef>
+      <a:effectRef idx="0">
+        <a:scrgbClr r="0" g="0" b="0"/>
+      </a:effectRef>
+      <a:fontRef idx="minor"/>
+    </dgm:style>
+  </dgm:styleLbl>
+  <dgm:styleLbl name="conFgAcc1">
+    <dgm:scene3d>
+      <a:camera prst="orthographicFront"/>
+      <a:lightRig rig="threePt" dir="t"/>
+    </dgm:scene3d>
+    <dgm:sp3d/>
+    <dgm:txPr/>
+    <dgm:style>
+      <a:lnRef idx="2">
+        <a:scrgbClr r="0" g="0" b="0"/>
+      </a:lnRef>
+      <a:fillRef idx="1">
+        <a:scrgbClr r="0" g="0" b="0"/>
+      </a:fillRef>
+      <a:effectRef idx="0">
+        <a:scrgbClr r="0" g="0" b="0"/>
+      </a:effectRef>
+      <a:fontRef idx="minor"/>
+    </dgm:style>
+  </dgm:styleLbl>
+  <dgm:styleLbl name="alignAcc1">
+    <dgm:scene3d>
+      <a:camera prst="orthographicFront"/>
+      <a:lightRig rig="threePt" dir="t"/>
+    </dgm:scene3d>
+    <dgm:sp3d/>
+    <dgm:txPr/>
+    <dgm:style>
+      <a:lnRef idx="2">
+        <a:scrgbClr r="0" g="0" b="0"/>
+      </a:lnRef>
+      <a:fillRef idx="1">
+        <a:scrgbClr r="0" g="0" b="0"/>
+      </a:fillRef>
+      <a:effectRef idx="0">
+        <a:scrgbClr r="0" g="0" b="0"/>
+      </a:effectRef>
+      <a:fontRef idx="minor"/>
+    </dgm:style>
+  </dgm:styleLbl>
+  <dgm:styleLbl name="trAlignAcc1">
+    <dgm:scene3d>
+      <a:camera prst="orthographicFront"/>
+      <a:lightRig rig="threePt" dir="t"/>
+    </dgm:scene3d>
+    <dgm:sp3d/>
+    <dgm:txPr/>
+    <dgm:style>
+      <a:lnRef idx="1">
+        <a:scrgbClr r="0" g="0" b="0"/>
+      </a:lnRef>
+      <a:fillRef idx="1">
+        <a:scrgbClr r="0" g="0" b="0"/>
+      </a:fillRef>
+      <a:effectRef idx="0">
+        <a:scrgbClr r="0" g="0" b="0"/>
+      </a:effectRef>
+      <a:fontRef idx="minor"/>
+    </dgm:style>
+  </dgm:styleLbl>
+  <dgm:styleLbl name="bgAcc1">
+    <dgm:scene3d>
+      <a:camera prst="orthographicFront"/>
+      <a:lightRig rig="threePt" dir="t"/>
+    </dgm:scene3d>
+    <dgm:sp3d/>
+    <dgm:txPr/>
+    <dgm:style>
+      <a:lnRef idx="2">
+        <a:scrgbClr r="0" g="0" b="0"/>
+      </a:lnRef>
+      <a:fillRef idx="1">
+        <a:scrgbClr r="0" g="0" b="0"/>
+      </a:fillRef>
+      <a:effectRef idx="0">
+        <a:scrgbClr r="0" g="0" b="0"/>
+      </a:effectRef>
+      <a:fontRef idx="minor"/>
+    </dgm:style>
+  </dgm:styleLbl>
+  <dgm:styleLbl name="solidFgAcc1">
+    <dgm:scene3d>
+      <a:camera prst="orthographicFront"/>
+      <a:lightRig rig="threePt" dir="t"/>
+    </dgm:scene3d>
+    <dgm:sp3d/>
+    <dgm:txPr/>
+    <dgm:style>
+      <a:lnRef idx="2">
+        <a:scrgbClr r="0" g="0" b="0"/>
+      </a:lnRef>
+      <a:fillRef idx="1">
+        <a:scrgbClr r="0" g="0" b="0"/>
+      </a:fillRef>
+      <a:effectRef idx="0">
+        <a:scrgbClr r="0" g="0" b="0"/>
+      </a:effectRef>
+      <a:fontRef idx="minor"/>
+    </dgm:style>
+  </dgm:styleLbl>
+  <dgm:styleLbl name="solidAlignAcc1">
+    <dgm:scene3d>
+      <a:camera prst="orthographicFront"/>
+      <a:lightRig rig="threePt" dir="t"/>
+    </dgm:scene3d>
+    <dgm:sp3d/>
+    <dgm:txPr/>
+    <dgm:style>
+      <a:lnRef idx="2">
+        <a:scrgbClr r="0" g="0" b="0"/>
+      </a:lnRef>
+      <a:fillRef idx="1">
+        <a:scrgbClr r="0" g="0" b="0"/>
+      </a:fillRef>
+      <a:effectRef idx="0">
+        <a:scrgbClr r="0" g="0" b="0"/>
+      </a:effectRef>
+      <a:fontRef idx="minor"/>
+    </dgm:style>
+  </dgm:styleLbl>
+  <dgm:styleLbl name="solidBgAcc1">
+    <dgm:scene3d>
+      <a:camera prst="orthographicFront"/>
+      <a:lightRig rig="threePt" dir="t"/>
+    </dgm:scene3d>
+    <dgm:sp3d/>
+    <dgm:txPr/>
+    <dgm:style>
+      <a:lnRef idx="2">
+        <a:scrgbClr r="0" g="0" b="0"/>
+      </a:lnRef>
+      <a:fillRef idx="1">
+        <a:scrgbClr r="0" g="0" b="0"/>
+      </a:fillRef>
+      <a:effectRef idx="0">
+        <a:scrgbClr r="0" g="0" b="0"/>
+      </a:effectRef>
+      <a:fontRef idx="minor"/>
+    </dgm:style>
+  </dgm:styleLbl>
+  <dgm:styleLbl name="fgAccFollowNode1">
+    <dgm:scene3d>
+      <a:camera prst="orthographicFront"/>
+      <a:lightRig rig="threePt" dir="t"/>
+    </dgm:scene3d>
+    <dgm:sp3d/>
+    <dgm:txPr/>
+    <dgm:style>
+      <a:lnRef idx="2">
+        <a:scrgbClr r="0" g="0" b="0"/>
+      </a:lnRef>
+      <a:fillRef idx="1">
+        <a:scrgbClr r="0" g="0" b="0"/>
+      </a:fillRef>
+      <a:effectRef idx="0">
+        <a:scrgbClr r="0" g="0" b="0"/>
+      </a:effectRef>
+      <a:fontRef idx="minor"/>
+    </dgm:style>
+  </dgm:styleLbl>
+  <dgm:styleLbl name="alignAccFollowNode1">
+    <dgm:scene3d>
+      <a:camera prst="orthographicFront"/>
+      <a:lightRig rig="threePt" dir="t"/>
+    </dgm:scene3d>
+    <dgm:sp3d/>
+    <dgm:txPr/>
+    <dgm:style>
+      <a:lnRef idx="2">
+        <a:scrgbClr r="0" g="0" b="0"/>
+      </a:lnRef>
+      <a:fillRef idx="1">
+        <a:scrgbClr r="0" g="0" b="0"/>
+      </a:fillRef>
+      <a:effectRef idx="0">
+        <a:scrgbClr r="0" g="0" b="0"/>
+      </a:effectRef>
+      <a:fontRef idx="minor"/>
+    </dgm:style>
+  </dgm:styleLbl>
+  <dgm:styleLbl name="bgAccFollowNode1">
+    <dgm:scene3d>
+      <a:camera prst="orthographicFront"/>
+      <a:lightRig rig="threePt" dir="t"/>
+    </dgm:scene3d>
+    <dgm:sp3d/>
+    <dgm:txPr/>
+    <dgm:style>
+      <a:lnRef idx="2">
+        <a:scrgbClr r="0" g="0" b="0"/>
+      </a:lnRef>
+      <a:fillRef idx="1">
+        <a:scrgbClr r="0" g="0" b="0"/>
+      </a:fillRef>
+      <a:effectRef idx="0">
+        <a:scrgbClr r="0" g="0" b="0"/>
+      </a:effectRef>
+      <a:fontRef idx="minor"/>
+    </dgm:style>
+  </dgm:styleLbl>
+  <dgm:styleLbl name="fgAcc0">
+    <dgm:scene3d>
+      <a:camera prst="orthographicFront"/>
+      <a:lightRig rig="threePt" dir="t"/>
+    </dgm:scene3d>
+    <dgm:sp3d/>
+    <dgm:txPr/>
+    <dgm:style>
+      <a:lnRef idx="2">
+        <a:scrgbClr r="0" g="0" b="0"/>
+      </a:lnRef>
+      <a:fillRef idx="1">
+        <a:scrgbClr r="0" g="0" b="0"/>
+      </a:fillRef>
+      <a:effectRef idx="0">
+        <a:scrgbClr r="0" g="0" b="0"/>
+      </a:effectRef>
+      <a:fontRef idx="minor"/>
+    </dgm:style>
+  </dgm:styleLbl>
+  <dgm:styleLbl name="fgAcc2">
+    <dgm:scene3d>
+      <a:camera prst="orthographicFront"/>
+      <a:lightRig rig="threePt" dir="t"/>
+    </dgm:scene3d>
+    <dgm:sp3d/>
+    <dgm:txPr/>
+    <dgm:style>
+      <a:lnRef idx="2">
+        <a:scrgbClr r="0" g="0" b="0"/>
+      </a:lnRef>
+      <a:fillRef idx="1">
+        <a:scrgbClr r="0" g="0" b="0"/>
+      </a:fillRef>
+      <a:effectRef idx="0">
+        <a:scrgbClr r="0" g="0" b="0"/>
+      </a:effectRef>
+      <a:fontRef idx="minor"/>
+    </dgm:style>
+  </dgm:styleLbl>
+  <dgm:styleLbl name="fgAcc3">
+    <dgm:scene3d>
+      <a:camera prst="orthographicFront"/>
+      <a:lightRig rig="threePt" dir="t"/>
+    </dgm:scene3d>
+    <dgm:sp3d/>
+    <dgm:txPr/>
+    <dgm:style>
+      <a:lnRef idx="2">
+        <a:scrgbClr r="0" g="0" b="0"/>
+      </a:lnRef>
+      <a:fillRef idx="1">
+        <a:scrgbClr r="0" g="0" b="0"/>
+      </a:fillRef>
+      <a:effectRef idx="0">
+        <a:scrgbClr r="0" g="0" b="0"/>
+      </a:effectRef>
+      <a:fontRef idx="minor"/>
+    </dgm:style>
+  </dgm:styleLbl>
+  <dgm:styleLbl name="fgAcc4">
+    <dgm:scene3d>
+      <a:camera prst="orthographicFront"/>
+      <a:lightRig rig="threePt" dir="t"/>
+    </dgm:scene3d>
+    <dgm:sp3d/>
+    <dgm:txPr/>
+    <dgm:style>
+      <a:lnRef idx="2">
+        <a:scrgbClr r="0" g="0" b="0"/>
+      </a:lnRef>
+      <a:fillRef idx="1">
+        <a:scrgbClr r="0" g="0" b="0"/>
+      </a:fillRef>
+      <a:effectRef idx="0">
+        <a:scrgbClr r="0" g="0" b="0"/>
+      </a:effectRef>
+      <a:fontRef idx="minor"/>
+    </dgm:style>
+  </dgm:styleLbl>
+  <dgm:styleLbl name="bgShp">
+    <dgm:scene3d>
+      <a:camera prst="orthographicFront"/>
+      <a:lightRig rig="threePt" dir="t"/>
+    </dgm:scene3d>
+    <dgm:sp3d/>
+    <dgm:txPr/>
+    <dgm:style>
+      <a:lnRef idx="0">
+        <a:scrgbClr r="0" g="0" b="0"/>
+      </a:lnRef>
+      <a:fillRef idx="1">
+        <a:scrgbClr r="0" g="0" b="0"/>
+      </a:fillRef>
+      <a:effectRef idx="0">
+        <a:scrgbClr r="0" g="0" b="0"/>
+      </a:effectRef>
+      <a:fontRef idx="minor"/>
+    </dgm:style>
+  </dgm:styleLbl>
+  <dgm:styleLbl name="dkBgShp">
+    <dgm:scene3d>
+      <a:camera prst="orthographicFront"/>
+      <a:lightRig rig="threePt" dir="t"/>
+    </dgm:scene3d>
+    <dgm:sp3d/>
+    <dgm:txPr/>
+    <dgm:style>
+      <a:lnRef idx="0">
+        <a:scrgbClr r="0" g="0" b="0"/>
+      </a:lnRef>
+      <a:fillRef idx="1">
+        <a:scrgbClr r="0" g="0" b="0"/>
+      </a:fillRef>
+      <a:effectRef idx="0">
+        <a:scrgbClr r="0" g="0" b="0"/>
+      </a:effectRef>
+      <a:fontRef idx="minor"/>
+    </dgm:style>
+  </dgm:styleLbl>
+  <dgm:styleLbl name="trBgShp">
+    <dgm:scene3d>
+      <a:camera prst="orthographicFront"/>
+      <a:lightRig rig="threePt" dir="t"/>
+    </dgm:scene3d>
+    <dgm:sp3d/>
+    <dgm:txPr/>
+    <dgm:style>
+      <a:lnRef idx="0">
+        <a:scrgbClr r="0" g="0" b="0"/>
+      </a:lnRef>
+      <a:fillRef idx="1">
+        <a:scrgbClr r="0" g="0" b="0"/>
+      </a:fillRef>
+      <a:effectRef idx="0">
+        <a:scrgbClr r="0" g="0" b="0"/>
+      </a:effectRef>
+      <a:fontRef idx="minor"/>
+    </dgm:style>
+  </dgm:styleLbl>
+  <dgm:styleLbl name="fgShp">
+    <dgm:scene3d>
+      <a:camera prst="orthographicFront"/>
+      <a:lightRig rig="threePt" dir="t"/>
+    </dgm:scene3d>
+    <dgm:sp3d/>
+    <dgm:txPr/>
+    <dgm:style>
+      <a:lnRef idx="2">
+        <a:scrgbClr r="0" g="0" b="0"/>
+      </a:lnRef>
+      <a:fillRef idx="1">
+        <a:scrgbClr r="0" g="0" b="0"/>
+      </a:fillRef>
+      <a:effectRef idx="0">
+        <a:scrgbClr r="0" g="0" b="0"/>
+      </a:effectRef>
+      <a:fontRef idx="minor"/>
+    </dgm:style>
+  </dgm:styleLbl>
+  <dgm:styleLbl name="revTx">
+    <dgm:scene3d>
+      <a:camera prst="orthographicFront"/>
+      <a:lightRig rig="threePt" dir="t"/>
+    </dgm:scene3d>
+    <dgm:sp3d/>
+    <dgm:txPr/>
+    <dgm:style>
+      <a:lnRef idx="0">
+        <a:scrgbClr r="0" g="0" b="0"/>
+      </a:lnRef>
+      <a:fillRef idx="0">
+        <a:scrgbClr r="0" g="0" b="0"/>
+      </a:fillRef>
+      <a:effectRef idx="0">
+        <a:scrgbClr r="0" g="0" b="0"/>
+      </a:effectRef>
+      <a:fontRef idx="minor"/>
+    </dgm:style>
+  </dgm:styleLbl>
+</dgm:styleDef>
 </file>
 
 <file path=ppt/notesMasters/notesMaster1.xml><?xml version="1.0" encoding="utf-8"?>
@@ -4861,6 +8317,118 @@
     <p:extLst>
       <p:ext uri="{BB962C8B-B14F-4D97-AF65-F5344CB8AC3E}">
         <p14:creationId xmlns:p14="http://schemas.microsoft.com/office/powerpoint/2010/main" val="2123874642"/>
+      </p:ext>
+    </p:extLst>
+  </p:cSld>
+  <p:clrMapOvr>
+    <a:masterClrMapping/>
+  </p:clrMapOvr>
+</p:notes>
+</file>
+
+<file path=ppt/notesSlides/notesSlide9.xml><?xml version="1.0" encoding="utf-8"?>
+<p:notes xmlns:a="http://schemas.openxmlformats.org/drawingml/2006/main" xmlns:r="http://schemas.openxmlformats.org/officeDocument/2006/relationships" xmlns:p="http://schemas.openxmlformats.org/presentationml/2006/main">
+  <p:cSld>
+    <p:spTree>
+      <p:nvGrpSpPr>
+        <p:cNvPr id="1" name=""/>
+        <p:cNvGrpSpPr/>
+        <p:nvPr/>
+      </p:nvGrpSpPr>
+      <p:grpSpPr>
+        <a:xfrm>
+          <a:off x="0" y="0"/>
+          <a:ext cx="0" cy="0"/>
+          <a:chOff x="0" y="0"/>
+          <a:chExt cx="0" cy="0"/>
+        </a:xfrm>
+      </p:grpSpPr>
+      <p:sp>
+        <p:nvSpPr>
+          <p:cNvPr id="2" name="Slide Image Placeholder 1"/>
+          <p:cNvSpPr>
+            <a:spLocks noGrp="1" noRot="1" noChangeAspect="1"/>
+          </p:cNvSpPr>
+          <p:nvPr>
+            <p:ph type="sldImg"/>
+          </p:nvPr>
+        </p:nvSpPr>
+        <p:spPr/>
+      </p:sp>
+      <p:sp>
+        <p:nvSpPr>
+          <p:cNvPr id="3" name="Notes Placeholder 2"/>
+          <p:cNvSpPr>
+            <a:spLocks noGrp="1"/>
+          </p:cNvSpPr>
+          <p:nvPr>
+            <p:ph type="body" idx="1"/>
+          </p:nvPr>
+        </p:nvSpPr>
+        <p:spPr/>
+        <p:txBody>
+          <a:bodyPr/>
+          <a:lstStyle/>
+          <a:p>
+            <a:endParaRPr lang="en-US" dirty="0"/>
+          </a:p>
+        </p:txBody>
+      </p:sp>
+      <p:sp>
+        <p:nvSpPr>
+          <p:cNvPr id="4" name="Slide Number Placeholder 3"/>
+          <p:cNvSpPr>
+            <a:spLocks noGrp="1"/>
+          </p:cNvSpPr>
+          <p:nvPr>
+            <p:ph type="sldNum" idx="12"/>
+          </p:nvPr>
+        </p:nvSpPr>
+        <p:spPr/>
+        <p:txBody>
+          <a:bodyPr/>
+          <a:lstStyle/>
+          <a:p>
+            <a:pPr marL="0" marR="0" lvl="0" indent="0" algn="r" rtl="0">
+              <a:lnSpc>
+                <a:spcPct val="100000"/>
+              </a:lnSpc>
+              <a:spcBef>
+                <a:spcPts val="0"/>
+              </a:spcBef>
+              <a:spcAft>
+                <a:spcPts val="0"/>
+              </a:spcAft>
+              <a:buNone/>
+            </a:pPr>
+            <a:fld id="{00000000-1234-1234-1234-123412341234}" type="slidenum">
+              <a:rPr lang="en-US" sz="1200" b="0" i="0" u="none" strike="noStrike" cap="none" smtClean="0">
+                <a:solidFill>
+                  <a:schemeClr val="dk1"/>
+                </a:solidFill>
+                <a:latin typeface="Arial"/>
+                <a:ea typeface="Arial"/>
+                <a:cs typeface="Arial"/>
+                <a:sym typeface="Arial"/>
+              </a:rPr>
+              <a:t>21</a:t>
+            </a:fld>
+            <a:endParaRPr lang="en-US" sz="1200" b="0" i="0" u="none" strike="noStrike" cap="none">
+              <a:solidFill>
+                <a:schemeClr val="dk1"/>
+              </a:solidFill>
+              <a:latin typeface="Arial"/>
+              <a:ea typeface="Arial"/>
+              <a:cs typeface="Arial"/>
+              <a:sym typeface="Arial"/>
+            </a:endParaRPr>
+          </a:p>
+        </p:txBody>
+      </p:sp>
+    </p:spTree>
+    <p:extLst>
+      <p:ext uri="{BB962C8B-B14F-4D97-AF65-F5344CB8AC3E}">
+        <p14:creationId xmlns:p14="http://schemas.microsoft.com/office/powerpoint/2010/main" val="286552408"/>
       </p:ext>
     </p:extLst>
   </p:cSld>
@@ -8970,6 +12538,630 @@
   <p:cSld>
     <p:spTree>
       <p:nvGrpSpPr>
+        <p:cNvPr id="1" name=""/>
+        <p:cNvGrpSpPr/>
+        <p:nvPr/>
+      </p:nvGrpSpPr>
+      <p:grpSpPr>
+        <a:xfrm>
+          <a:off x="0" y="0"/>
+          <a:ext cx="0" cy="0"/>
+          <a:chOff x="0" y="0"/>
+          <a:chExt cx="0" cy="0"/>
+        </a:xfrm>
+      </p:grpSpPr>
+      <p:sp>
+        <p:nvSpPr>
+          <p:cNvPr id="2" name="Title 1">
+            <a:extLst>
+              <a:ext uri="{FF2B5EF4-FFF2-40B4-BE49-F238E27FC236}">
+                <a16:creationId xmlns:a16="http://schemas.microsoft.com/office/drawing/2014/main" id="{47430553-C47E-6ED2-2C25-E32D336A9A56}"/>
+              </a:ext>
+            </a:extLst>
+          </p:cNvPr>
+          <p:cNvSpPr>
+            <a:spLocks noGrp="1"/>
+          </p:cNvSpPr>
+          <p:nvPr>
+            <p:ph type="title"/>
+          </p:nvPr>
+        </p:nvSpPr>
+        <p:spPr/>
+        <p:txBody>
+          <a:bodyPr/>
+          <a:lstStyle/>
+          <a:p>
+            <a:r>
+              <a:rPr lang="en-US" dirty="0"/>
+              <a:t>Worksheet values have a taxonomy corresponding to normalized database</a:t>
+            </a:r>
+          </a:p>
+        </p:txBody>
+      </p:sp>
+      <p:pic>
+        <p:nvPicPr>
+          <p:cNvPr id="8" name="Picture 7">
+            <a:extLst>
+              <a:ext uri="{FF2B5EF4-FFF2-40B4-BE49-F238E27FC236}">
+                <a16:creationId xmlns:a16="http://schemas.microsoft.com/office/drawing/2014/main" id="{DF234898-5E52-A789-B539-1850E8AAEDB0}"/>
+              </a:ext>
+            </a:extLst>
+          </p:cNvPr>
+          <p:cNvPicPr>
+            <a:picLocks noChangeAspect="1"/>
+          </p:cNvPicPr>
+          <p:nvPr/>
+        </p:nvPicPr>
+        <p:blipFill>
+          <a:blip r:embed="rId2"/>
+          <a:stretch>
+            <a:fillRect/>
+          </a:stretch>
+        </p:blipFill>
+        <p:spPr>
+          <a:xfrm>
+            <a:off x="3806289" y="1238459"/>
+            <a:ext cx="5182323" cy="1095528"/>
+          </a:xfrm>
+          <a:prstGeom prst="rect">
+            <a:avLst/>
+          </a:prstGeom>
+        </p:spPr>
+      </p:pic>
+      <p:pic>
+        <p:nvPicPr>
+          <p:cNvPr id="15" name="Picture 14">
+            <a:extLst>
+              <a:ext uri="{FF2B5EF4-FFF2-40B4-BE49-F238E27FC236}">
+                <a16:creationId xmlns:a16="http://schemas.microsoft.com/office/drawing/2014/main" id="{8A1641A2-AEEB-6BB2-9D15-935019B20AA1}"/>
+              </a:ext>
+            </a:extLst>
+          </p:cNvPr>
+          <p:cNvPicPr>
+            <a:picLocks noChangeAspect="1"/>
+          </p:cNvPicPr>
+          <p:nvPr/>
+        </p:nvPicPr>
+        <p:blipFill>
+          <a:blip r:embed="rId3"/>
+          <a:srcRect b="23357"/>
+          <a:stretch>
+            <a:fillRect/>
+          </a:stretch>
+        </p:blipFill>
+        <p:spPr>
+          <a:xfrm>
+            <a:off x="188645" y="2124065"/>
+            <a:ext cx="11814709" cy="2679047"/>
+          </a:xfrm>
+          <a:prstGeom prst="rect">
+            <a:avLst/>
+          </a:prstGeom>
+          <a:ln w="38100" cap="sq">
+            <a:solidFill>
+              <a:srgbClr val="000000"/>
+            </a:solidFill>
+            <a:prstDash val="solid"/>
+            <a:miter lim="800000"/>
+          </a:ln>
+          <a:effectLst>
+            <a:outerShdw blurRad="50800" dist="38100" dir="2700000" algn="tl" rotWithShape="0">
+              <a:srgbClr val="000000">
+                <a:alpha val="43000"/>
+              </a:srgbClr>
+            </a:outerShdw>
+          </a:effectLst>
+        </p:spPr>
+      </p:pic>
+      <p:sp>
+        <p:nvSpPr>
+          <p:cNvPr id="16" name="Rectangle 15">
+            <a:extLst>
+              <a:ext uri="{FF2B5EF4-FFF2-40B4-BE49-F238E27FC236}">
+                <a16:creationId xmlns:a16="http://schemas.microsoft.com/office/drawing/2014/main" id="{0795D249-8FA3-2907-F23F-515BFE69F51E}"/>
+              </a:ext>
+            </a:extLst>
+          </p:cNvPr>
+          <p:cNvSpPr/>
+          <p:nvPr/>
+        </p:nvSpPr>
+        <p:spPr>
+          <a:xfrm>
+            <a:off x="4963885" y="1607735"/>
+            <a:ext cx="562707" cy="200967"/>
+          </a:xfrm>
+          <a:prstGeom prst="rect">
+            <a:avLst/>
+          </a:prstGeom>
+          <a:noFill/>
+          <a:ln>
+            <a:solidFill>
+              <a:srgbClr val="FF0000"/>
+            </a:solidFill>
+          </a:ln>
+        </p:spPr>
+        <p:style>
+          <a:lnRef idx="2">
+            <a:schemeClr val="accent1">
+              <a:shade val="15000"/>
+            </a:schemeClr>
+          </a:lnRef>
+          <a:fillRef idx="1">
+            <a:schemeClr val="accent1"/>
+          </a:fillRef>
+          <a:effectRef idx="0">
+            <a:schemeClr val="accent1"/>
+          </a:effectRef>
+          <a:fontRef idx="minor">
+            <a:schemeClr val="lt1"/>
+          </a:fontRef>
+        </p:style>
+        <p:txBody>
+          <a:bodyPr rtlCol="0" anchor="ctr"/>
+          <a:lstStyle/>
+          <a:p>
+            <a:pPr algn="ctr"/>
+            <a:endParaRPr lang="en-US"/>
+          </a:p>
+        </p:txBody>
+      </p:sp>
+      <p:sp>
+        <p:nvSpPr>
+          <p:cNvPr id="17" name="Rectangle 16">
+            <a:extLst>
+              <a:ext uri="{FF2B5EF4-FFF2-40B4-BE49-F238E27FC236}">
+                <a16:creationId xmlns:a16="http://schemas.microsoft.com/office/drawing/2014/main" id="{8390B743-AE49-E95E-FE1B-4CD7D1A03362}"/>
+              </a:ext>
+            </a:extLst>
+          </p:cNvPr>
+          <p:cNvSpPr/>
+          <p:nvPr/>
+        </p:nvSpPr>
+        <p:spPr>
+          <a:xfrm>
+            <a:off x="5466300" y="1607734"/>
+            <a:ext cx="321551" cy="200967"/>
+          </a:xfrm>
+          <a:prstGeom prst="rect">
+            <a:avLst/>
+          </a:prstGeom>
+          <a:noFill/>
+          <a:ln>
+            <a:solidFill>
+              <a:srgbClr val="FF0000"/>
+            </a:solidFill>
+          </a:ln>
+        </p:spPr>
+        <p:style>
+          <a:lnRef idx="2">
+            <a:schemeClr val="accent1">
+              <a:shade val="15000"/>
+            </a:schemeClr>
+          </a:lnRef>
+          <a:fillRef idx="1">
+            <a:schemeClr val="accent1"/>
+          </a:fillRef>
+          <a:effectRef idx="0">
+            <a:schemeClr val="accent1"/>
+          </a:effectRef>
+          <a:fontRef idx="minor">
+            <a:schemeClr val="lt1"/>
+          </a:fontRef>
+        </p:style>
+        <p:txBody>
+          <a:bodyPr rtlCol="0" anchor="ctr"/>
+          <a:lstStyle/>
+          <a:p>
+            <a:pPr algn="ctr"/>
+            <a:endParaRPr lang="en-US"/>
+          </a:p>
+        </p:txBody>
+      </p:sp>
+      <p:sp>
+        <p:nvSpPr>
+          <p:cNvPr id="18" name="Rectangle 17">
+            <a:extLst>
+              <a:ext uri="{FF2B5EF4-FFF2-40B4-BE49-F238E27FC236}">
+                <a16:creationId xmlns:a16="http://schemas.microsoft.com/office/drawing/2014/main" id="{FF45FADE-7E9B-4513-B793-9D8A03584061}"/>
+              </a:ext>
+            </a:extLst>
+          </p:cNvPr>
+          <p:cNvSpPr/>
+          <p:nvPr/>
+        </p:nvSpPr>
+        <p:spPr>
+          <a:xfrm>
+            <a:off x="5787852" y="1607734"/>
+            <a:ext cx="468924" cy="200967"/>
+          </a:xfrm>
+          <a:prstGeom prst="rect">
+            <a:avLst/>
+          </a:prstGeom>
+          <a:noFill/>
+          <a:ln>
+            <a:solidFill>
+              <a:srgbClr val="FF0000"/>
+            </a:solidFill>
+          </a:ln>
+        </p:spPr>
+        <p:style>
+          <a:lnRef idx="2">
+            <a:schemeClr val="accent1">
+              <a:shade val="15000"/>
+            </a:schemeClr>
+          </a:lnRef>
+          <a:fillRef idx="1">
+            <a:schemeClr val="accent1"/>
+          </a:fillRef>
+          <a:effectRef idx="0">
+            <a:schemeClr val="accent1"/>
+          </a:effectRef>
+          <a:fontRef idx="minor">
+            <a:schemeClr val="lt1"/>
+          </a:fontRef>
+        </p:style>
+        <p:txBody>
+          <a:bodyPr rtlCol="0" anchor="ctr"/>
+          <a:lstStyle/>
+          <a:p>
+            <a:pPr algn="ctr"/>
+            <a:endParaRPr lang="en-US"/>
+          </a:p>
+        </p:txBody>
+      </p:sp>
+      <p:cxnSp>
+        <p:nvCxnSpPr>
+          <p:cNvPr id="20" name="Connector: Elbow 19">
+            <a:extLst>
+              <a:ext uri="{FF2B5EF4-FFF2-40B4-BE49-F238E27FC236}">
+                <a16:creationId xmlns:a16="http://schemas.microsoft.com/office/drawing/2014/main" id="{16BA41F6-8E87-97F6-0B2C-7C210EE1B3FB}"/>
+              </a:ext>
+            </a:extLst>
+          </p:cNvPr>
+          <p:cNvCxnSpPr>
+            <a:cxnSpLocks/>
+            <a:stCxn id="16" idx="2"/>
+            <a:endCxn id="24" idx="0"/>
+          </p:cNvCxnSpPr>
+          <p:nvPr/>
+        </p:nvCxnSpPr>
+        <p:spPr>
+          <a:xfrm rot="16200000" flipH="1">
+            <a:off x="7537938" y="-483997"/>
+            <a:ext cx="904353" cy="5489750"/>
+          </a:xfrm>
+          <a:prstGeom prst="bentConnector3">
+            <a:avLst>
+              <a:gd name="adj1" fmla="val 50000"/>
+            </a:avLst>
+          </a:prstGeom>
+          <a:ln w="19050">
+            <a:solidFill>
+              <a:srgbClr val="FF0000"/>
+            </a:solidFill>
+            <a:tailEnd type="triangle"/>
+          </a:ln>
+        </p:spPr>
+        <p:style>
+          <a:lnRef idx="1">
+            <a:schemeClr val="accent1"/>
+          </a:lnRef>
+          <a:fillRef idx="0">
+            <a:schemeClr val="accent1"/>
+          </a:fillRef>
+          <a:effectRef idx="0">
+            <a:schemeClr val="accent1"/>
+          </a:effectRef>
+          <a:fontRef idx="minor">
+            <a:schemeClr val="tx1"/>
+          </a:fontRef>
+        </p:style>
+      </p:cxnSp>
+      <p:sp>
+        <p:nvSpPr>
+          <p:cNvPr id="24" name="Rectangle 23">
+            <a:extLst>
+              <a:ext uri="{FF2B5EF4-FFF2-40B4-BE49-F238E27FC236}">
+                <a16:creationId xmlns:a16="http://schemas.microsoft.com/office/drawing/2014/main" id="{8C2B2715-DBF9-019A-9FB9-C86E4CE58B9C}"/>
+              </a:ext>
+            </a:extLst>
+          </p:cNvPr>
+          <p:cNvSpPr/>
+          <p:nvPr/>
+        </p:nvSpPr>
+        <p:spPr>
+          <a:xfrm>
+            <a:off x="10279464" y="2713055"/>
+            <a:ext cx="911049" cy="278044"/>
+          </a:xfrm>
+          <a:prstGeom prst="rect">
+            <a:avLst/>
+          </a:prstGeom>
+          <a:noFill/>
+          <a:ln>
+            <a:solidFill>
+              <a:srgbClr val="FF0000"/>
+            </a:solidFill>
+          </a:ln>
+        </p:spPr>
+        <p:style>
+          <a:lnRef idx="2">
+            <a:schemeClr val="accent1">
+              <a:shade val="15000"/>
+            </a:schemeClr>
+          </a:lnRef>
+          <a:fillRef idx="1">
+            <a:schemeClr val="accent1"/>
+          </a:fillRef>
+          <a:effectRef idx="0">
+            <a:schemeClr val="accent1"/>
+          </a:effectRef>
+          <a:fontRef idx="minor">
+            <a:schemeClr val="lt1"/>
+          </a:fontRef>
+        </p:style>
+        <p:txBody>
+          <a:bodyPr rtlCol="0" anchor="ctr"/>
+          <a:lstStyle/>
+          <a:p>
+            <a:pPr algn="ctr"/>
+            <a:endParaRPr lang="en-US"/>
+          </a:p>
+        </p:txBody>
+      </p:sp>
+      <p:cxnSp>
+        <p:nvCxnSpPr>
+          <p:cNvPr id="27" name="Connector: Elbow 26">
+            <a:extLst>
+              <a:ext uri="{FF2B5EF4-FFF2-40B4-BE49-F238E27FC236}">
+                <a16:creationId xmlns:a16="http://schemas.microsoft.com/office/drawing/2014/main" id="{7C6DF5FF-44DD-4BB7-8E4F-18FE00492451}"/>
+              </a:ext>
+            </a:extLst>
+          </p:cNvPr>
+          <p:cNvCxnSpPr>
+            <a:cxnSpLocks/>
+            <a:stCxn id="17" idx="2"/>
+            <a:endCxn id="30" idx="0"/>
+          </p:cNvCxnSpPr>
+          <p:nvPr/>
+        </p:nvCxnSpPr>
+        <p:spPr>
+          <a:xfrm rot="5400000">
+            <a:off x="2508696" y="587869"/>
+            <a:ext cx="1897549" cy="4339213"/>
+          </a:xfrm>
+          <a:prstGeom prst="bentConnector3">
+            <a:avLst>
+              <a:gd name="adj1" fmla="val 50000"/>
+            </a:avLst>
+          </a:prstGeom>
+          <a:ln w="19050">
+            <a:solidFill>
+              <a:srgbClr val="FF0000"/>
+            </a:solidFill>
+            <a:tailEnd type="triangle"/>
+          </a:ln>
+        </p:spPr>
+        <p:style>
+          <a:lnRef idx="1">
+            <a:schemeClr val="accent1"/>
+          </a:lnRef>
+          <a:fillRef idx="0">
+            <a:schemeClr val="accent1"/>
+          </a:fillRef>
+          <a:effectRef idx="0">
+            <a:schemeClr val="accent1"/>
+          </a:effectRef>
+          <a:fontRef idx="minor">
+            <a:schemeClr val="tx1"/>
+          </a:fontRef>
+        </p:style>
+      </p:cxnSp>
+      <p:sp>
+        <p:nvSpPr>
+          <p:cNvPr id="30" name="Rectangle 29">
+            <a:extLst>
+              <a:ext uri="{FF2B5EF4-FFF2-40B4-BE49-F238E27FC236}">
+                <a16:creationId xmlns:a16="http://schemas.microsoft.com/office/drawing/2014/main" id="{66F14A6C-D78A-11FA-ACBB-23F03579D78C}"/>
+              </a:ext>
+            </a:extLst>
+          </p:cNvPr>
+          <p:cNvSpPr/>
+          <p:nvPr/>
+        </p:nvSpPr>
+        <p:spPr>
+          <a:xfrm>
+            <a:off x="1127087" y="3706250"/>
+            <a:ext cx="321551" cy="200967"/>
+          </a:xfrm>
+          <a:prstGeom prst="rect">
+            <a:avLst/>
+          </a:prstGeom>
+          <a:noFill/>
+          <a:ln>
+            <a:solidFill>
+              <a:srgbClr val="FF0000"/>
+            </a:solidFill>
+          </a:ln>
+        </p:spPr>
+        <p:style>
+          <a:lnRef idx="2">
+            <a:schemeClr val="accent1">
+              <a:shade val="15000"/>
+            </a:schemeClr>
+          </a:lnRef>
+          <a:fillRef idx="1">
+            <a:schemeClr val="accent1"/>
+          </a:fillRef>
+          <a:effectRef idx="0">
+            <a:schemeClr val="accent1"/>
+          </a:effectRef>
+          <a:fontRef idx="minor">
+            <a:schemeClr val="lt1"/>
+          </a:fontRef>
+        </p:style>
+        <p:txBody>
+          <a:bodyPr rtlCol="0" anchor="ctr"/>
+          <a:lstStyle/>
+          <a:p>
+            <a:pPr algn="ctr"/>
+            <a:endParaRPr lang="en-US"/>
+          </a:p>
+        </p:txBody>
+      </p:sp>
+      <p:cxnSp>
+        <p:nvCxnSpPr>
+          <p:cNvPr id="32" name="Connector: Elbow 31">
+            <a:extLst>
+              <a:ext uri="{FF2B5EF4-FFF2-40B4-BE49-F238E27FC236}">
+                <a16:creationId xmlns:a16="http://schemas.microsoft.com/office/drawing/2014/main" id="{AE69BF75-03D6-27D1-8D54-BD795E9C1E10}"/>
+              </a:ext>
+            </a:extLst>
+          </p:cNvPr>
+          <p:cNvCxnSpPr>
+            <a:cxnSpLocks/>
+            <a:stCxn id="18" idx="2"/>
+            <a:endCxn id="35" idx="0"/>
+          </p:cNvCxnSpPr>
+          <p:nvPr/>
+        </p:nvCxnSpPr>
+        <p:spPr>
+          <a:xfrm rot="16200000" flipH="1">
+            <a:off x="5255849" y="2575166"/>
+            <a:ext cx="1535441" cy="2510"/>
+          </a:xfrm>
+          <a:prstGeom prst="bentConnector3">
+            <a:avLst>
+              <a:gd name="adj1" fmla="val 50000"/>
+            </a:avLst>
+          </a:prstGeom>
+          <a:ln w="19050">
+            <a:solidFill>
+              <a:srgbClr val="FF0000"/>
+            </a:solidFill>
+            <a:tailEnd type="triangle"/>
+          </a:ln>
+        </p:spPr>
+        <p:style>
+          <a:lnRef idx="1">
+            <a:schemeClr val="accent1"/>
+          </a:lnRef>
+          <a:fillRef idx="0">
+            <a:schemeClr val="accent1"/>
+          </a:fillRef>
+          <a:effectRef idx="0">
+            <a:schemeClr val="accent1"/>
+          </a:effectRef>
+          <a:fontRef idx="minor">
+            <a:schemeClr val="tx1"/>
+          </a:fontRef>
+        </p:style>
+      </p:cxnSp>
+      <p:sp>
+        <p:nvSpPr>
+          <p:cNvPr id="35" name="Rectangle 34">
+            <a:extLst>
+              <a:ext uri="{FF2B5EF4-FFF2-40B4-BE49-F238E27FC236}">
+                <a16:creationId xmlns:a16="http://schemas.microsoft.com/office/drawing/2014/main" id="{E7CDCD43-7376-9EA5-6A73-553041BBA8CA}"/>
+              </a:ext>
+            </a:extLst>
+          </p:cNvPr>
+          <p:cNvSpPr/>
+          <p:nvPr/>
+        </p:nvSpPr>
+        <p:spPr>
+          <a:xfrm>
+            <a:off x="5787851" y="3344142"/>
+            <a:ext cx="473945" cy="313086"/>
+          </a:xfrm>
+          <a:prstGeom prst="rect">
+            <a:avLst/>
+          </a:prstGeom>
+          <a:noFill/>
+          <a:ln>
+            <a:solidFill>
+              <a:srgbClr val="FF0000"/>
+            </a:solidFill>
+          </a:ln>
+        </p:spPr>
+        <p:style>
+          <a:lnRef idx="2">
+            <a:schemeClr val="accent1">
+              <a:shade val="15000"/>
+            </a:schemeClr>
+          </a:lnRef>
+          <a:fillRef idx="1">
+            <a:schemeClr val="accent1"/>
+          </a:fillRef>
+          <a:effectRef idx="0">
+            <a:schemeClr val="accent1"/>
+          </a:effectRef>
+          <a:fontRef idx="minor">
+            <a:schemeClr val="lt1"/>
+          </a:fontRef>
+        </p:style>
+        <p:txBody>
+          <a:bodyPr rtlCol="0" anchor="ctr"/>
+          <a:lstStyle/>
+          <a:p>
+            <a:pPr algn="ctr"/>
+            <a:endParaRPr lang="en-US"/>
+          </a:p>
+        </p:txBody>
+      </p:sp>
+      <p:sp>
+        <p:nvSpPr>
+          <p:cNvPr id="37" name="TextBox 36">
+            <a:extLst>
+              <a:ext uri="{FF2B5EF4-FFF2-40B4-BE49-F238E27FC236}">
+                <a16:creationId xmlns:a16="http://schemas.microsoft.com/office/drawing/2014/main" id="{ECFBEC8B-E80C-C750-E401-996BFA3F0AD6}"/>
+              </a:ext>
+            </a:extLst>
+          </p:cNvPr>
+          <p:cNvSpPr txBox="1"/>
+          <p:nvPr/>
+        </p:nvSpPr>
+        <p:spPr>
+          <a:xfrm>
+            <a:off x="5582129" y="3717914"/>
+            <a:ext cx="880369" cy="307777"/>
+          </a:xfrm>
+          <a:prstGeom prst="rect">
+            <a:avLst/>
+          </a:prstGeom>
+          <a:noFill/>
+        </p:spPr>
+        <p:txBody>
+          <a:bodyPr wrap="none" rtlCol="0">
+            <a:spAutoFit/>
+          </a:bodyPr>
+          <a:lstStyle/>
+          <a:p>
+            <a:r>
+              <a:rPr lang="en-US" dirty="0"/>
+              <a:t>2973846</a:t>
+            </a:r>
+          </a:p>
+        </p:txBody>
+      </p:sp>
+    </p:spTree>
+    <p:extLst>
+      <p:ext uri="{BB962C8B-B14F-4D97-AF65-F5344CB8AC3E}">
+        <p14:creationId xmlns:p14="http://schemas.microsoft.com/office/powerpoint/2010/main" val="1793856232"/>
+      </p:ext>
+    </p:extLst>
+  </p:cSld>
+  <p:clrMapOvr>
+    <a:masterClrMapping/>
+  </p:clrMapOvr>
+</p:sld>
+</file>
+
+<file path=ppt/slides/slide11.xml><?xml version="1.0" encoding="utf-8"?>
+<p:sld xmlns:a="http://schemas.openxmlformats.org/drawingml/2006/main" xmlns:r="http://schemas.openxmlformats.org/officeDocument/2006/relationships" xmlns:p="http://schemas.openxmlformats.org/presentationml/2006/main">
+  <p:cSld>
+    <p:spTree>
+      <p:nvGrpSpPr>
         <p:cNvPr id="1" name="Shape 198">
           <a:extLst>
             <a:ext uri="{FF2B5EF4-FFF2-40B4-BE49-F238E27FC236}">
@@ -9064,7 +13256,7 @@
 </p:sld>
 </file>
 
-<file path=ppt/slides/slide11.xml><?xml version="1.0" encoding="utf-8"?>
+<file path=ppt/slides/slide12.xml><?xml version="1.0" encoding="utf-8"?>
 <p:sld xmlns:a="http://schemas.openxmlformats.org/drawingml/2006/main" xmlns:r="http://schemas.openxmlformats.org/officeDocument/2006/relationships" xmlns:p="http://schemas.openxmlformats.org/presentationml/2006/main">
   <p:cSld>
     <p:spTree>
@@ -9468,7 +13660,7 @@
 </p:sld>
 </file>
 
-<file path=ppt/slides/slide12.xml><?xml version="1.0" encoding="utf-8"?>
+<file path=ppt/slides/slide13.xml><?xml version="1.0" encoding="utf-8"?>
 <p:sld xmlns:a="http://schemas.openxmlformats.org/drawingml/2006/main" xmlns:r="http://schemas.openxmlformats.org/officeDocument/2006/relationships" xmlns:p="http://schemas.openxmlformats.org/presentationml/2006/main">
   <p:cSld>
     <p:spTree>
@@ -10146,7 +14338,7 @@
 </p:sld>
 </file>
 
-<file path=ppt/slides/slide13.xml><?xml version="1.0" encoding="utf-8"?>
+<file path=ppt/slides/slide14.xml><?xml version="1.0" encoding="utf-8"?>
 <p:sld xmlns:a="http://schemas.openxmlformats.org/drawingml/2006/main" xmlns:r="http://schemas.openxmlformats.org/officeDocument/2006/relationships" xmlns:p="http://schemas.openxmlformats.org/presentationml/2006/main">
   <p:cSld>
     <p:spTree>
@@ -10778,7 +14970,7 @@
 </p:sld>
 </file>
 
-<file path=ppt/slides/slide14.xml><?xml version="1.0" encoding="utf-8"?>
+<file path=ppt/slides/slide15.xml><?xml version="1.0" encoding="utf-8"?>
 <p:sld xmlns:a="http://schemas.openxmlformats.org/drawingml/2006/main" xmlns:r="http://schemas.openxmlformats.org/officeDocument/2006/relationships" xmlns:p="http://schemas.openxmlformats.org/presentationml/2006/main">
   <p:cSld>
     <p:spTree>
@@ -10924,7 +15116,7 @@
 </p:sld>
 </file>
 
-<file path=ppt/slides/slide15.xml><?xml version="1.0" encoding="utf-8"?>
+<file path=ppt/slides/slide16.xml><?xml version="1.0" encoding="utf-8"?>
 <p:sld xmlns:a="http://schemas.openxmlformats.org/drawingml/2006/main" xmlns:r="http://schemas.openxmlformats.org/officeDocument/2006/relationships" xmlns:p="http://schemas.openxmlformats.org/presentationml/2006/main">
   <p:cSld>
     <p:spTree>
@@ -11123,7 +15315,7 @@
 </p:sld>
 </file>
 
-<file path=ppt/slides/slide16.xml><?xml version="1.0" encoding="utf-8"?>
+<file path=ppt/slides/slide17.xml><?xml version="1.0" encoding="utf-8"?>
 <p:sld xmlns:a="http://schemas.openxmlformats.org/drawingml/2006/main" xmlns:r="http://schemas.openxmlformats.org/officeDocument/2006/relationships" xmlns:p="http://schemas.openxmlformats.org/presentationml/2006/main">
   <p:cSld>
     <p:spTree>
@@ -11269,7 +15461,7 @@
 </p:sld>
 </file>
 
-<file path=ppt/slides/slide17.xml><?xml version="1.0" encoding="utf-8"?>
+<file path=ppt/slides/slide18.xml><?xml version="1.0" encoding="utf-8"?>
 <p:sld xmlns:a="http://schemas.openxmlformats.org/drawingml/2006/main" xmlns:r="http://schemas.openxmlformats.org/officeDocument/2006/relationships" xmlns:p="http://schemas.openxmlformats.org/presentationml/2006/main">
   <p:cSld>
     <p:spTree>
@@ -11411,7 +15603,7 @@
 </p:sld>
 </file>
 
-<file path=ppt/slides/slide18.xml><?xml version="1.0" encoding="utf-8"?>
+<file path=ppt/slides/slide19.xml><?xml version="1.0" encoding="utf-8"?>
 <p:sld xmlns:a="http://schemas.openxmlformats.org/drawingml/2006/main" xmlns:r="http://schemas.openxmlformats.org/officeDocument/2006/relationships" xmlns:p="http://schemas.openxmlformats.org/presentationml/2006/main">
   <p:cSld>
     <p:spTree>
@@ -11505,7 +15697,253 @@
 </p:sld>
 </file>
 
-<file path=ppt/slides/slide19.xml><?xml version="1.0" encoding="utf-8"?>
+<file path=ppt/slides/slide2.xml><?xml version="1.0" encoding="utf-8"?>
+<p:sld xmlns:a="http://schemas.openxmlformats.org/drawingml/2006/main" xmlns:r="http://schemas.openxmlformats.org/officeDocument/2006/relationships" xmlns:p="http://schemas.openxmlformats.org/presentationml/2006/main">
+  <p:cSld>
+    <p:spTree>
+      <p:nvGrpSpPr>
+        <p:cNvPr id="1" name="Shape 127"/>
+        <p:cNvGrpSpPr/>
+        <p:nvPr/>
+      </p:nvGrpSpPr>
+      <p:grpSpPr>
+        <a:xfrm>
+          <a:off x="0" y="0"/>
+          <a:ext cx="0" cy="0"/>
+          <a:chOff x="0" y="0"/>
+          <a:chExt cx="0" cy="0"/>
+        </a:xfrm>
+      </p:grpSpPr>
+      <p:sp>
+        <p:nvSpPr>
+          <p:cNvPr id="128" name="Google Shape;128;p9"/>
+          <p:cNvSpPr txBox="1">
+            <a:spLocks noGrp="1"/>
+          </p:cNvSpPr>
+          <p:nvPr>
+            <p:ph type="ctrTitle"/>
+          </p:nvPr>
+        </p:nvSpPr>
+        <p:spPr>
+          <a:xfrm>
+            <a:off x="609600" y="0"/>
+            <a:ext cx="3657600" cy="6172200"/>
+          </a:xfrm>
+          <a:prstGeom prst="rect">
+            <a:avLst/>
+          </a:prstGeom>
+          <a:noFill/>
+          <a:ln>
+            <a:noFill/>
+          </a:ln>
+        </p:spPr>
+        <p:txBody>
+          <a:bodyPr spcFirstLastPara="1" wrap="square" lIns="0" tIns="0" rIns="0" bIns="0" anchor="ctr" anchorCtr="0">
+            <a:normAutofit/>
+          </a:bodyPr>
+          <a:lstStyle/>
+          <a:p>
+            <a:pPr marL="0" lvl="0" indent="0" algn="r" rtl="0">
+              <a:lnSpc>
+                <a:spcPct val="100000"/>
+              </a:lnSpc>
+              <a:spcBef>
+                <a:spcPts val="0"/>
+              </a:spcBef>
+              <a:spcAft>
+                <a:spcPts val="0"/>
+              </a:spcAft>
+              <a:buClr>
+                <a:srgbClr val="ED1C24"/>
+              </a:buClr>
+              <a:buSzPts val="7200"/>
+              <a:buFont typeface="Georgia"/>
+              <a:buNone/>
+            </a:pPr>
+            <a:r>
+              <a:rPr lang="en-US" sz="7200"/>
+              <a:t>Agenda</a:t>
+            </a:r>
+            <a:endParaRPr/>
+          </a:p>
+        </p:txBody>
+      </p:sp>
+      <p:sp>
+        <p:nvSpPr>
+          <p:cNvPr id="129" name="Google Shape;129;p9"/>
+          <p:cNvSpPr txBox="1">
+            <a:spLocks noGrp="1"/>
+          </p:cNvSpPr>
+          <p:nvPr>
+            <p:ph type="subTitle" idx="1"/>
+          </p:nvPr>
+        </p:nvSpPr>
+        <p:spPr>
+          <a:xfrm>
+            <a:off x="5181600" y="457200"/>
+            <a:ext cx="6400794" cy="5257800"/>
+          </a:xfrm>
+          <a:prstGeom prst="rect">
+            <a:avLst/>
+          </a:prstGeom>
+          <a:noFill/>
+          <a:ln>
+            <a:noFill/>
+          </a:ln>
+        </p:spPr>
+        <p:txBody>
+          <a:bodyPr spcFirstLastPara="1" wrap="square" lIns="0" tIns="0" rIns="0" bIns="0" anchor="ctr" anchorCtr="0">
+            <a:normAutofit/>
+          </a:bodyPr>
+          <a:lstStyle/>
+          <a:p>
+            <a:pPr marL="228600" lvl="0" indent="-228600" algn="l" rtl="0">
+              <a:lnSpc>
+                <a:spcPct val="100000"/>
+              </a:lnSpc>
+              <a:spcBef>
+                <a:spcPts val="0"/>
+              </a:spcBef>
+              <a:spcAft>
+                <a:spcPts val="0"/>
+              </a:spcAft>
+              <a:buClr>
+                <a:schemeClr val="dk1"/>
+              </a:buClr>
+              <a:buSzPts val="2400"/>
+              <a:buChar char="•"/>
+            </a:pPr>
+            <a:r>
+              <a:rPr lang="en-US" dirty="0"/>
+              <a:t>My research question and the search for a valid price</a:t>
+            </a:r>
+            <a:endParaRPr dirty="0"/>
+          </a:p>
+          <a:p>
+            <a:pPr marL="228600" lvl="0" indent="-228600" algn="l" rtl="0">
+              <a:lnSpc>
+                <a:spcPct val="100000"/>
+              </a:lnSpc>
+              <a:spcBef>
+                <a:spcPts val="1800"/>
+              </a:spcBef>
+              <a:spcAft>
+                <a:spcPts val="0"/>
+              </a:spcAft>
+              <a:buClr>
+                <a:schemeClr val="dk1"/>
+              </a:buClr>
+              <a:buSzPts val="2400"/>
+              <a:buChar char="•"/>
+            </a:pPr>
+            <a:r>
+              <a:rPr lang="en-US" dirty="0"/>
+              <a:t>A background on the Hospital Cost Reports (HCRIS)</a:t>
+            </a:r>
+            <a:endParaRPr dirty="0"/>
+          </a:p>
+          <a:p>
+            <a:pPr marL="228600" lvl="0" indent="-228600" algn="l" rtl="0">
+              <a:lnSpc>
+                <a:spcPct val="100000"/>
+              </a:lnSpc>
+              <a:spcBef>
+                <a:spcPts val="1800"/>
+              </a:spcBef>
+              <a:spcAft>
+                <a:spcPts val="0"/>
+              </a:spcAft>
+              <a:buClr>
+                <a:schemeClr val="dk1"/>
+              </a:buClr>
+              <a:buSzPts val="2400"/>
+              <a:buChar char="•"/>
+            </a:pPr>
+            <a:r>
+              <a:rPr lang="en-US" dirty="0"/>
+              <a:t>A tale of two pricing methods</a:t>
+            </a:r>
+            <a:endParaRPr dirty="0"/>
+          </a:p>
+          <a:p>
+            <a:pPr marL="228600" lvl="0" indent="-228600" algn="l" rtl="0">
+              <a:lnSpc>
+                <a:spcPct val="100000"/>
+              </a:lnSpc>
+              <a:spcBef>
+                <a:spcPts val="1800"/>
+              </a:spcBef>
+              <a:spcAft>
+                <a:spcPts val="0"/>
+              </a:spcAft>
+              <a:buClr>
+                <a:schemeClr val="dk1"/>
+              </a:buClr>
+              <a:buSzPts val="2400"/>
+              <a:buChar char="•"/>
+            </a:pPr>
+            <a:r>
+              <a:rPr lang="en-US" dirty="0"/>
+              <a:t>A deep dive into the outliers</a:t>
+            </a:r>
+            <a:endParaRPr dirty="0"/>
+          </a:p>
+          <a:p>
+            <a:pPr marL="228600" lvl="0" indent="-228600" algn="l" rtl="0">
+              <a:lnSpc>
+                <a:spcPct val="100000"/>
+              </a:lnSpc>
+              <a:spcBef>
+                <a:spcPts val="1800"/>
+              </a:spcBef>
+              <a:spcAft>
+                <a:spcPts val="0"/>
+              </a:spcAft>
+              <a:buClr>
+                <a:schemeClr val="dk1"/>
+              </a:buClr>
+              <a:buSzPts val="2400"/>
+              <a:buChar char="•"/>
+            </a:pPr>
+            <a:r>
+              <a:rPr lang="en-US" dirty="0"/>
+              <a:t>Takeaways and Next Steps</a:t>
+            </a:r>
+          </a:p>
+          <a:p>
+            <a:pPr marL="228600" lvl="0" indent="-228600" algn="l" rtl="0">
+              <a:lnSpc>
+                <a:spcPct val="100000"/>
+              </a:lnSpc>
+              <a:spcBef>
+                <a:spcPts val="1800"/>
+              </a:spcBef>
+              <a:spcAft>
+                <a:spcPts val="0"/>
+              </a:spcAft>
+              <a:buClr>
+                <a:schemeClr val="dk1"/>
+              </a:buClr>
+              <a:buSzPts val="2400"/>
+              <a:buChar char="•"/>
+            </a:pPr>
+            <a:r>
+              <a:rPr lang="en-US" dirty="0"/>
+              <a:t>Some helpful hints on replication</a:t>
+            </a:r>
+            <a:endParaRPr dirty="0"/>
+          </a:p>
+        </p:txBody>
+      </p:sp>
+    </p:spTree>
+  </p:cSld>
+  <p:clrMapOvr>
+    <a:masterClrMapping/>
+  </p:clrMapOvr>
+</p:sld>
+</file>
+
+<file path=ppt/slides/slide20.xml><?xml version="1.0" encoding="utf-8"?>
 <p:sld xmlns:a="http://schemas.openxmlformats.org/drawingml/2006/main" xmlns:r="http://schemas.openxmlformats.org/officeDocument/2006/relationships" xmlns:p="http://schemas.openxmlformats.org/presentationml/2006/main">
   <p:cSld>
     <p:spTree>
@@ -11663,12 +16101,12 @@
 </p:sld>
 </file>
 
-<file path=ppt/slides/slide2.xml><?xml version="1.0" encoding="utf-8"?>
+<file path=ppt/slides/slide21.xml><?xml version="1.0" encoding="utf-8"?>
 <p:sld xmlns:a="http://schemas.openxmlformats.org/drawingml/2006/main" xmlns:r="http://schemas.openxmlformats.org/officeDocument/2006/relationships" xmlns:p="http://schemas.openxmlformats.org/presentationml/2006/main">
   <p:cSld>
     <p:spTree>
       <p:nvGrpSpPr>
-        <p:cNvPr id="1" name="Shape 127"/>
+        <p:cNvPr id="1" name=""/>
         <p:cNvGrpSpPr/>
         <p:nvPr/>
       </p:nvGrpSpPr>
@@ -11682,226 +16120,440 @@
       </p:grpSpPr>
       <p:sp>
         <p:nvSpPr>
-          <p:cNvPr id="128" name="Google Shape;128;p9"/>
-          <p:cNvSpPr txBox="1">
+          <p:cNvPr id="2" name="Title 1">
+            <a:extLst>
+              <a:ext uri="{FF2B5EF4-FFF2-40B4-BE49-F238E27FC236}">
+                <a16:creationId xmlns:a16="http://schemas.microsoft.com/office/drawing/2014/main" id="{5BB1F44D-D1E0-E8DC-67A8-0E633A6510B8}"/>
+              </a:ext>
+            </a:extLst>
+          </p:cNvPr>
+          <p:cNvSpPr>
             <a:spLocks noGrp="1"/>
           </p:cNvSpPr>
           <p:nvPr>
-            <p:ph type="ctrTitle"/>
+            <p:ph type="title"/>
           </p:nvPr>
         </p:nvSpPr>
+        <p:spPr/>
+        <p:txBody>
+          <a:bodyPr/>
+          <a:lstStyle/>
+          <a:p>
+            <a:r>
+              <a:rPr lang="en-US" dirty="0"/>
+              <a:t>In screenshots</a:t>
+            </a:r>
+          </a:p>
+        </p:txBody>
+      </p:sp>
+      <p:pic>
+        <p:nvPicPr>
+          <p:cNvPr id="5" name="Picture 4">
+            <a:extLst>
+              <a:ext uri="{FF2B5EF4-FFF2-40B4-BE49-F238E27FC236}">
+                <a16:creationId xmlns:a16="http://schemas.microsoft.com/office/drawing/2014/main" id="{769DF296-E308-DAE5-E067-8BBC5D27FBE6}"/>
+              </a:ext>
+            </a:extLst>
+          </p:cNvPr>
+          <p:cNvPicPr>
+            <a:picLocks noChangeAspect="1"/>
+          </p:cNvPicPr>
+          <p:nvPr/>
+        </p:nvPicPr>
+        <p:blipFill>
+          <a:blip r:embed="rId3"/>
+          <a:stretch>
+            <a:fillRect/>
+          </a:stretch>
+        </p:blipFill>
         <p:spPr>
           <a:xfrm>
-            <a:off x="609600" y="0"/>
-            <a:ext cx="3657600" cy="6172200"/>
+            <a:off x="327411" y="954157"/>
+            <a:ext cx="5768589" cy="3325853"/>
           </a:xfrm>
           <a:prstGeom prst="rect">
             <a:avLst/>
           </a:prstGeom>
-          <a:noFill/>
-          <a:ln>
-            <a:noFill/>
+          <a:ln w="38100" cap="sq">
+            <a:solidFill>
+              <a:srgbClr val="000000"/>
+            </a:solidFill>
+            <a:prstDash val="solid"/>
+            <a:miter lim="800000"/>
           </a:ln>
+          <a:effectLst>
+            <a:outerShdw blurRad="50800" dist="38100" dir="2700000" algn="tl" rotWithShape="0">
+              <a:srgbClr val="000000">
+                <a:alpha val="43000"/>
+              </a:srgbClr>
+            </a:outerShdw>
+          </a:effectLst>
         </p:spPr>
+      </p:pic>
+      <p:sp>
+        <p:nvSpPr>
+          <p:cNvPr id="8" name="Arrow: Down 7">
+            <a:extLst>
+              <a:ext uri="{FF2B5EF4-FFF2-40B4-BE49-F238E27FC236}">
+                <a16:creationId xmlns:a16="http://schemas.microsoft.com/office/drawing/2014/main" id="{51668F7F-8161-DE1F-6586-F301F64D8BC2}"/>
+              </a:ext>
+            </a:extLst>
+          </p:cNvPr>
+          <p:cNvSpPr/>
+          <p:nvPr/>
+        </p:nvSpPr>
+        <p:spPr>
+          <a:xfrm>
+            <a:off x="2385391" y="4357866"/>
+            <a:ext cx="1262270" cy="341685"/>
+          </a:xfrm>
+          <a:prstGeom prst="downArrow">
+            <a:avLst/>
+          </a:prstGeom>
+        </p:spPr>
+        <p:style>
+          <a:lnRef idx="2">
+            <a:schemeClr val="accent1">
+              <a:shade val="15000"/>
+            </a:schemeClr>
+          </a:lnRef>
+          <a:fillRef idx="1">
+            <a:schemeClr val="accent1"/>
+          </a:fillRef>
+          <a:effectRef idx="0">
+            <a:schemeClr val="accent1"/>
+          </a:effectRef>
+          <a:fontRef idx="minor">
+            <a:schemeClr val="lt1"/>
+          </a:fontRef>
+        </p:style>
         <p:txBody>
-          <a:bodyPr spcFirstLastPara="1" wrap="square" lIns="0" tIns="0" rIns="0" bIns="0" anchor="ctr" anchorCtr="0">
-            <a:normAutofit/>
-          </a:bodyPr>
+          <a:bodyPr rtlCol="0" anchor="ctr"/>
           <a:lstStyle/>
           <a:p>
-            <a:pPr marL="0" lvl="0" indent="0" algn="r" rtl="0">
-              <a:lnSpc>
-                <a:spcPct val="100000"/>
-              </a:lnSpc>
-              <a:spcBef>
-                <a:spcPts val="0"/>
-              </a:spcBef>
-              <a:spcAft>
-                <a:spcPts val="0"/>
-              </a:spcAft>
-              <a:buClr>
-                <a:srgbClr val="ED1C24"/>
-              </a:buClr>
-              <a:buSzPts val="7200"/>
-              <a:buFont typeface="Georgia"/>
-              <a:buNone/>
-            </a:pPr>
-            <a:r>
-              <a:rPr lang="en-US" sz="7200"/>
-              <a:t>Agenda</a:t>
-            </a:r>
-            <a:endParaRPr/>
+            <a:pPr algn="ctr"/>
+            <a:endParaRPr lang="en-US"/>
+          </a:p>
+        </p:txBody>
+      </p:sp>
+      <p:pic>
+        <p:nvPicPr>
+          <p:cNvPr id="12" name="Picture 11">
+            <a:extLst>
+              <a:ext uri="{FF2B5EF4-FFF2-40B4-BE49-F238E27FC236}">
+                <a16:creationId xmlns:a16="http://schemas.microsoft.com/office/drawing/2014/main" id="{327C9D0C-2A8E-EA71-F349-4E43471FF9D1}"/>
+              </a:ext>
+            </a:extLst>
+          </p:cNvPr>
+          <p:cNvPicPr>
+            <a:picLocks noChangeAspect="1"/>
+          </p:cNvPicPr>
+          <p:nvPr/>
+        </p:nvPicPr>
+        <p:blipFill>
+          <a:blip r:embed="rId4"/>
+          <a:stretch>
+            <a:fillRect/>
+          </a:stretch>
+        </p:blipFill>
+        <p:spPr>
+          <a:xfrm>
+            <a:off x="6423411" y="438151"/>
+            <a:ext cx="5768589" cy="1495560"/>
+          </a:xfrm>
+          <a:prstGeom prst="rect">
+            <a:avLst/>
+          </a:prstGeom>
+          <a:ln w="38100" cap="sq">
+            <a:solidFill>
+              <a:srgbClr val="000000"/>
+            </a:solidFill>
+            <a:prstDash val="solid"/>
+            <a:miter lim="800000"/>
+          </a:ln>
+          <a:effectLst>
+            <a:outerShdw blurRad="50800" dist="38100" dir="2700000" algn="tl" rotWithShape="0">
+              <a:srgbClr val="000000">
+                <a:alpha val="43000"/>
+              </a:srgbClr>
+            </a:outerShdw>
+          </a:effectLst>
+        </p:spPr>
+      </p:pic>
+      <p:pic>
+        <p:nvPicPr>
+          <p:cNvPr id="14" name="Picture 13">
+            <a:extLst>
+              <a:ext uri="{FF2B5EF4-FFF2-40B4-BE49-F238E27FC236}">
+                <a16:creationId xmlns:a16="http://schemas.microsoft.com/office/drawing/2014/main" id="{4F7C296E-FB91-D17D-4E74-7D645D646C89}"/>
+              </a:ext>
+            </a:extLst>
+          </p:cNvPr>
+          <p:cNvPicPr>
+            <a:picLocks noChangeAspect="1"/>
+          </p:cNvPicPr>
+          <p:nvPr/>
+        </p:nvPicPr>
+        <p:blipFill>
+          <a:blip r:embed="rId5"/>
+          <a:srcRect b="44158"/>
+          <a:stretch>
+            <a:fillRect/>
+          </a:stretch>
+        </p:blipFill>
+        <p:spPr>
+          <a:xfrm>
+            <a:off x="1212575" y="4885277"/>
+            <a:ext cx="3795440" cy="1298736"/>
+          </a:xfrm>
+          <a:prstGeom prst="rect">
+            <a:avLst/>
+          </a:prstGeom>
+          <a:ln w="38100" cap="sq">
+            <a:solidFill>
+              <a:srgbClr val="000000"/>
+            </a:solidFill>
+            <a:prstDash val="solid"/>
+            <a:miter lim="800000"/>
+          </a:ln>
+          <a:effectLst>
+            <a:outerShdw blurRad="50800" dist="38100" dir="2700000" algn="tl" rotWithShape="0">
+              <a:srgbClr val="000000">
+                <a:alpha val="43000"/>
+              </a:srgbClr>
+            </a:outerShdw>
+          </a:effectLst>
+        </p:spPr>
+      </p:pic>
+      <p:pic>
+        <p:nvPicPr>
+          <p:cNvPr id="16" name="Picture 15">
+            <a:extLst>
+              <a:ext uri="{FF2B5EF4-FFF2-40B4-BE49-F238E27FC236}">
+                <a16:creationId xmlns:a16="http://schemas.microsoft.com/office/drawing/2014/main" id="{66C2EF87-9561-5E32-BEED-EDBE4C929436}"/>
+              </a:ext>
+            </a:extLst>
+          </p:cNvPr>
+          <p:cNvPicPr>
+            <a:picLocks noChangeAspect="1"/>
+          </p:cNvPicPr>
+          <p:nvPr/>
+        </p:nvPicPr>
+        <p:blipFill>
+          <a:blip r:embed="rId6"/>
+          <a:stretch>
+            <a:fillRect/>
+          </a:stretch>
+        </p:blipFill>
+        <p:spPr>
+          <a:xfrm>
+            <a:off x="7087966" y="2191018"/>
+            <a:ext cx="4439478" cy="1970617"/>
+          </a:xfrm>
+          <a:prstGeom prst="rect">
+            <a:avLst/>
+          </a:prstGeom>
+          <a:ln w="38100" cap="sq">
+            <a:solidFill>
+              <a:srgbClr val="000000"/>
+            </a:solidFill>
+            <a:prstDash val="solid"/>
+            <a:miter lim="800000"/>
+          </a:ln>
+          <a:effectLst>
+            <a:outerShdw blurRad="50800" dist="38100" dir="2700000" algn="tl" rotWithShape="0">
+              <a:srgbClr val="000000">
+                <a:alpha val="43000"/>
+              </a:srgbClr>
+            </a:outerShdw>
+          </a:effectLst>
+        </p:spPr>
+      </p:pic>
+      <p:pic>
+        <p:nvPicPr>
+          <p:cNvPr id="18" name="Picture 17">
+            <a:extLst>
+              <a:ext uri="{FF2B5EF4-FFF2-40B4-BE49-F238E27FC236}">
+                <a16:creationId xmlns:a16="http://schemas.microsoft.com/office/drawing/2014/main" id="{F40C4C6F-C4FA-D716-1027-556DC573B90B}"/>
+              </a:ext>
+            </a:extLst>
+          </p:cNvPr>
+          <p:cNvPicPr>
+            <a:picLocks noChangeAspect="1"/>
+          </p:cNvPicPr>
+          <p:nvPr/>
+        </p:nvPicPr>
+        <p:blipFill>
+          <a:blip r:embed="rId7"/>
+          <a:stretch>
+            <a:fillRect/>
+          </a:stretch>
+        </p:blipFill>
+        <p:spPr>
+          <a:xfrm>
+            <a:off x="7716357" y="4357866"/>
+            <a:ext cx="3182696" cy="2226209"/>
+          </a:xfrm>
+          <a:prstGeom prst="rect">
+            <a:avLst/>
+          </a:prstGeom>
+          <a:ln w="38100" cap="sq">
+            <a:solidFill>
+              <a:srgbClr val="000000"/>
+            </a:solidFill>
+            <a:prstDash val="solid"/>
+            <a:miter lim="800000"/>
+          </a:ln>
+          <a:effectLst>
+            <a:outerShdw blurRad="50800" dist="38100" dir="2700000" algn="tl" rotWithShape="0">
+              <a:srgbClr val="000000">
+                <a:alpha val="43000"/>
+              </a:srgbClr>
+            </a:outerShdw>
+          </a:effectLst>
+        </p:spPr>
+      </p:pic>
+      <p:sp>
+        <p:nvSpPr>
+          <p:cNvPr id="19" name="Arrow: Down 18">
+            <a:extLst>
+              <a:ext uri="{FF2B5EF4-FFF2-40B4-BE49-F238E27FC236}">
+                <a16:creationId xmlns:a16="http://schemas.microsoft.com/office/drawing/2014/main" id="{645E4633-B7FE-3178-DF3C-2BC41D0DF201}"/>
+              </a:ext>
+            </a:extLst>
+          </p:cNvPr>
+          <p:cNvSpPr/>
+          <p:nvPr/>
+        </p:nvSpPr>
+        <p:spPr>
+          <a:xfrm>
+            <a:off x="8799443" y="1933711"/>
+            <a:ext cx="1262270" cy="341685"/>
+          </a:xfrm>
+          <a:prstGeom prst="downArrow">
+            <a:avLst/>
+          </a:prstGeom>
+        </p:spPr>
+        <p:style>
+          <a:lnRef idx="2">
+            <a:schemeClr val="accent1">
+              <a:shade val="15000"/>
+            </a:schemeClr>
+          </a:lnRef>
+          <a:fillRef idx="1">
+            <a:schemeClr val="accent1"/>
+          </a:fillRef>
+          <a:effectRef idx="0">
+            <a:schemeClr val="accent1"/>
+          </a:effectRef>
+          <a:fontRef idx="minor">
+            <a:schemeClr val="lt1"/>
+          </a:fontRef>
+        </p:style>
+        <p:txBody>
+          <a:bodyPr rtlCol="0" anchor="ctr"/>
+          <a:lstStyle/>
+          <a:p>
+            <a:pPr algn="ctr"/>
+            <a:endParaRPr lang="en-US"/>
           </a:p>
         </p:txBody>
       </p:sp>
       <p:sp>
         <p:nvSpPr>
-          <p:cNvPr id="129" name="Google Shape;129;p9"/>
-          <p:cNvSpPr txBox="1">
-            <a:spLocks noGrp="1"/>
-          </p:cNvSpPr>
-          <p:nvPr>
-            <p:ph type="subTitle" idx="1"/>
-          </p:nvPr>
+          <p:cNvPr id="20" name="Arrow: Down 19">
+            <a:extLst>
+              <a:ext uri="{FF2B5EF4-FFF2-40B4-BE49-F238E27FC236}">
+                <a16:creationId xmlns:a16="http://schemas.microsoft.com/office/drawing/2014/main" id="{78C43373-5703-DD30-D890-3854ABAAFBF6}"/>
+              </a:ext>
+            </a:extLst>
+          </p:cNvPr>
+          <p:cNvSpPr/>
+          <p:nvPr/>
         </p:nvSpPr>
         <p:spPr>
           <a:xfrm>
-            <a:off x="5181600" y="457200"/>
-            <a:ext cx="6400794" cy="5257800"/>
+            <a:off x="8676570" y="4187023"/>
+            <a:ext cx="1262270" cy="341685"/>
           </a:xfrm>
-          <a:prstGeom prst="rect">
+          <a:prstGeom prst="downArrow">
             <a:avLst/>
           </a:prstGeom>
-          <a:noFill/>
-          <a:ln>
-            <a:noFill/>
-          </a:ln>
         </p:spPr>
+        <p:style>
+          <a:lnRef idx="2">
+            <a:schemeClr val="accent1">
+              <a:shade val="15000"/>
+            </a:schemeClr>
+          </a:lnRef>
+          <a:fillRef idx="1">
+            <a:schemeClr val="accent1"/>
+          </a:fillRef>
+          <a:effectRef idx="0">
+            <a:schemeClr val="accent1"/>
+          </a:effectRef>
+          <a:fontRef idx="minor">
+            <a:schemeClr val="lt1"/>
+          </a:fontRef>
+        </p:style>
         <p:txBody>
-          <a:bodyPr spcFirstLastPara="1" wrap="square" lIns="0" tIns="0" rIns="0" bIns="0" anchor="ctr" anchorCtr="0">
-            <a:normAutofit/>
-          </a:bodyPr>
+          <a:bodyPr rtlCol="0" anchor="ctr"/>
           <a:lstStyle/>
           <a:p>
-            <a:pPr marL="228600" lvl="0" indent="-228600" algn="l" rtl="0">
-              <a:lnSpc>
-                <a:spcPct val="100000"/>
-              </a:lnSpc>
-              <a:spcBef>
-                <a:spcPts val="0"/>
-              </a:spcBef>
-              <a:spcAft>
-                <a:spcPts val="0"/>
-              </a:spcAft>
-              <a:buClr>
-                <a:schemeClr val="dk1"/>
-              </a:buClr>
-              <a:buSzPts val="2400"/>
-              <a:buChar char="•"/>
-            </a:pPr>
-            <a:r>
-              <a:rPr lang="en-US" dirty="0"/>
-              <a:t>My research question and the search for a valid price</a:t>
-            </a:r>
-            <a:endParaRPr dirty="0"/>
-          </a:p>
-          <a:p>
-            <a:pPr marL="228600" lvl="0" indent="-228600" algn="l" rtl="0">
-              <a:lnSpc>
-                <a:spcPct val="100000"/>
-              </a:lnSpc>
-              <a:spcBef>
-                <a:spcPts val="1800"/>
-              </a:spcBef>
-              <a:spcAft>
-                <a:spcPts val="0"/>
-              </a:spcAft>
-              <a:buClr>
-                <a:schemeClr val="dk1"/>
-              </a:buClr>
-              <a:buSzPts val="2400"/>
-              <a:buChar char="•"/>
-            </a:pPr>
-            <a:r>
-              <a:rPr lang="en-US" dirty="0"/>
-              <a:t>A background on the Hospital Cost Reports (HCRIS)</a:t>
-            </a:r>
-            <a:endParaRPr dirty="0"/>
-          </a:p>
-          <a:p>
-            <a:pPr marL="228600" lvl="0" indent="-228600" algn="l" rtl="0">
-              <a:lnSpc>
-                <a:spcPct val="100000"/>
-              </a:lnSpc>
-              <a:spcBef>
-                <a:spcPts val="1800"/>
-              </a:spcBef>
-              <a:spcAft>
-                <a:spcPts val="0"/>
-              </a:spcAft>
-              <a:buClr>
-                <a:schemeClr val="dk1"/>
-              </a:buClr>
-              <a:buSzPts val="2400"/>
-              <a:buChar char="•"/>
-            </a:pPr>
-            <a:r>
-              <a:rPr lang="en-US" dirty="0"/>
-              <a:t>A tale of two pricing methods</a:t>
-            </a:r>
-            <a:endParaRPr dirty="0"/>
-          </a:p>
-          <a:p>
-            <a:pPr marL="228600" lvl="0" indent="-228600" algn="l" rtl="0">
-              <a:lnSpc>
-                <a:spcPct val="100000"/>
-              </a:lnSpc>
-              <a:spcBef>
-                <a:spcPts val="1800"/>
-              </a:spcBef>
-              <a:spcAft>
-                <a:spcPts val="0"/>
-              </a:spcAft>
-              <a:buClr>
-                <a:schemeClr val="dk1"/>
-              </a:buClr>
-              <a:buSzPts val="2400"/>
-              <a:buChar char="•"/>
-            </a:pPr>
-            <a:r>
-              <a:rPr lang="en-US" dirty="0"/>
-              <a:t>A deep dive into the outliers</a:t>
-            </a:r>
-            <a:endParaRPr dirty="0"/>
-          </a:p>
-          <a:p>
-            <a:pPr marL="228600" lvl="0" indent="-228600" algn="l" rtl="0">
-              <a:lnSpc>
-                <a:spcPct val="100000"/>
-              </a:lnSpc>
-              <a:spcBef>
-                <a:spcPts val="1800"/>
-              </a:spcBef>
-              <a:spcAft>
-                <a:spcPts val="0"/>
-              </a:spcAft>
-              <a:buClr>
-                <a:schemeClr val="dk1"/>
-              </a:buClr>
-              <a:buSzPts val="2400"/>
-              <a:buChar char="•"/>
-            </a:pPr>
-            <a:r>
-              <a:rPr lang="en-US" dirty="0"/>
-              <a:t>Takeaways and Next Steps</a:t>
-            </a:r>
-          </a:p>
-          <a:p>
-            <a:pPr marL="228600" lvl="0" indent="-228600" algn="l" rtl="0">
-              <a:lnSpc>
-                <a:spcPct val="100000"/>
-              </a:lnSpc>
-              <a:spcBef>
-                <a:spcPts val="1800"/>
-              </a:spcBef>
-              <a:spcAft>
-                <a:spcPts val="0"/>
-              </a:spcAft>
-              <a:buClr>
-                <a:schemeClr val="dk1"/>
-              </a:buClr>
-              <a:buSzPts val="2400"/>
-              <a:buChar char="•"/>
-            </a:pPr>
-            <a:r>
-              <a:rPr lang="en-US" dirty="0"/>
-              <a:t>Some helpful hints on replication</a:t>
-            </a:r>
-            <a:endParaRPr dirty="0"/>
+            <a:pPr algn="ctr"/>
+            <a:endParaRPr lang="en-US"/>
           </a:p>
         </p:txBody>
       </p:sp>
+      <p:cxnSp>
+        <p:nvCxnSpPr>
+          <p:cNvPr id="22" name="Connector: Elbow 21">
+            <a:extLst>
+              <a:ext uri="{FF2B5EF4-FFF2-40B4-BE49-F238E27FC236}">
+                <a16:creationId xmlns:a16="http://schemas.microsoft.com/office/drawing/2014/main" id="{F9530F24-A264-A820-F7AD-B5523E410009}"/>
+              </a:ext>
+            </a:extLst>
+          </p:cNvPr>
+          <p:cNvCxnSpPr>
+            <a:cxnSpLocks/>
+            <a:stCxn id="14" idx="3"/>
+            <a:endCxn id="12" idx="1"/>
+          </p:cNvCxnSpPr>
+          <p:nvPr/>
+        </p:nvCxnSpPr>
+        <p:spPr>
+          <a:xfrm flipV="1">
+            <a:off x="5008015" y="1185931"/>
+            <a:ext cx="1415396" cy="4348714"/>
+          </a:xfrm>
+          <a:prstGeom prst="bentConnector3">
+            <a:avLst/>
+          </a:prstGeom>
+          <a:ln w="28575">
+            <a:tailEnd type="triangle"/>
+          </a:ln>
+        </p:spPr>
+        <p:style>
+          <a:lnRef idx="1">
+            <a:schemeClr val="accent1"/>
+          </a:lnRef>
+          <a:fillRef idx="0">
+            <a:schemeClr val="accent1"/>
+          </a:fillRef>
+          <a:effectRef idx="0">
+            <a:schemeClr val="accent1"/>
+          </a:effectRef>
+          <a:fontRef idx="minor">
+            <a:schemeClr val="tx1"/>
+          </a:fontRef>
+        </p:style>
+      </p:cxnSp>
     </p:spTree>
+    <p:extLst>
+      <p:ext uri="{BB962C8B-B14F-4D97-AF65-F5344CB8AC3E}">
+        <p14:creationId xmlns:p14="http://schemas.microsoft.com/office/powerpoint/2010/main" val="1877210090"/>
+      </p:ext>
+    </p:extLst>
   </p:cSld>
   <p:clrMapOvr>
     <a:masterClrMapping/>
@@ -11909,7 +16561,7 @@
 </p:sld>
 </file>
 
-<file path=ppt/slides/slide20.xml><?xml version="1.0" encoding="utf-8"?>
+<file path=ppt/slides/slide22.xml><?xml version="1.0" encoding="utf-8"?>
 <p:sld xmlns:a="http://schemas.openxmlformats.org/drawingml/2006/main" xmlns:r="http://schemas.openxmlformats.org/officeDocument/2006/relationships" xmlns:p="http://schemas.openxmlformats.org/presentationml/2006/main">
   <p:cSld>
     <p:spTree>
@@ -12017,7 +16669,7 @@
 </p:sld>
 </file>
 
-<file path=ppt/slides/slide21.xml><?xml version="1.0" encoding="utf-8"?>
+<file path=ppt/slides/slide23.xml><?xml version="1.0" encoding="utf-8"?>
 <p:sld xmlns:a="http://schemas.openxmlformats.org/drawingml/2006/main" xmlns:r="http://schemas.openxmlformats.org/officeDocument/2006/relationships" xmlns:p="http://schemas.openxmlformats.org/presentationml/2006/main">
   <p:cSld>
     <p:spTree>
@@ -12110,7 +16762,7 @@
 </p:sld>
 </file>
 
-<file path=ppt/slides/slide22.xml><?xml version="1.0" encoding="utf-8"?>
+<file path=ppt/slides/slide24.xml><?xml version="1.0" encoding="utf-8"?>
 <p:sld xmlns:a="http://schemas.openxmlformats.org/drawingml/2006/main" xmlns:r="http://schemas.openxmlformats.org/officeDocument/2006/relationships" xmlns:p="http://schemas.openxmlformats.org/presentationml/2006/main">
   <p:cSld>
     <p:spTree>
@@ -16383,7 +21035,7 @@
           <p:cNvPr id="2" name="Title 1">
             <a:extLst>
               <a:ext uri="{FF2B5EF4-FFF2-40B4-BE49-F238E27FC236}">
-                <a16:creationId xmlns:a16="http://schemas.microsoft.com/office/drawing/2014/main" id="{47430553-C47E-6ED2-2C25-E32D336A9A56}"/>
+                <a16:creationId xmlns:a16="http://schemas.microsoft.com/office/drawing/2014/main" id="{13104400-8AC1-5F9C-C971-CB835F546D92}"/>
               </a:ext>
             </a:extLst>
           </p:cNvPr>
@@ -16401,47 +21053,45 @@
           <a:p>
             <a:r>
               <a:rPr lang="en-US" dirty="0"/>
-              <a:t>There’s a reason people rely on RAND and NASHP….</a:t>
+              <a:t>Three Files in Relational Database</a:t>
             </a:r>
           </a:p>
         </p:txBody>
       </p:sp>
-      <p:pic>
-        <p:nvPicPr>
-          <p:cNvPr id="5" name="Picture 4">
+      <p:graphicFrame>
+        <p:nvGraphicFramePr>
+          <p:cNvPr id="5" name="Diagram 4">
             <a:extLst>
               <a:ext uri="{FF2B5EF4-FFF2-40B4-BE49-F238E27FC236}">
-                <a16:creationId xmlns:a16="http://schemas.microsoft.com/office/drawing/2014/main" id="{E7E4F23F-232D-C75C-C3DE-6E6120F33B51}"/>
+                <a16:creationId xmlns:a16="http://schemas.microsoft.com/office/drawing/2014/main" id="{A5E3F56D-02AC-2EA7-BEE4-25A7ABAD130A}"/>
               </a:ext>
             </a:extLst>
           </p:cNvPr>
-          <p:cNvPicPr>
-            <a:picLocks noChangeAspect="1"/>
-          </p:cNvPicPr>
-          <p:nvPr/>
-        </p:nvPicPr>
-        <p:blipFill>
-          <a:blip r:embed="rId2"/>
-          <a:stretch>
-            <a:fillRect/>
-          </a:stretch>
-        </p:blipFill>
-        <p:spPr>
-          <a:xfrm>
-            <a:off x="1089808" y="1238459"/>
-            <a:ext cx="3918394" cy="4381082"/>
-          </a:xfrm>
-          <a:prstGeom prst="rect">
-            <a:avLst/>
-          </a:prstGeom>
-        </p:spPr>
-      </p:pic>
+          <p:cNvGraphicFramePr/>
+          <p:nvPr>
+            <p:extLst>
+              <p:ext uri="{D42A27DB-BD31-4B8C-83A1-F6EECF244321}">
+                <p14:modId xmlns:p14="http://schemas.microsoft.com/office/powerpoint/2010/main" val="3639851672"/>
+              </p:ext>
+            </p:extLst>
+          </p:nvPr>
+        </p:nvGraphicFramePr>
+        <p:xfrm>
+          <a:off x="934496" y="1232132"/>
+          <a:ext cx="10647904" cy="4093494"/>
+        </p:xfrm>
+        <a:graphic>
+          <a:graphicData uri="http://schemas.openxmlformats.org/drawingml/2006/diagram">
+            <dgm:relIds xmlns:dgm="http://schemas.openxmlformats.org/drawingml/2006/diagram" xmlns:r="http://schemas.openxmlformats.org/officeDocument/2006/relationships" r:dm="rId2" r:lo="rId3" r:qs="rId4" r:cs="rId5"/>
+          </a:graphicData>
+        </a:graphic>
+      </p:graphicFrame>
       <p:sp>
         <p:nvSpPr>
-          <p:cNvPr id="6" name="Rectangle 5">
+          <p:cNvPr id="6" name="Arrow: Right 5">
             <a:extLst>
               <a:ext uri="{FF2B5EF4-FFF2-40B4-BE49-F238E27FC236}">
-                <a16:creationId xmlns:a16="http://schemas.microsoft.com/office/drawing/2014/main" id="{18EDB9F5-8E5A-4A2B-4697-84BC1C3E3431}"/>
+                <a16:creationId xmlns:a16="http://schemas.microsoft.com/office/drawing/2014/main" id="{E0A43209-10A6-AD39-FFD5-14DE0491A2DD}"/>
               </a:ext>
             </a:extLst>
           </p:cNvPr>
@@ -16450,18 +21100,58 @@
         </p:nvSpPr>
         <p:spPr>
           <a:xfrm>
-            <a:off x="904352" y="1125415"/>
-            <a:ext cx="1336430" cy="462225"/>
+            <a:off x="3768132" y="2794247"/>
+            <a:ext cx="978408" cy="484632"/>
           </a:xfrm>
-          <a:prstGeom prst="rect">
+          <a:prstGeom prst="rightArrow">
             <a:avLst/>
           </a:prstGeom>
-          <a:noFill/>
-          <a:ln>
-            <a:solidFill>
-              <a:srgbClr val="FF0000"/>
-            </a:solidFill>
-          </a:ln>
+        </p:spPr>
+        <p:style>
+          <a:lnRef idx="2">
+            <a:schemeClr val="accent1">
+              <a:shade val="15000"/>
+            </a:schemeClr>
+          </a:lnRef>
+          <a:fillRef idx="1">
+            <a:schemeClr val="accent1"/>
+          </a:fillRef>
+          <a:effectRef idx="0">
+            <a:schemeClr val="accent1"/>
+          </a:effectRef>
+          <a:fontRef idx="minor">
+            <a:schemeClr val="lt1"/>
+          </a:fontRef>
+        </p:style>
+        <p:txBody>
+          <a:bodyPr rtlCol="0" anchor="ctr"/>
+          <a:lstStyle/>
+          <a:p>
+            <a:pPr algn="ctr"/>
+            <a:endParaRPr lang="en-US"/>
+          </a:p>
+        </p:txBody>
+      </p:sp>
+      <p:sp>
+        <p:nvSpPr>
+          <p:cNvPr id="7" name="Arrow: Right 6">
+            <a:extLst>
+              <a:ext uri="{FF2B5EF4-FFF2-40B4-BE49-F238E27FC236}">
+                <a16:creationId xmlns:a16="http://schemas.microsoft.com/office/drawing/2014/main" id="{847370E8-E29F-56E9-6E12-B5D494A35D94}"/>
+              </a:ext>
+            </a:extLst>
+          </p:cNvPr>
+          <p:cNvSpPr/>
+          <p:nvPr/>
+        </p:nvSpPr>
+        <p:spPr>
+          <a:xfrm rot="10800000">
+            <a:off x="7580176" y="2794247"/>
+            <a:ext cx="978408" cy="484632"/>
+          </a:xfrm>
+          <a:prstGeom prst="rightArrow">
+            <a:avLst/>
+          </a:prstGeom>
         </p:spPr>
         <p:style>
           <a:lnRef idx="2">
@@ -16491,7 +21181,7 @@
     </p:spTree>
     <p:extLst>
       <p:ext uri="{BB962C8B-B14F-4D97-AF65-F5344CB8AC3E}">
-        <p14:creationId xmlns:p14="http://schemas.microsoft.com/office/powerpoint/2010/main" val="1793856232"/>
+        <p14:creationId xmlns:p14="http://schemas.microsoft.com/office/powerpoint/2010/main" val="830435065"/>
       </p:ext>
     </p:extLst>
   </p:cSld>

--- a/Applied Econ Analysis HCRIS Presentation.pptx
+++ b/Applied Econ Analysis HCRIS Presentation.pptx
@@ -5,7 +5,7 @@
     <p:sldMasterId id="2147483653" r:id="rId1"/>
   </p:sldMasterIdLst>
   <p:notesMasterIdLst>
-    <p:notesMasterId r:id="rId26"/>
+    <p:notesMasterId r:id="rId27"/>
   </p:notesMasterIdLst>
   <p:sldIdLst>
     <p:sldId id="261" r:id="rId2"/>
@@ -30,8 +30,9 @@
     <p:sldId id="336" r:id="rId21"/>
     <p:sldId id="342" r:id="rId22"/>
     <p:sldId id="337" r:id="rId23"/>
-    <p:sldId id="339" r:id="rId24"/>
-    <p:sldId id="340" r:id="rId25"/>
+    <p:sldId id="343" r:id="rId24"/>
+    <p:sldId id="339" r:id="rId25"/>
+    <p:sldId id="340" r:id="rId26"/>
   </p:sldIdLst>
   <p:sldSz cx="12192000" cy="6858000"/>
   <p:notesSz cx="6858000" cy="9144000"/>
@@ -294,7 +295,7 @@
 <file path=ppt/revisionInfo.xml><?xml version="1.0" encoding="utf-8"?>
 <p1510:revInfo xmlns:a="http://schemas.openxmlformats.org/drawingml/2006/main" xmlns:r="http://schemas.openxmlformats.org/officeDocument/2006/relationships" xmlns:p1510="http://schemas.microsoft.com/office/powerpoint/2015/10/main">
   <p1510:revLst>
-    <p1510:client id="{36199A5D-9277-4804-85C6-255B79650EC9}" v="556" dt="2026-04-20T13:26:44.241"/>
+    <p1510:client id="{36199A5D-9277-4804-85C6-255B79650EC9}" v="557" dt="2026-04-20T13:38:38.861"/>
   </p1510:revLst>
 </p1510:revInfo>
 </file>
@@ -304,7 +305,7 @@
   <pc:docChgLst>
     <pc:chgData name="Maughan, Matthew" userId="5b506559-2742-4d2b-9b68-5b6ca2cdd9c0" providerId="ADAL" clId="{65F86579-F59A-44FA-B179-98A7BD5A0995}"/>
     <pc:docChg chg="undo custSel addSld delSld modSld sldOrd delMainMaster modMainMaster">
-      <pc:chgData name="Maughan, Matthew" userId="5b506559-2742-4d2b-9b68-5b6ca2cdd9c0" providerId="ADAL" clId="{65F86579-F59A-44FA-B179-98A7BD5A0995}" dt="2026-04-20T13:27:19.901" v="12718" actId="1582"/>
+      <pc:chgData name="Maughan, Matthew" userId="5b506559-2742-4d2b-9b68-5b6ca2cdd9c0" providerId="ADAL" clId="{65F86579-F59A-44FA-B179-98A7BD5A0995}" dt="2026-04-20T13:39:03.667" v="12804" actId="20577"/>
       <pc:docMkLst>
         <pc:docMk/>
       </pc:docMkLst>
@@ -2458,6 +2459,29 @@
             <ac:cxnSpMk id="22" creationId="{F9530F24-A264-A820-F7AD-B5523E410009}"/>
           </ac:cxnSpMkLst>
         </pc:cxnChg>
+      </pc:sldChg>
+      <pc:sldChg chg="modSp new mod">
+        <pc:chgData name="Maughan, Matthew" userId="5b506559-2742-4d2b-9b68-5b6ca2cdd9c0" providerId="ADAL" clId="{65F86579-F59A-44FA-B179-98A7BD5A0995}" dt="2026-04-20T13:39:03.667" v="12804" actId="20577"/>
+        <pc:sldMkLst>
+          <pc:docMk/>
+          <pc:sldMk cId="3140326322" sldId="343"/>
+        </pc:sldMkLst>
+        <pc:spChg chg="mod">
+          <ac:chgData name="Maughan, Matthew" userId="5b506559-2742-4d2b-9b68-5b6ca2cdd9c0" providerId="ADAL" clId="{65F86579-F59A-44FA-B179-98A7BD5A0995}" dt="2026-04-20T13:38:36.941" v="12756" actId="20577"/>
+          <ac:spMkLst>
+            <pc:docMk/>
+            <pc:sldMk cId="3140326322" sldId="343"/>
+            <ac:spMk id="2" creationId="{BA9D2654-5D17-3573-674F-F4CDF77A9500}"/>
+          </ac:spMkLst>
+        </pc:spChg>
+        <pc:spChg chg="mod">
+          <ac:chgData name="Maughan, Matthew" userId="5b506559-2742-4d2b-9b68-5b6ca2cdd9c0" providerId="ADAL" clId="{65F86579-F59A-44FA-B179-98A7BD5A0995}" dt="2026-04-20T13:39:03.667" v="12804" actId="20577"/>
+          <ac:spMkLst>
+            <pc:docMk/>
+            <pc:sldMk cId="3140326322" sldId="343"/>
+            <ac:spMk id="3" creationId="{518257CC-262A-1624-2E29-DC7E9937CE51}"/>
+          </ac:spMkLst>
+        </pc:spChg>
       </pc:sldChg>
       <pc:sldMasterChg chg="del delSldLayout">
         <pc:chgData name="Maughan, Matthew" userId="5b506559-2742-4d2b-9b68-5b6ca2cdd9c0" providerId="ADAL" clId="{65F86579-F59A-44FA-B179-98A7BD5A0995}" dt="2026-04-20T02:43:16.076" v="11762" actId="47"/>
@@ -16691,6 +16715,141 @@
           <p:cNvPr id="2" name="Title 1">
             <a:extLst>
               <a:ext uri="{FF2B5EF4-FFF2-40B4-BE49-F238E27FC236}">
+                <a16:creationId xmlns:a16="http://schemas.microsoft.com/office/drawing/2014/main" id="{BA9D2654-5D17-3573-674F-F4CDF77A9500}"/>
+              </a:ext>
+            </a:extLst>
+          </p:cNvPr>
+          <p:cNvSpPr>
+            <a:spLocks noGrp="1"/>
+          </p:cNvSpPr>
+          <p:nvPr>
+            <p:ph type="title"/>
+          </p:nvPr>
+        </p:nvSpPr>
+        <p:spPr/>
+        <p:txBody>
+          <a:bodyPr/>
+          <a:lstStyle/>
+          <a:p>
+            <a:r>
+              <a:rPr lang="en-US" dirty="0"/>
+              <a:t>Repo Folder Structure</a:t>
+            </a:r>
+          </a:p>
+        </p:txBody>
+      </p:sp>
+      <p:sp>
+        <p:nvSpPr>
+          <p:cNvPr id="3" name="Text Placeholder 2">
+            <a:extLst>
+              <a:ext uri="{FF2B5EF4-FFF2-40B4-BE49-F238E27FC236}">
+                <a16:creationId xmlns:a16="http://schemas.microsoft.com/office/drawing/2014/main" id="{518257CC-262A-1624-2E29-DC7E9937CE51}"/>
+              </a:ext>
+            </a:extLst>
+          </p:cNvPr>
+          <p:cNvSpPr>
+            <a:spLocks noGrp="1"/>
+          </p:cNvSpPr>
+          <p:nvPr>
+            <p:ph type="body" idx="1"/>
+          </p:nvPr>
+        </p:nvSpPr>
+        <p:spPr/>
+        <p:txBody>
+          <a:bodyPr>
+            <a:normAutofit fontScale="92500" lnSpcReduction="10000"/>
+          </a:bodyPr>
+          <a:lstStyle/>
+          <a:p>
+            <a:endParaRPr lang="en-US" dirty="0"/>
+          </a:p>
+          <a:p>
+            <a:r>
+              <a:rPr lang="en-US" dirty="0"/>
+              <a:t>/Source - these are unprocessed by any code in this repo. Both the data downloads above and the data I provide in my repo are here</a:t>
+            </a:r>
+          </a:p>
+          <a:p>
+            <a:r>
+              <a:rPr lang="en-US" dirty="0"/>
+              <a:t>/Intermediate - This is after processing but before outputs. These you will need to produce yourself from the code - as they are also too big to include </a:t>
+            </a:r>
+          </a:p>
+          <a:p>
+            <a:r>
+              <a:rPr lang="en-US" dirty="0"/>
+              <a:t>/Code </a:t>
+            </a:r>
+          </a:p>
+          <a:p>
+            <a:r>
+              <a:rPr lang="en-US" dirty="0"/>
+              <a:t>00_setup_file - this establishes directories</a:t>
+            </a:r>
+          </a:p>
+          <a:p>
+            <a:r>
+              <a:rPr lang="en-US" dirty="0"/>
+              <a:t>01_HCRIS_inspect - ensures data uploaded with correct fields, formats </a:t>
+            </a:r>
+            <a:r>
+              <a:rPr lang="en-US" dirty="0" err="1"/>
+              <a:t>etc</a:t>
+            </a:r>
+            <a:endParaRPr lang="en-US" dirty="0"/>
+          </a:p>
+          <a:p>
+            <a:r>
+              <a:rPr lang="en-US" dirty="0"/>
+              <a:t>02_import_cleanrpt – cleans and joins to analytical sample</a:t>
+            </a:r>
+          </a:p>
+          <a:p>
+            <a:r>
+              <a:rPr lang="en-US" dirty="0"/>
+              <a:t>03_working_rpt - this is the workhorse code file - all analysis and outputs done here</a:t>
+            </a:r>
+          </a:p>
+          <a:p>
+            <a:endParaRPr lang="en-US" dirty="0"/>
+          </a:p>
+        </p:txBody>
+      </p:sp>
+    </p:spTree>
+    <p:extLst>
+      <p:ext uri="{BB962C8B-B14F-4D97-AF65-F5344CB8AC3E}">
+        <p14:creationId xmlns:p14="http://schemas.microsoft.com/office/powerpoint/2010/main" val="3140326322"/>
+      </p:ext>
+    </p:extLst>
+  </p:cSld>
+  <p:clrMapOvr>
+    <a:masterClrMapping/>
+  </p:clrMapOvr>
+</p:sld>
+</file>
+
+<file path=ppt/slides/slide24.xml><?xml version="1.0" encoding="utf-8"?>
+<p:sld xmlns:a="http://schemas.openxmlformats.org/drawingml/2006/main" xmlns:r="http://schemas.openxmlformats.org/officeDocument/2006/relationships" xmlns:p="http://schemas.openxmlformats.org/presentationml/2006/main">
+  <p:cSld>
+    <p:spTree>
+      <p:nvGrpSpPr>
+        <p:cNvPr id="1" name=""/>
+        <p:cNvGrpSpPr/>
+        <p:nvPr/>
+      </p:nvGrpSpPr>
+      <p:grpSpPr>
+        <a:xfrm>
+          <a:off x="0" y="0"/>
+          <a:ext cx="0" cy="0"/>
+          <a:chOff x="0" y="0"/>
+          <a:chExt cx="0" cy="0"/>
+        </a:xfrm>
+      </p:grpSpPr>
+      <p:sp>
+        <p:nvSpPr>
+          <p:cNvPr id="2" name="Title 1">
+            <a:extLst>
+              <a:ext uri="{FF2B5EF4-FFF2-40B4-BE49-F238E27FC236}">
                 <a16:creationId xmlns:a16="http://schemas.microsoft.com/office/drawing/2014/main" id="{6258F03B-7F21-273F-6152-AA0056837C55}"/>
               </a:ext>
             </a:extLst>
@@ -16762,7 +16921,7 @@
 </p:sld>
 </file>
 
-<file path=ppt/slides/slide24.xml><?xml version="1.0" encoding="utf-8"?>
+<file path=ppt/slides/slide25.xml><?xml version="1.0" encoding="utf-8"?>
 <p:sld xmlns:a="http://schemas.openxmlformats.org/drawingml/2006/main" xmlns:r="http://schemas.openxmlformats.org/officeDocument/2006/relationships" xmlns:p="http://schemas.openxmlformats.org/presentationml/2006/main">
   <p:cSld>
     <p:spTree>
